--- a/docs/presentation/SalaryBridge.pptx
+++ b/docs/presentation/SalaryBridge.pptx
@@ -4,6 +4,9 @@
   <p:sldMasterIdLst>
     <p:sldMasterId id="2147483648" r:id="rId1"/>
   </p:sldMasterIdLst>
+  <p:notesMasterIdLst>
+    <p:notesMasterId r:id="rId12"/>
+  </p:notesMasterIdLst>
   <p:sldIdLst>
     <p:sldId id="256" r:id="rId2"/>
     <p:sldId id="257" r:id="rId3"/>
@@ -16,9 +19,6 @@
     <p:sldId id="264" r:id="rId10"/>
     <p:sldId id="265" r:id="rId11"/>
   </p:sldIdLst>
-  <p:notesMasterIdLst>
-    <p:notesMasterId r:id="rId12"/>
-  </p:notesMasterIdLst>
   <p:sldSz cx="12192000" cy="6858000"/>
   <p:notesSz cx="6858000" cy="12192000"/>
   <p:defaultTextStyle>
@@ -116,36 +116,36 @@
   <p:extLst>
     <p:ext uri="{521415D9-36F7-43E2-AB2F-B90AF26B5E84}">
       <p14:sectionLst xmlns:p14="http://schemas.microsoft.com/office/powerpoint/2010/main">
-        <p14:section name="Opening" id="{d18a7f21-9462-de54-ccec-ac6feb9efd91}">
+        <p14:section name="Opening" id="{D18A7F21-9462-DE54-CCEC-AC6FEB9EFD91}">
           <p14:sldIdLst>
             <p14:sldId id="256"/>
           </p14:sldIdLst>
         </p14:section>
-        <p14:section name="Problem and solution" id="{71d26c67-a901-4c1f-80ce-48d9dc5f1c65}">
+        <p14:section name="Problem and solution" id="{71D26C67-A901-4C1F-80CE-48D9DC5F1C65}">
           <p14:sldIdLst>
             <p14:sldId id="257"/>
             <p14:sldId id="258"/>
           </p14:sldIdLst>
         </p14:section>
-        <p14:section name="Product" id="{5cf44f83-c04c-e050-426d-48a165979749}">
+        <p14:section name="Product" id="{5CF44F83-C04C-E050-426D-48A165979749}">
           <p14:sldIdLst>
             <p14:sldId id="259"/>
             <p14:sldId id="260"/>
           </p14:sldIdLst>
         </p14:section>
-        <p14:section name="AI and evidence" id="{ad92f148-ecb1-2634-f3bf-634b30691364}">
+        <p14:section name="AI and evidence" id="{AD92F148-ECB1-2634-F3BF-634B30691364}">
           <p14:sldIdLst>
             <p14:sldId id="261"/>
             <p14:sldId id="262"/>
           </p14:sldIdLst>
         </p14:section>
-        <p14:section name="Trust and business" id="{aaf4935a-b7c2-7baf-b513-6e3b81aa9dc4}">
+        <p14:section name="Trust and business" id="{AAF4935A-B7C2-7BAF-B513-6E3B81AA9DC4}">
           <p14:sldIdLst>
             <p14:sldId id="263"/>
             <p14:sldId id="264"/>
           </p14:sldIdLst>
         </p14:section>
-        <p14:section name="Close" id="{d2572bef-1f96-95b2-e86e-fce2df220a0c}">
+        <p14:section name="Close" id="{D2572BEF-1F96-95B2-E86E-FCE2DF220A0C}">
           <p14:sldIdLst>
             <p14:sldId id="265"/>
           </p14:sldIdLst>
@@ -160,9 +160,11 @@
 </file>
 
 <file path=ppt/charts/chart1.xml><?xml version="1.0" encoding="utf-8"?>
-<c:chartSpace xmlns:c="http://schemas.openxmlformats.org/drawingml/2006/chart" xmlns:a="http://schemas.openxmlformats.org/drawingml/2006/main" xmlns:r="http://schemas.openxmlformats.org/officeDocument/2006/relationships">
+<c:chartSpace xmlns:c="http://schemas.openxmlformats.org/drawingml/2006/chart" xmlns:a="http://schemas.openxmlformats.org/drawingml/2006/main" xmlns:r="http://schemas.openxmlformats.org/officeDocument/2006/relationships" xmlns:c16r2="http://schemas.microsoft.com/office/drawing/2015/06/chart">
   <c:date1904 val="0"/>
+  <c:lang val="en-US"/>
   <c:roundedCorners val="1"/>
+  <c:style val="2"/>
   <c:chart>
     <c:title>
       <c:tx>
@@ -179,7 +181,7 @@
               </a:defRPr>
             </a:pPr>
             <a:r>
-              <a:rPr sz="1400" b="0" i="0" u="none" strike="noStrike">
+              <a:rPr lang="en-GB" sz="1400" b="0" i="0" u="none" strike="noStrike">
                 <a:solidFill>
                   <a:srgbClr val="15232D"/>
                 </a:solidFill>
@@ -190,7 +192,6 @@
           </a:p>
         </c:rich>
       </c:tx>
-      <c:layout/>
       <c:overlay val="0"/>
     </c:title>
     <c:autoTitleDeleted val="0"/>
@@ -223,18 +224,26 @@
           <c:invertIfNegative val="0"/>
           <c:dLbls>
             <c:numFmt formatCode="0.00&quot;%&quot;" sourceLinked="0"/>
+            <c:spPr>
+              <a:noFill/>
+              <a:ln>
+                <a:noFill/>
+              </a:ln>
+              <a:effectLst/>
+            </c:spPr>
             <c:txPr>
               <a:bodyPr/>
               <a:lstStyle/>
               <a:p>
                 <a:pPr>
-                  <a:defRPr b="0" i="0" strike="noStrike" sz="1300" u="none">
+                  <a:defRPr sz="1300" b="0" i="0" u="none" strike="noStrike">
                     <a:solidFill>
                       <a:srgbClr val="15232D"/>
                     </a:solidFill>
                     <a:latin typeface="+mn-lt"/>
                   </a:defRPr>
                 </a:pPr>
+                <a:endParaRPr lang="en-US"/>
               </a:p>
             </c:txPr>
             <c:showLegendKey val="0"/>
@@ -244,22 +253,25 @@
             <c:showPercent val="0"/>
             <c:showBubbleSize val="0"/>
             <c:showLeaderLines val="0"/>
+            <c:extLst>
+              <c:ext xmlns:c15="http://schemas.microsoft.com/office/drawing/2012/chart" uri="{CE6537A1-D6FC-4f65-9D91-7224C49458BB}">
+                <c15:showLeaderLines val="0"/>
+              </c:ext>
+            </c:extLst>
           </c:dLbls>
           <c:cat>
-            <c:multiLvlStrRef>
+            <c:strRef>
               <c:f>Sheet1!$A$2:$A$3</c:f>
-              <c:multiLvlStrCache>
+              <c:strCache>
                 <c:ptCount val="2"/>
-                <c:lvl>
-                  <c:pt idx="0">
-                    <c:v>Profile A · training world</c:v>
-                  </c:pt>
-                  <c:pt idx="1">
-                    <c:v>Profile B · harsher stress world</c:v>
-                  </c:pt>
-                </c:lvl>
-              </c:multiLvlStrCache>
-            </c:multiLvlStrRef>
+                <c:pt idx="0">
+                  <c:v>Profile A · training world</c:v>
+                </c:pt>
+                <c:pt idx="1">
+                  <c:v>Profile B · harsher stress world</c:v>
+                </c:pt>
+              </c:strCache>
+            </c:strRef>
           </c:cat>
           <c:val>
             <c:numRef>
@@ -276,6 +288,11 @@
               </c:numCache>
             </c:numRef>
           </c:val>
+          <c:extLst>
+            <c:ext xmlns:c16="http://schemas.microsoft.com/office/drawing/2014/chart" uri="{C3380CC4-5D6E-409C-BE32-E72D297353CC}">
+              <c16:uniqueId val="{00000000-06E6-44F6-BE30-9B5377DE63D3}"/>
+            </c:ext>
+          </c:extLst>
         </c:ser>
         <c:ser>
           <c:idx val="1"/>
@@ -300,18 +317,26 @@
           <c:invertIfNegative val="0"/>
           <c:dLbls>
             <c:numFmt formatCode="0.00&quot;%&quot;" sourceLinked="0"/>
+            <c:spPr>
+              <a:noFill/>
+              <a:ln>
+                <a:noFill/>
+              </a:ln>
+              <a:effectLst/>
+            </c:spPr>
             <c:txPr>
               <a:bodyPr/>
               <a:lstStyle/>
               <a:p>
                 <a:pPr>
-                  <a:defRPr b="0" i="0" strike="noStrike" sz="1300" u="none">
+                  <a:defRPr sz="1300" b="0" i="0" u="none" strike="noStrike">
                     <a:solidFill>
                       <a:srgbClr val="15232D"/>
                     </a:solidFill>
                     <a:latin typeface="+mn-lt"/>
                   </a:defRPr>
                 </a:pPr>
+                <a:endParaRPr lang="en-US"/>
               </a:p>
             </c:txPr>
             <c:showLegendKey val="0"/>
@@ -321,22 +346,25 @@
             <c:showPercent val="0"/>
             <c:showBubbleSize val="0"/>
             <c:showLeaderLines val="0"/>
+            <c:extLst>
+              <c:ext xmlns:c15="http://schemas.microsoft.com/office/drawing/2012/chart" uri="{CE6537A1-D6FC-4f65-9D91-7224C49458BB}">
+                <c15:showLeaderLines val="0"/>
+              </c:ext>
+            </c:extLst>
           </c:dLbls>
           <c:cat>
-            <c:multiLvlStrRef>
+            <c:strRef>
               <c:f>Sheet1!$A$2:$A$3</c:f>
-              <c:multiLvlStrCache>
+              <c:strCache>
                 <c:ptCount val="2"/>
-                <c:lvl>
-                  <c:pt idx="0">
-                    <c:v>Profile A · training world</c:v>
-                  </c:pt>
-                  <c:pt idx="1">
-                    <c:v>Profile B · harsher stress world</c:v>
-                  </c:pt>
-                </c:lvl>
-              </c:multiLvlStrCache>
-            </c:multiLvlStrRef>
+                <c:pt idx="0">
+                  <c:v>Profile A · training world</c:v>
+                </c:pt>
+                <c:pt idx="1">
+                  <c:v>Profile B · harsher stress world</c:v>
+                </c:pt>
+              </c:strCache>
+            </c:strRef>
           </c:cat>
           <c:val>
             <c:numRef>
@@ -353,36 +381,23 @@
               </c:numCache>
             </c:numRef>
           </c:val>
+          <c:extLst>
+            <c:ext xmlns:c16="http://schemas.microsoft.com/office/drawing/2014/chart" uri="{C3380CC4-5D6E-409C-BE32-E72D297353CC}">
+              <c16:uniqueId val="{00000001-06E6-44F6-BE30-9B5377DE63D3}"/>
+            </c:ext>
+          </c:extLst>
         </c:ser>
         <c:dLbls>
-          <c:numFmt formatCode="0.00&quot;%&quot;" sourceLinked="0"/>
-          <c:txPr>
-            <a:bodyPr/>
-            <a:lstStyle/>
-            <a:p>
-              <a:pPr>
-                <a:defRPr b="0" i="0" strike="noStrike" sz="1300" u="none">
-                  <a:solidFill>
-                    <a:srgbClr val="15232D"/>
-                  </a:solidFill>
-                  <a:latin typeface="+mn-lt"/>
-                </a:defRPr>
-              </a:pPr>
-            </a:p>
-          </c:txPr>
           <c:showLegendKey val="0"/>
           <c:showVal val="1"/>
           <c:showCatName val="0"/>
           <c:showSerName val="0"/>
           <c:showPercent val="0"/>
           <c:showBubbleSize val="0"/>
-          <c:showLeaderLines val="0"/>
         </c:dLbls>
         <c:gapWidth val="60"/>
-        <c:overlap val="0"/>
         <c:axId val="2094734554"/>
         <c:axId val="2094734552"/>
-        <c:axId val="2094734556"/>
       </c:barChart>
       <c:catAx>
         <c:axId val="2094734554"/>
@@ -421,6 +436,7 @@
         <c:crosses val="autoZero"/>
         <c:auto val="1"/>
         <c:lblAlgn val="ctr"/>
+        <c:lblOffset val="100"/>
         <c:noMultiLvlLbl val="1"/>
       </c:catAx>
       <c:valAx>
@@ -436,30 +452,6 @@
         <c:majorTickMark val="out"/>
         <c:minorTickMark val="none"/>
         <c:tickLblPos val="nextTo"/>
-        <c:spPr>
-          <a:ln w="12700" cap="flat">
-            <a:solidFill>
-              <a:srgbClr val="888888"/>
-            </a:solidFill>
-            <a:prstDash val="solid"/>
-            <a:round/>
-          </a:ln>
-        </c:spPr>
-        <c:txPr>
-          <a:bodyPr/>
-          <a:lstStyle/>
-          <a:p>
-            <a:pPr>
-              <a:defRPr sz="1200" b="0" i="0" u="none" strike="noStrike">
-                <a:solidFill>
-                  <a:srgbClr val="000000"/>
-                </a:solidFill>
-                <a:latin typeface="Arial"/>
-              </a:defRPr>
-            </a:pPr>
-            <a:endParaRPr lang="en-US"/>
-          </a:p>
-        </c:txPr>
         <c:crossAx val="2094734554"/>
         <c:crosses val="autoZero"/>
         <c:crossBetween val="between"/>
@@ -494,6 +486,7 @@
     </c:legend>
     <c:plotVisOnly val="1"/>
     <c:dispBlanksAs val="span"/>
+    <c:showDLblsOverMax val="1"/>
   </c:chart>
   <c:spPr>
     <a:noFill/>
@@ -509,9 +502,11 @@
 </file>
 
 <file path=ppt/charts/chart2.xml><?xml version="1.0" encoding="utf-8"?>
-<c:chartSpace xmlns:c="http://schemas.openxmlformats.org/drawingml/2006/chart" xmlns:a="http://schemas.openxmlformats.org/drawingml/2006/main" xmlns:r="http://schemas.openxmlformats.org/officeDocument/2006/relationships">
+<c:chartSpace xmlns:c="http://schemas.openxmlformats.org/drawingml/2006/chart" xmlns:a="http://schemas.openxmlformats.org/drawingml/2006/main" xmlns:r="http://schemas.openxmlformats.org/officeDocument/2006/relationships" xmlns:c16r2="http://schemas.microsoft.com/office/drawing/2015/06/chart">
   <c:date1904 val="0"/>
+  <c:lang val="en-US"/>
   <c:roundedCorners val="1"/>
+  <c:style val="2"/>
   <c:chart>
     <c:title>
       <c:tx>
@@ -528,7 +523,7 @@
               </a:defRPr>
             </a:pPr>
             <a:r>
-              <a:rPr sz="1400" b="0" i="0" u="none" strike="noStrike">
+              <a:rPr lang="en-GB" sz="1400" b="0" i="0" u="none" strike="noStrike">
                 <a:solidFill>
                   <a:srgbClr val="15232D"/>
                 </a:solidFill>
@@ -539,7 +534,6 @@
           </a:p>
         </c:rich>
       </c:tx>
-      <c:layout/>
       <c:overlay val="0"/>
     </c:title>
     <c:autoTitleDeleted val="0"/>
@@ -572,18 +566,26 @@
           <c:invertIfNegative val="0"/>
           <c:dLbls>
             <c:numFmt formatCode="&quot;৳&quot;#,##0;;" sourceLinked="0"/>
+            <c:spPr>
+              <a:noFill/>
+              <a:ln>
+                <a:noFill/>
+              </a:ln>
+              <a:effectLst/>
+            </c:spPr>
             <c:txPr>
               <a:bodyPr/>
               <a:lstStyle/>
               <a:p>
                 <a:pPr>
-                  <a:defRPr b="0" i="0" strike="noStrike" sz="1200" u="none">
+                  <a:defRPr sz="1200" b="0" i="0" u="none" strike="noStrike">
                     <a:solidFill>
                       <a:srgbClr val="15232D"/>
                     </a:solidFill>
                     <a:latin typeface="+mn-lt"/>
                   </a:defRPr>
                 </a:pPr>
+                <a:endParaRPr lang="en-US"/>
               </a:p>
             </c:txPr>
             <c:dLblPos val="inEnd"/>
@@ -594,31 +596,34 @@
             <c:showPercent val="0"/>
             <c:showBubbleSize val="0"/>
             <c:showLeaderLines val="0"/>
+            <c:extLst>
+              <c:ext xmlns:c15="http://schemas.microsoft.com/office/drawing/2012/chart" uri="{CE6537A1-D6FC-4f65-9D91-7224C49458BB}">
+                <c15:showLeaderLines val="0"/>
+              </c:ext>
+            </c:extLst>
           </c:dLbls>
           <c:cat>
-            <c:multiLvlStrRef>
+            <c:strRef>
               <c:f>Sheet1!$A$2:$A$6</c:f>
-              <c:multiLvlStrCache>
+              <c:strCache>
                 <c:ptCount val="5"/>
-                <c:lvl>
-                  <c:pt idx="0">
-                    <c:v>Fee revenue</c:v>
-                  </c:pt>
-                  <c:pt idx="1">
-                    <c:v>Credit loss</c:v>
-                  </c:pt>
-                  <c:pt idx="2">
-                    <c:v>Capital cost</c:v>
-                  </c:pt>
-                  <c:pt idx="3">
-                    <c:v>Idle buffer</c:v>
-                  </c:pt>
-                  <c:pt idx="4">
-                    <c:v>Operations</c:v>
-                  </c:pt>
-                </c:lvl>
-              </c:multiLvlStrCache>
-            </c:multiLvlStrRef>
+                <c:pt idx="0">
+                  <c:v>Fee revenue</c:v>
+                </c:pt>
+                <c:pt idx="1">
+                  <c:v>Credit loss</c:v>
+                </c:pt>
+                <c:pt idx="2">
+                  <c:v>Capital cost</c:v>
+                </c:pt>
+                <c:pt idx="3">
+                  <c:v>Idle buffer</c:v>
+                </c:pt>
+                <c:pt idx="4">
+                  <c:v>Operations</c:v>
+                </c:pt>
+              </c:strCache>
+            </c:strRef>
           </c:cat>
           <c:val>
             <c:numRef>
@@ -644,6 +649,11 @@
               </c:numCache>
             </c:numRef>
           </c:val>
+          <c:extLst>
+            <c:ext xmlns:c16="http://schemas.microsoft.com/office/drawing/2014/chart" uri="{C3380CC4-5D6E-409C-BE32-E72D297353CC}">
+              <c16:uniqueId val="{00000000-CA8A-431A-8174-D54E3A05FE6C}"/>
+            </c:ext>
+          </c:extLst>
         </c:ser>
         <c:ser>
           <c:idx val="1"/>
@@ -668,18 +678,26 @@
           <c:invertIfNegative val="0"/>
           <c:dLbls>
             <c:numFmt formatCode="&quot;৳&quot;#,##0;;" sourceLinked="0"/>
+            <c:spPr>
+              <a:noFill/>
+              <a:ln>
+                <a:noFill/>
+              </a:ln>
+              <a:effectLst/>
+            </c:spPr>
             <c:txPr>
               <a:bodyPr/>
               <a:lstStyle/>
               <a:p>
                 <a:pPr>
-                  <a:defRPr b="0" i="0" strike="noStrike" sz="1200" u="none">
+                  <a:defRPr sz="1200" b="0" i="0" u="none" strike="noStrike">
                     <a:solidFill>
                       <a:srgbClr val="15232D"/>
                     </a:solidFill>
                     <a:latin typeface="+mn-lt"/>
                   </a:defRPr>
                 </a:pPr>
+                <a:endParaRPr lang="en-US"/>
               </a:p>
             </c:txPr>
             <c:dLblPos val="inEnd"/>
@@ -690,31 +708,34 @@
             <c:showPercent val="0"/>
             <c:showBubbleSize val="0"/>
             <c:showLeaderLines val="0"/>
+            <c:extLst>
+              <c:ext xmlns:c15="http://schemas.microsoft.com/office/drawing/2012/chart" uri="{CE6537A1-D6FC-4f65-9D91-7224C49458BB}">
+                <c15:showLeaderLines val="0"/>
+              </c:ext>
+            </c:extLst>
           </c:dLbls>
           <c:cat>
-            <c:multiLvlStrRef>
+            <c:strRef>
               <c:f>Sheet1!$A$2:$A$6</c:f>
-              <c:multiLvlStrCache>
+              <c:strCache>
                 <c:ptCount val="5"/>
-                <c:lvl>
-                  <c:pt idx="0">
-                    <c:v>Fee revenue</c:v>
-                  </c:pt>
-                  <c:pt idx="1">
-                    <c:v>Credit loss</c:v>
-                  </c:pt>
-                  <c:pt idx="2">
-                    <c:v>Capital cost</c:v>
-                  </c:pt>
-                  <c:pt idx="3">
-                    <c:v>Idle buffer</c:v>
-                  </c:pt>
-                  <c:pt idx="4">
-                    <c:v>Operations</c:v>
-                  </c:pt>
-                </c:lvl>
-              </c:multiLvlStrCache>
-            </c:multiLvlStrRef>
+                <c:pt idx="0">
+                  <c:v>Fee revenue</c:v>
+                </c:pt>
+                <c:pt idx="1">
+                  <c:v>Credit loss</c:v>
+                </c:pt>
+                <c:pt idx="2">
+                  <c:v>Capital cost</c:v>
+                </c:pt>
+                <c:pt idx="3">
+                  <c:v>Idle buffer</c:v>
+                </c:pt>
+                <c:pt idx="4">
+                  <c:v>Operations</c:v>
+                </c:pt>
+              </c:strCache>
+            </c:strRef>
           </c:cat>
           <c:val>
             <c:numRef>
@@ -740,23 +761,13 @@
               </c:numCache>
             </c:numRef>
           </c:val>
+          <c:extLst>
+            <c:ext xmlns:c16="http://schemas.microsoft.com/office/drawing/2014/chart" uri="{C3380CC4-5D6E-409C-BE32-E72D297353CC}">
+              <c16:uniqueId val="{00000001-CA8A-431A-8174-D54E3A05FE6C}"/>
+            </c:ext>
+          </c:extLst>
         </c:ser>
         <c:dLbls>
-          <c:numFmt formatCode="&quot;৳&quot;#,##0;;" sourceLinked="0"/>
-          <c:txPr>
-            <a:bodyPr/>
-            <a:lstStyle/>
-            <a:p>
-              <a:pPr>
-                <a:defRPr b="0" i="0" strike="noStrike" sz="1200" u="none">
-                  <a:solidFill>
-                    <a:srgbClr val="15232D"/>
-                  </a:solidFill>
-                  <a:latin typeface="+mn-lt"/>
-                </a:defRPr>
-              </a:pPr>
-            </a:p>
-          </c:txPr>
           <c:dLblPos val="inEnd"/>
           <c:showLegendKey val="0"/>
           <c:showVal val="1"/>
@@ -764,13 +775,11 @@
           <c:showSerName val="0"/>
           <c:showPercent val="0"/>
           <c:showBubbleSize val="0"/>
-          <c:showLeaderLines val="0"/>
         </c:dLbls>
         <c:gapWidth val="55"/>
         <c:overlap val="100"/>
         <c:axId val="2094734554"/>
         <c:axId val="2094734552"/>
-        <c:axId val="2094734556"/>
       </c:barChart>
       <c:catAx>
         <c:axId val="2094734554"/>
@@ -811,6 +820,7 @@
         <c:crosses val="autoZero"/>
         <c:auto val="1"/>
         <c:lblAlgn val="ctr"/>
+        <c:lblOffset val="100"/>
         <c:noMultiLvlLbl val="1"/>
       </c:catAx>
       <c:valAx>
@@ -893,6 +903,7 @@
     </c:legend>
     <c:plotVisOnly val="1"/>
     <c:dispBlanksAs val="span"/>
+    <c:showDLblsOverMax val="1"/>
   </c:chart>
   <c:spPr>
     <a:noFill/>
@@ -929,234 +940,10 @@
           <a:chExt cx="0" cy="0"/>
         </a:xfrm>
       </p:grpSpPr>
-      <p:sp>
-        <p:nvSpPr>
-          <p:cNvPr id="2" name="Header Placeholder 1"/>
-          <p:cNvSpPr>
-            <a:spLocks noGrp="1"/>
-          </p:cNvSpPr>
-          <p:nvPr>
-            <p:ph type="hdr" sz="quarter"/>
-          </p:nvPr>
-        </p:nvSpPr>
-        <p:spPr>
-          <a:xfrm>
-            <a:off x="0" y="0"/>
-            <a:ext cx="2971800" cy="458788"/>
-          </a:xfrm>
-          <a:prstGeom prst="rect">
-            <a:avLst/>
-          </a:prstGeom>
-        </p:spPr>
-        <p:txBody>
-          <a:bodyPr vert="horz" lIns="91440" tIns="45720" rIns="91440" bIns="45720" rtlCol="0"/>
-          <a:lstStyle>
-            <a:lvl1pPr algn="l">
-              <a:defRPr sz="1200"/>
-            </a:lvl1pPr>
-          </a:lstStyle>
-          <a:p>
-            <a:endParaRPr lang="en-US"/>
-          </a:p>
-        </p:txBody>
-      </p:sp>
-      <p:sp>
-        <p:nvSpPr>
-          <p:cNvPr id="3" name="Date Placeholder 2"/>
-          <p:cNvSpPr>
-            <a:spLocks noGrp="1"/>
-          </p:cNvSpPr>
-          <p:nvPr>
-            <p:ph type="dt" idx="1"/>
-          </p:nvPr>
-        </p:nvSpPr>
-        <p:spPr>
-          <a:xfrm>
-            <a:off x="3884613" y="0"/>
-            <a:ext cx="2971800" cy="458788"/>
-          </a:xfrm>
-          <a:prstGeom prst="rect">
-            <a:avLst/>
-          </a:prstGeom>
-        </p:spPr>
-        <p:txBody>
-          <a:bodyPr vert="horz" lIns="91440" tIns="45720" rIns="91440" bIns="45720" rtlCol="0"/>
-          <a:lstStyle>
-            <a:lvl1pPr algn="r">
-              <a:defRPr sz="1200"/>
-            </a:lvl1pPr>
-          </a:lstStyle>
-          <a:p>
-            <a:fld id="{5282F153-3F37-0F45-9E97-73ACFA13230C}" type="datetimeFigureOut">
-              <a:rPr lang="en-US"/>
-              <a:t>7/23/19</a:t>
-            </a:fld>
-            <a:endParaRPr lang="en-US"/>
-          </a:p>
-        </p:txBody>
-      </p:sp>
-      <p:sp>
-        <p:nvSpPr>
-          <p:cNvPr id="4" name="Slide Image Placeholder 3"/>
-          <p:cNvSpPr>
-            <a:spLocks noGrp="1" noRot="1" noChangeAspect="1"/>
-          </p:cNvSpPr>
-          <p:nvPr>
-            <p:ph type="sldImg" idx="2"/>
-          </p:nvPr>
-        </p:nvSpPr>
-        <p:spPr>
-          <a:xfrm>
-            <a:off x="685800" y="1143000"/>
-            <a:ext cx="5486400" cy="3086100"/>
-          </a:xfrm>
-          <a:prstGeom prst="rect">
-            <a:avLst/>
-          </a:prstGeom>
-          <a:noFill/>
-          <a:ln w="12700">
-            <a:solidFill>
-              <a:prstClr val="black"/>
-            </a:solidFill>
-          </a:ln>
-        </p:spPr>
-        <p:txBody>
-          <a:bodyPr vert="horz" lIns="91440" tIns="45720" rIns="91440" bIns="45720" rtlCol="0" anchor="ctr"/>
-          <a:lstStyle/>
-          <a:p>
-            <a:endParaRPr lang="en-US"/>
-          </a:p>
-        </p:txBody>
-      </p:sp>
-      <p:sp>
-        <p:nvSpPr>
-          <p:cNvPr id="5" name="Notes Placeholder 4"/>
-          <p:cNvSpPr>
-            <a:spLocks noGrp="1"/>
-          </p:cNvSpPr>
-          <p:nvPr>
-            <p:ph type="body" sz="quarter" idx="3"/>
-          </p:nvPr>
-        </p:nvSpPr>
-        <p:spPr>
-          <a:xfrm>
-            <a:off x="685800" y="4400550"/>
-            <a:ext cx="5486400" cy="3600450"/>
-          </a:xfrm>
-          <a:prstGeom prst="rect">
-            <a:avLst/>
-          </a:prstGeom>
-        </p:spPr>
-        <p:txBody>
-          <a:bodyPr vert="horz" lIns="91440" tIns="45720" rIns="91440" bIns="45720" rtlCol="0"/>
-          <a:lstStyle/>
-          <a:p>
-            <a:pPr lvl="0"/>
-            <a:r>
-              <a:rPr lang="en-US"/>
-              <a:t>Click to edit Master text styles</a:t>
-            </a:r>
-          </a:p>
-          <a:p>
-            <a:pPr lvl="1"/>
-            <a:r>
-              <a:rPr lang="en-US"/>
-              <a:t>Second level</a:t>
-            </a:r>
-          </a:p>
-          <a:p>
-            <a:pPr lvl="2"/>
-            <a:r>
-              <a:rPr lang="en-US"/>
-              <a:t>Third level</a:t>
-            </a:r>
-          </a:p>
-          <a:p>
-            <a:pPr lvl="3"/>
-            <a:r>
-              <a:rPr lang="en-US"/>
-              <a:t>Fourth level</a:t>
-            </a:r>
-          </a:p>
-          <a:p>
-            <a:pPr lvl="4"/>
-            <a:r>
-              <a:rPr lang="en-US"/>
-              <a:t>Fifth level</a:t>
-            </a:r>
-          </a:p>
-        </p:txBody>
-      </p:sp>
-      <p:sp>
-        <p:nvSpPr>
-          <p:cNvPr id="6" name="Footer Placeholder 5"/>
-          <p:cNvSpPr>
-            <a:spLocks noGrp="1"/>
-          </p:cNvSpPr>
-          <p:nvPr>
-            <p:ph type="ftr" sz="quarter" idx="4"/>
-          </p:nvPr>
-        </p:nvSpPr>
-        <p:spPr>
-          <a:xfrm>
-            <a:off x="0" y="8685213"/>
-            <a:ext cx="2971800" cy="458787"/>
-          </a:xfrm>
-          <a:prstGeom prst="rect">
-            <a:avLst/>
-          </a:prstGeom>
-        </p:spPr>
-        <p:txBody>
-          <a:bodyPr vert="horz" lIns="91440" tIns="45720" rIns="91440" bIns="45720" rtlCol="0" anchor="b"/>
-          <a:lstStyle>
-            <a:lvl1pPr algn="l">
-              <a:defRPr sz="1200"/>
-            </a:lvl1pPr>
-          </a:lstStyle>
-          <a:p>
-            <a:endParaRPr lang="en-US"/>
-          </a:p>
-        </p:txBody>
-      </p:sp>
-      <p:sp>
-        <p:nvSpPr>
-          <p:cNvPr id="7" name="Slide Number Placeholder 6"/>
-          <p:cNvSpPr>
-            <a:spLocks noGrp="1"/>
-          </p:cNvSpPr>
-          <p:nvPr>
-            <p:ph type="sldNum" sz="quarter" idx="5"/>
-          </p:nvPr>
-        </p:nvSpPr>
-        <p:spPr>
-          <a:xfrm>
-            <a:off x="3884613" y="8685213"/>
-            <a:ext cx="2971800" cy="458787"/>
-          </a:xfrm>
-          <a:prstGeom prst="rect">
-            <a:avLst/>
-          </a:prstGeom>
-        </p:spPr>
-        <p:txBody>
-          <a:bodyPr vert="horz" lIns="91440" tIns="45720" rIns="91440" bIns="45720" rtlCol="0" anchor="b"/>
-          <a:lstStyle>
-            <a:lvl1pPr algn="r">
-              <a:defRPr sz="1200"/>
-            </a:lvl1pPr>
-          </a:lstStyle>
-          <a:p>
-            <a:fld id="{CE5E9CC1-C706-0F49-92D6-E571CC5EEA8F}" type="slidenum">
-              <a:rPr lang="en-US"/>
-              <a:t>‹#›</a:t>
-            </a:fld>
-            <a:endParaRPr lang="en-US"/>
-          </a:p>
-        </p:txBody>
-      </p:sp>
     </p:spTree>
     <p:extLst>
       <p:ext uri="{BB962C8B-B14F-4D97-AF65-F5344CB8AC3E}">
-        <p14:creationId xmlns:p14="http://schemas.microsoft.com/office/powerpoint/2010/main" val="1024086991"/>
+        <p14:creationId xmlns:p14="http://schemas.microsoft.com/office/powerpoint/2010/main" val="1363801879"/>
       </p:ext>
     </p:extLst>
   </p:cSld>
@@ -1304,7 +1091,6 @@
               <a:rPr lang="en-US" dirty="0"/>
               <a:t>Open with the one-line promise: workers reach wages they have already earned, inside upay, before payday. Replace the team placeholders before presenting. All data in the demo is synthetic.</a:t>
             </a:r>
-            <a:endParaRPr lang="en-US" dirty="0"/>
           </a:p>
         </p:txBody>
       </p:sp>
@@ -1392,7 +1178,6 @@
               <a:rPr lang="en-US" dirty="0"/>
               <a:t>Close on the ask: a pilot with one employer. Name the first next step plainly (retrain without employer headcount, re-run the audit). Replace the team and live-URL placeholders before presenting.</a:t>
             </a:r>
-            <a:endParaRPr lang="en-US" dirty="0"/>
           </a:p>
         </p:txBody>
       </p:sp>
@@ -1480,7 +1265,6 @@
               <a:rPr lang="en-US" dirty="0"/>
               <a:t>Make the problem concrete with Rahim. On the 20th he has earned ৳11,612 but can reach none of it. The three gaps: informal credit, no wage data, and employers who will not take on the work. upay already has the wallet and the users; it lacks a safe way to lend against payroll.</a:t>
             </a:r>
-            <a:endParaRPr lang="en-US" dirty="0"/>
           </a:p>
         </p:txBody>
       </p:sp>
@@ -1568,7 +1352,6 @@
               <a:rPr lang="en-US" dirty="0"/>
               <a:t>Four steps. The employer only opts in and, on payday, sends one transfer from a deduction list we generate. Hard cap = min(20% of salary, earned minus already owed); the fee stays inside earned wages. Rules decide eligibility; AI can only shrink an offer or send it to a person.</a:t>
             </a:r>
-            <a:endParaRPr lang="en-US" dirty="0"/>
           </a:p>
         </p:txBody>
       </p:sp>
@@ -1656,7 +1439,6 @@
               <a:rPr lang="en-US" dirty="0"/>
               <a:t>Live demo path: Demo mode, Rahim asks for ৳3,600, sees the fee and the deduction date, and reads why. Switch to Bangla to show the same offer. These are real screenshots of the running app.</a:t>
             </a:r>
-            <a:endParaRPr lang="en-US" dirty="0"/>
           </a:p>
         </p:txBody>
       </p:sp>
@@ -1744,7 +1526,6 @@
               <a:rPr lang="en-US" dirty="0"/>
               <a:t>Left: HR sees Rahim's ৳3,625 on the deduction notice and confirms one remittance. Right: scenario S6, an Eid surge. The forecast's required pool (P90 + 15% buffer) rises above the ৳22 lakh pool, so new requests go to the human queue (POOL_BELOW_FORECAST). The money-flow ledger stays reconciled.</a:t>
             </a:r>
-            <a:endParaRPr lang="en-US" dirty="0"/>
           </a:p>
         </p:txBody>
       </p:sp>
@@ -1832,7 +1613,6 @@
               <a:rPr lang="en-US" dirty="0"/>
               <a:t>Design rule: only rules can decline. Models size the offer (M2 tier, M3 downgrade), price the employer (M1), keep enough capital (M4) and spot abuse (M5). Claude only rewords facts we hand it; numbers are checked and a template is used without a key.</a:t>
             </a:r>
-            <a:endParaRPr lang="en-US" dirty="0"/>
           </a:p>
         </p:txBody>
       </p:sp>
@@ -1920,7 +1700,6 @@
               <a:rPr lang="en-US" dirty="0"/>
               <a:t>Validation runs on 5 seeds and two worlds; the test window is the last 3 months, never trained on. Profile B is a harsher stress world. Misses: T2-A forecast band too wide (0.92 coverage, safe side) and T3-B employer-size approval gap 9.1 pp; the fix is retraining M2/M3 without employer headcount and re-running the audit.</a:t>
             </a:r>
-            <a:endParaRPr lang="en-US" dirty="0"/>
           </a:p>
         </p:txBody>
       </p:sp>
@@ -2008,7 +1787,6 @@
               <a:rPr lang="en-US" dirty="0"/>
               <a:t>Each control maps to code and a test in docs/responsible_ai.md. Lending to low-income workers needs guard-rails first: the cap, human review, cooling-off, the fairness audit and the kill switch.</a:t>
             </a:r>
-            <a:endParaRPr lang="en-US" dirty="0"/>
           </a:p>
         </p:txBody>
       </p:sp>
@@ -2096,7 +1874,6 @@
               <a:rPr lang="en-US" dirty="0"/>
               <a:t>Assumptions are labelled in the app: 12% annual cost of capital, 15% idle buffer, ৳5 operations cost per advance. At the ৳25 fee the sandbox month loses ৳10,876; the break-even fee is ৳49 (A) and ৳60 (B). We show this openly; the economics slider on the Validation page lets judges change every assumption.</a:t>
             </a:r>
-            <a:endParaRPr lang="en-US" dirty="0"/>
           </a:p>
         </p:txBody>
       </p:sp>
@@ -2174,6 +1951,7 @@
         <a:solidFill>
           <a:srgbClr val="0B3A33"/>
         </a:solidFill>
+        <a:effectLst/>
       </p:bgPr>
     </p:bg>
     <p:spTree>
@@ -2193,9 +1971,11 @@
       <p:sp>
         <p:nvSpPr>
           <p:cNvPr id="2" name="Text 0"/>
-          <p:cNvSpPr/>
+          <p:cNvSpPr>
+            <a:spLocks noGrp="1"/>
+          </p:cNvSpPr>
           <p:nvPr>
-            <p:ph idx="100" type="body" hasCustomPrompt="1"/>
+            <p:ph type="body" idx="100" hasCustomPrompt="1"/>
           </p:nvPr>
         </p:nvSpPr>
         <p:spPr>
@@ -2212,7 +1992,7 @@
         <p:txBody>
           <a:bodyPr wrap="square" rtlCol="0"/>
           <a:lstStyle>
-            <a:lvl1pPr indent="0" marL="0">
+            <a:lvl1pPr marL="0" indent="0">
               <a:buNone/>
               <a:defRPr lang="en-US" sz="1400" b="1" dirty="0">
                 <a:solidFill>
@@ -2222,7 +2002,7 @@
             </a:lvl1pPr>
           </a:lstStyle>
           <a:p>
-            <a:pPr indent="0" marL="0">
+            <a:pPr marL="0" indent="0">
               <a:buNone/>
             </a:pPr>
             <a:endParaRPr lang="en-US" sz="1400" dirty="0"/>
@@ -2232,9 +2012,11 @@
       <p:sp>
         <p:nvSpPr>
           <p:cNvPr id="3" name="Text 0"/>
-          <p:cNvSpPr/>
+          <p:cNvSpPr>
+            <a:spLocks noGrp="1"/>
+          </p:cNvSpPr>
           <p:nvPr>
-            <p:ph idx="101" type="title" hasCustomPrompt="1"/>
+            <p:ph type="title" idx="101" hasCustomPrompt="1"/>
           </p:nvPr>
         </p:nvSpPr>
         <p:spPr>
@@ -2251,7 +2033,7 @@
         <p:txBody>
           <a:bodyPr wrap="square" rtlCol="0"/>
           <a:lstStyle>
-            <a:lvl1pPr algn="l" indent="0" marL="0">
+            <a:lvl1pPr marL="0" indent="0" algn="l">
               <a:buNone/>
               <a:defRPr lang="en-US" sz="6000" b="1" dirty="0">
                 <a:solidFill>
@@ -2264,7 +2046,7 @@
             </a:lvl1pPr>
           </a:lstStyle>
           <a:p>
-            <a:pPr algn="l" indent="0" marL="0">
+            <a:pPr marL="0" indent="0" algn="l">
               <a:buNone/>
             </a:pPr>
             <a:endParaRPr lang="en-US" sz="6000" dirty="0"/>
@@ -2274,9 +2056,11 @@
       <p:sp>
         <p:nvSpPr>
           <p:cNvPr id="4" name="Text 0"/>
-          <p:cNvSpPr/>
+          <p:cNvSpPr>
+            <a:spLocks noGrp="1"/>
+          </p:cNvSpPr>
           <p:nvPr>
-            <p:ph idx="102" type="body" hasCustomPrompt="1"/>
+            <p:ph type="body" idx="102" hasCustomPrompt="1"/>
           </p:nvPr>
         </p:nvSpPr>
         <p:spPr>
@@ -2293,7 +2077,7 @@
         <p:txBody>
           <a:bodyPr wrap="square" rtlCol="0"/>
           <a:lstStyle>
-            <a:lvl1pPr indent="0" marL="0">
+            <a:lvl1pPr marL="0" indent="0">
               <a:buNone/>
               <a:defRPr lang="en-US" sz="2000" dirty="0">
                 <a:solidFill>
@@ -2303,7 +2087,7 @@
             </a:lvl1pPr>
           </a:lstStyle>
           <a:p>
-            <a:pPr indent="0" marL="0">
+            <a:pPr marL="0" indent="0">
               <a:buNone/>
             </a:pPr>
             <a:endParaRPr lang="en-US" sz="2000" dirty="0"/>
@@ -2326,6 +2110,7 @@
         <a:solidFill>
           <a:srgbClr val="FFFFFF"/>
         </a:solidFill>
+        <a:effectLst/>
       </p:bgPr>
     </p:bg>
     <p:spTree>
@@ -2345,9 +2130,11 @@
       <p:sp>
         <p:nvSpPr>
           <p:cNvPr id="2" name="Text 0"/>
-          <p:cNvSpPr/>
+          <p:cNvSpPr>
+            <a:spLocks noGrp="1"/>
+          </p:cNvSpPr>
           <p:nvPr>
-            <p:ph idx="100" type="title" hasCustomPrompt="1"/>
+            <p:ph type="title" idx="100" hasCustomPrompt="1"/>
           </p:nvPr>
         </p:nvSpPr>
         <p:spPr>
@@ -2364,7 +2151,7 @@
         <p:txBody>
           <a:bodyPr wrap="square" rtlCol="0"/>
           <a:lstStyle>
-            <a:lvl1pPr indent="0" marL="0">
+            <a:lvl1pPr marL="0" indent="0">
               <a:buNone/>
               <a:defRPr lang="en-US" sz="3400" b="1" dirty="0">
                 <a:solidFill>
@@ -2377,7 +2164,7 @@
             </a:lvl1pPr>
           </a:lstStyle>
           <a:p>
-            <a:pPr indent="0" marL="0">
+            <a:pPr marL="0" indent="0">
               <a:buNone/>
             </a:pPr>
             <a:endParaRPr lang="en-US" sz="3400" dirty="0"/>
@@ -2405,7 +2192,7 @@
           <a:bodyPr wrap="square" lIns="0" tIns="0" rIns="0" bIns="0" rtlCol="0" anchor="ctr"/>
           <a:lstStyle/>
           <a:p>
-            <a:pPr indent="0" marL="0">
+            <a:pPr marL="0" indent="0">
               <a:buNone/>
             </a:pPr>
             <a:r>
@@ -2440,7 +2227,7 @@
           </a:prstGeom>
           <a:extLst>
             <a:ext uri="{C572A759-6A51-4108-AA02-DFA0A04FC94B}">
-              <ma14:wrappingTextBoxFlag xmlns:ma14="http://schemas.microsoft.com/office/mac/drawingml/2011/main" val="0"/>
+              <ma14:wrappingTextBoxFlag xmlns:ma14="http://schemas.microsoft.com/office/mac/drawingml/2011/main" xmlns="" val="0"/>
             </a:ext>
           </a:extLst>
         </p:spPr>
@@ -2458,8 +2245,8 @@
           <a:p>
             <a:pPr algn="r"/>
             <a:fld id="{F7021451-1387-4CA6-816F-3879F97B5CBC}" type="slidenum">
-              <a:rPr b="0" lang="en-US"/>
-              <a:t>1003</a:t>
+              <a:rPr lang="en-US" b="0"/>
+              <a:t>‹#›</a:t>
             </a:fld>
             <a:endParaRPr lang="en-US"/>
           </a:p>
@@ -2481,6 +2268,7 @@
         <a:solidFill>
           <a:srgbClr val="0B3A33"/>
         </a:solidFill>
+        <a:effectLst/>
       </p:bgPr>
     </p:bg>
     <p:spTree>
@@ -2500,9 +2288,11 @@
       <p:sp>
         <p:nvSpPr>
           <p:cNvPr id="2" name="Text 0"/>
-          <p:cNvSpPr/>
+          <p:cNvSpPr>
+            <a:spLocks noGrp="1"/>
+          </p:cNvSpPr>
           <p:nvPr>
-            <p:ph idx="100" type="title" hasCustomPrompt="1"/>
+            <p:ph type="title" idx="100" hasCustomPrompt="1"/>
           </p:nvPr>
         </p:nvSpPr>
         <p:spPr>
@@ -2519,7 +2309,7 @@
         <p:txBody>
           <a:bodyPr wrap="square" rtlCol="0"/>
           <a:lstStyle>
-            <a:lvl1pPr indent="0" marL="0">
+            <a:lvl1pPr marL="0" indent="0">
               <a:buNone/>
               <a:defRPr lang="en-US" sz="3400" b="1" dirty="0">
                 <a:solidFill>
@@ -2532,7 +2322,7 @@
             </a:lvl1pPr>
           </a:lstStyle>
           <a:p>
-            <a:pPr indent="0" marL="0">
+            <a:pPr marL="0" indent="0">
               <a:buNone/>
             </a:pPr>
             <a:endParaRPr lang="en-US" sz="3400" dirty="0"/>
@@ -2560,7 +2350,7 @@
           <a:bodyPr wrap="square" lIns="0" tIns="0" rIns="0" bIns="0" rtlCol="0" anchor="ctr"/>
           <a:lstStyle/>
           <a:p>
-            <a:pPr indent="0" marL="0">
+            <a:pPr marL="0" indent="0">
               <a:buNone/>
             </a:pPr>
             <a:r>
@@ -2595,7 +2385,7 @@
           </a:prstGeom>
           <a:extLst>
             <a:ext uri="{C572A759-6A51-4108-AA02-DFA0A04FC94B}">
-              <ma14:wrappingTextBoxFlag xmlns:ma14="http://schemas.microsoft.com/office/mac/drawingml/2011/main" val="0"/>
+              <ma14:wrappingTextBoxFlag xmlns:ma14="http://schemas.microsoft.com/office/mac/drawingml/2011/main" xmlns="" val="0"/>
             </a:ext>
           </a:extLst>
         </p:spPr>
@@ -2613,8 +2403,8 @@
           <a:p>
             <a:pPr algn="r"/>
             <a:fld id="{F7021451-1387-4CA6-816F-3879F97B5CBC}" type="slidenum">
-              <a:rPr b="0" lang="en-US"/>
-              <a:t>1004</a:t>
+              <a:rPr lang="en-US" b="0"/>
+              <a:t>‹#›</a:t>
             </a:fld>
             <a:endParaRPr lang="en-US"/>
           </a:p>
@@ -2631,6 +2421,11 @@
 <file path=ppt/slideMasters/slideMaster1.xml><?xml version="1.0" encoding="utf-8"?>
 <p:sldMaster xmlns:a="http://schemas.openxmlformats.org/drawingml/2006/main" xmlns:r="http://schemas.openxmlformats.org/officeDocument/2006/relationships" xmlns:p="http://schemas.openxmlformats.org/presentationml/2006/main">
   <p:cSld>
+    <p:bg>
+      <p:bgRef idx="1001">
+        <a:schemeClr val="bg1"/>
+      </p:bgRef>
+    </p:bg>
     <p:spTree>
       <p:nvGrpSpPr>
         <p:cNvPr id="1" name=""/>
@@ -2665,7 +2460,7 @@
           </a:prstGeom>
           <a:extLst>
             <a:ext uri="{C572A759-6A51-4108-AA02-DFA0A04FC94B}">
-              <ma14:wrappingTextBoxFlag xmlns:ma14="http://schemas.microsoft.com/office/mac/drawingml/2011/main" val="0"/>
+              <ma14:wrappingTextBoxFlag xmlns:ma14="http://schemas.microsoft.com/office/mac/drawingml/2011/main" xmlns="" val="0"/>
             </a:ext>
           </a:extLst>
         </p:spPr>
@@ -2683,8 +2478,8 @@
           <a:p>
             <a:pPr algn="r"/>
             <a:fld id="{F7021451-1387-4CA6-816F-3879F97B5CBC}" type="slidenum">
-              <a:rPr b="0" lang="en-US"/>
-              <a:t>null</a:t>
+              <a:rPr lang="en-US" b="0"/>
+              <a:t>‹#›</a:t>
             </a:fld>
             <a:endParaRPr lang="en-US"/>
           </a:p>
@@ -2973,9 +2768,11 @@
       <p:sp>
         <p:nvSpPr>
           <p:cNvPr id="2" name="Text 0"/>
-          <p:cNvSpPr/>
+          <p:cNvSpPr>
+            <a:spLocks noGrp="1"/>
+          </p:cNvSpPr>
           <p:nvPr>
-            <p:ph idx="100" type="body" hasCustomPrompt="1"/>
+            <p:ph type="body" idx="100" hasCustomPrompt="1"/>
           </p:nvPr>
         </p:nvSpPr>
         <p:spPr>
@@ -2993,7 +2790,7 @@
           <a:bodyPr wrap="square" lIns="0" tIns="0" rIns="0" bIns="0" rtlCol="0"/>
           <a:lstStyle/>
           <a:p>
-            <a:pPr indent="0" marL="0">
+            <a:pPr marL="0" indent="0">
               <a:buNone/>
             </a:pPr>
             <a:r>
@@ -3011,9 +2808,11 @@
       <p:sp>
         <p:nvSpPr>
           <p:cNvPr id="3" name="Text 0"/>
-          <p:cNvSpPr/>
+          <p:cNvSpPr>
+            <a:spLocks noGrp="1"/>
+          </p:cNvSpPr>
           <p:nvPr>
-            <p:ph idx="101" type="title" hasCustomPrompt="1"/>
+            <p:ph type="title" idx="101" hasCustomPrompt="1"/>
           </p:nvPr>
         </p:nvSpPr>
         <p:spPr>
@@ -3031,7 +2830,7 @@
           <a:bodyPr wrap="square" lIns="0" tIns="0" rIns="0" bIns="0" rtlCol="0" anchor="t"/>
           <a:lstStyle/>
           <a:p>
-            <a:pPr algn="l" indent="0" marL="0">
+            <a:pPr marL="0" indent="0" algn="l">
               <a:buNone/>
             </a:pPr>
             <a:r>
@@ -3052,9 +2851,11 @@
       <p:sp>
         <p:nvSpPr>
           <p:cNvPr id="4" name="Text 0"/>
-          <p:cNvSpPr/>
+          <p:cNvSpPr>
+            <a:spLocks noGrp="1"/>
+          </p:cNvSpPr>
           <p:nvPr>
-            <p:ph idx="102" type="body" hasCustomPrompt="1"/>
+            <p:ph type="body" idx="102" hasCustomPrompt="1"/>
           </p:nvPr>
         </p:nvSpPr>
         <p:spPr>
@@ -3072,7 +2873,7 @@
           <a:bodyPr wrap="square" lIns="0" tIns="0" rIns="0" bIns="0" rtlCol="0" anchor="t"/>
           <a:lstStyle/>
           <a:p>
-            <a:pPr indent="0" marL="0">
+            <a:pPr marL="0" indent="0">
               <a:buNone/>
             </a:pPr>
             <a:r>
@@ -3108,7 +2909,7 @@
           <a:bodyPr wrap="square" lIns="0" tIns="0" rIns="0" bIns="0" rtlCol="0" anchor="t"/>
           <a:lstStyle/>
           <a:p>
-            <a:pPr indent="0" marL="0">
+            <a:pPr marL="0" indent="0">
               <a:buNone/>
             </a:pPr>
             <a:r>
@@ -3147,6 +2948,13 @@
           </a:solidFill>
           <a:ln/>
         </p:spPr>
+        <p:txBody>
+          <a:bodyPr/>
+          <a:lstStyle/>
+          <a:p>
+            <a:endParaRPr lang="en-US"/>
+          </a:p>
+        </p:txBody>
       </p:sp>
       <p:sp>
         <p:nvSpPr>
@@ -3169,7 +2977,7 @@
           <a:bodyPr wrap="square" lIns="0" tIns="0" rIns="0" bIns="0" rtlCol="0" anchor="t"/>
           <a:lstStyle/>
           <a:p>
-            <a:pPr indent="0" marL="0">
+            <a:pPr marL="0" indent="0">
               <a:buNone/>
             </a:pPr>
             <a:r>
@@ -3179,9 +2987,8 @@
                 </a:solidFill>
                 <a:latin typeface="Cambria" pitchFamily="34" charset="0"/>
                 <a:ea typeface="Cambria" pitchFamily="34" charset="-122"/>
-                <a:cs typeface="Cambria" pitchFamily="34" charset="-120"/>
-              </a:rPr>
-              <a:t>[Team Name]</a:t>
+              </a:rPr>
+              <a:t>NeuroVerse</a:t>
             </a:r>
             <a:endParaRPr lang="en-US" sz="2400" dirty="0"/>
           </a:p>
@@ -3208,7 +3015,7 @@
           <a:bodyPr wrap="square" lIns="0" tIns="0" rIns="0" bIns="0" rtlCol="0" anchor="t"/>
           <a:lstStyle/>
           <a:p>
-            <a:pPr indent="0" marL="0">
+            <a:pPr marL="0" indent="0">
               <a:buNone/>
             </a:pPr>
             <a:r>
@@ -3217,7 +3024,7 @@
                   <a:schemeClr val="bg2"/>
                 </a:solidFill>
               </a:rPr>
-              <a:t>[Member 1]  ·  [Member 2]  ·  [Member 3]</a:t>
+              <a:t>Md Abdul Quym Shanto  ·  Sajid Ahasan  ·  Sakibul Hasan Sakib</a:t>
             </a:r>
             <a:endParaRPr lang="en-US" sz="1600" dirty="0"/>
           </a:p>
@@ -3231,8 +3038,8 @@
         </p:nvSpPr>
         <p:spPr>
           <a:xfrm>
-            <a:off x="914400" y="5532120"/>
-            <a:ext cx="5852160" cy="320040"/>
+            <a:off x="914400" y="5486400"/>
+            <a:ext cx="5852160" cy="502920"/>
           </a:xfrm>
           <a:prstGeom prst="rect">
             <a:avLst/>
@@ -3244,7 +3051,7 @@
           <a:bodyPr wrap="square" lIns="0" tIns="0" rIns="0" bIns="0" rtlCol="0" anchor="t"/>
           <a:lstStyle/>
           <a:p>
-            <a:pPr indent="0" marL="0">
+            <a:pPr marL="0" indent="0">
               <a:buNone/>
             </a:pPr>
             <a:r>
@@ -3253,7 +3060,30 @@
                   <a:schemeClr val="accent5"/>
                 </a:solidFill>
               </a:rPr>
-              <a:t>[University / Department]  ·  Track: [Track name]</a:t>
+              <a:t>Daffodil International University ·  </a:t>
+            </a:r>
+            <a:br>
+              <a:rPr lang="en-US" sz="1400" dirty="0">
+                <a:solidFill>
+                  <a:schemeClr val="accent5"/>
+                </a:solidFill>
+              </a:rPr>
+            </a:br>
+            <a:r>
+              <a:rPr lang="en-US" sz="1400" dirty="0">
+                <a:solidFill>
+                  <a:schemeClr val="accent5"/>
+                </a:solidFill>
+              </a:rPr>
+              <a:t>T</a:t>
+            </a:r>
+            <a:r>
+              <a:rPr lang="en-GB" sz="1400" dirty="0">
+                <a:solidFill>
+                  <a:schemeClr val="accent5"/>
+                </a:solidFill>
+              </a:rPr>
+              <a:t>rack 03 · Customer Innovation &amp; Financial Independence.</a:t>
             </a:r>
             <a:endParaRPr lang="en-US" sz="1400" dirty="0"/>
           </a:p>
@@ -3280,24 +3110,31 @@
           </a:solidFill>
           <a:ln/>
           <a:effectLst>
-            <a:outerShdw sx="100000" sy="100000" kx="0" ky="0" algn="bl" rotWithShape="0" blurRad="127000" dist="38100" dir="5400000">
+            <a:outerShdw blurRad="127000" dist="38100" dir="5400000" algn="bl" rotWithShape="0">
               <a:srgbClr val="000000">
                 <a:alpha val="25000"/>
               </a:srgbClr>
             </a:outerShdw>
           </a:effectLst>
         </p:spPr>
+        <p:txBody>
+          <a:bodyPr/>
+          <a:lstStyle/>
+          <a:p>
+            <a:endParaRPr lang="en-US"/>
+          </a:p>
+        </p:txBody>
       </p:sp>
       <p:pic>
         <p:nvPicPr>
-          <p:cNvPr id="11" name="Employee offer screen" descr="Employee offer screen">    </p:cNvPr>
+          <p:cNvPr id="11" name="Employee offer screen" descr="Employee offer screen"/>
           <p:cNvPicPr>
             <a:picLocks noChangeAspect="1"/>
           </p:cNvPicPr>
           <p:nvPr/>
         </p:nvPicPr>
         <p:blipFill>
-          <a:blip r:embed="rId1"/>
+          <a:blip r:embed="rId3"/>
           <a:stretch>
             <a:fillRect/>
           </a:stretch>
@@ -3340,9 +3177,11 @@
       <p:sp>
         <p:nvSpPr>
           <p:cNvPr id="2" name="Text 0"/>
-          <p:cNvSpPr/>
+          <p:cNvSpPr>
+            <a:spLocks noGrp="1"/>
+          </p:cNvSpPr>
           <p:nvPr>
-            <p:ph idx="100" type="title" hasCustomPrompt="1"/>
+            <p:ph type="title" idx="100" hasCustomPrompt="1"/>
           </p:nvPr>
         </p:nvSpPr>
         <p:spPr>
@@ -3360,7 +3199,7 @@
           <a:bodyPr wrap="square" lIns="0" tIns="0" rIns="0" bIns="0" rtlCol="0" anchor="ctr"/>
           <a:lstStyle/>
           <a:p>
-            <a:pPr indent="0" marL="0">
+            <a:pPr marL="0" indent="0">
               <a:buNone/>
             </a:pPr>
             <a:r>
@@ -3397,6 +3236,13 @@
           </a:solidFill>
           <a:ln/>
         </p:spPr>
+        <p:txBody>
+          <a:bodyPr/>
+          <a:lstStyle/>
+          <a:p>
+            <a:endParaRPr lang="en-US"/>
+          </a:p>
+        </p:txBody>
       </p:sp>
       <p:sp>
         <p:nvSpPr>
@@ -3419,7 +3265,7 @@
           <a:bodyPr wrap="square" lIns="0" tIns="0" rIns="0" bIns="0" rtlCol="0" anchor="ctr"/>
           <a:lstStyle/>
           <a:p>
-            <a:pPr algn="ctr" indent="0" marL="0">
+            <a:pPr marL="0" indent="0" algn="ctr">
               <a:buNone/>
             </a:pPr>
             <a:r>
@@ -3455,7 +3301,7 @@
           <a:bodyPr wrap="square" lIns="0" tIns="0" rIns="0" bIns="0" rtlCol="0" anchor="t"/>
           <a:lstStyle/>
           <a:p>
-            <a:pPr indent="0" marL="0">
+            <a:pPr marL="0" indent="0">
               <a:buNone/>
             </a:pPr>
             <a:r>
@@ -3491,7 +3337,7 @@
           <a:bodyPr wrap="square" lIns="0" tIns="0" rIns="0" bIns="0" rtlCol="0" anchor="t"/>
           <a:lstStyle/>
           <a:p>
-            <a:pPr indent="0" marL="0">
+            <a:pPr marL="0" indent="0">
               <a:buNone/>
             </a:pPr>
             <a:r>
@@ -3525,6 +3371,13 @@
           </a:solidFill>
           <a:ln/>
         </p:spPr>
+        <p:txBody>
+          <a:bodyPr/>
+          <a:lstStyle/>
+          <a:p>
+            <a:endParaRPr lang="en-US"/>
+          </a:p>
+        </p:txBody>
       </p:sp>
       <p:sp>
         <p:nvSpPr>
@@ -3547,7 +3400,7 @@
           <a:bodyPr wrap="square" lIns="0" tIns="0" rIns="0" bIns="0" rtlCol="0" anchor="ctr"/>
           <a:lstStyle/>
           <a:p>
-            <a:pPr algn="ctr" indent="0" marL="0">
+            <a:pPr marL="0" indent="0" algn="ctr">
               <a:buNone/>
             </a:pPr>
             <a:r>
@@ -3583,7 +3436,7 @@
           <a:bodyPr wrap="square" lIns="0" tIns="0" rIns="0" bIns="0" rtlCol="0" anchor="t"/>
           <a:lstStyle/>
           <a:p>
-            <a:pPr indent="0" marL="0">
+            <a:pPr marL="0" indent="0">
               <a:buNone/>
             </a:pPr>
             <a:r>
@@ -3619,7 +3472,7 @@
           <a:bodyPr wrap="square" lIns="0" tIns="0" rIns="0" bIns="0" rtlCol="0" anchor="t"/>
           <a:lstStyle/>
           <a:p>
-            <a:pPr indent="0" marL="0">
+            <a:pPr marL="0" indent="0">
               <a:buNone/>
             </a:pPr>
             <a:r>
@@ -3653,6 +3506,13 @@
           </a:solidFill>
           <a:ln/>
         </p:spPr>
+        <p:txBody>
+          <a:bodyPr/>
+          <a:lstStyle/>
+          <a:p>
+            <a:endParaRPr lang="en-US"/>
+          </a:p>
+        </p:txBody>
       </p:sp>
       <p:sp>
         <p:nvSpPr>
@@ -3675,7 +3535,7 @@
           <a:bodyPr wrap="square" lIns="0" tIns="0" rIns="0" bIns="0" rtlCol="0" anchor="ctr"/>
           <a:lstStyle/>
           <a:p>
-            <a:pPr algn="ctr" indent="0" marL="0">
+            <a:pPr marL="0" indent="0" algn="ctr">
               <a:buNone/>
             </a:pPr>
             <a:r>
@@ -3711,7 +3571,7 @@
           <a:bodyPr wrap="square" lIns="0" tIns="0" rIns="0" bIns="0" rtlCol="0" anchor="t"/>
           <a:lstStyle/>
           <a:p>
-            <a:pPr indent="0" marL="0">
+            <a:pPr marL="0" indent="0">
               <a:buNone/>
             </a:pPr>
             <a:r>
@@ -3747,7 +3607,7 @@
           <a:bodyPr wrap="square" lIns="0" tIns="0" rIns="0" bIns="0" rtlCol="0" anchor="t"/>
           <a:lstStyle/>
           <a:p>
-            <a:pPr indent="0" marL="0">
+            <a:pPr marL="0" indent="0">
               <a:buNone/>
             </a:pPr>
             <a:r>
@@ -3783,6 +3643,13 @@
           </a:solidFill>
           <a:ln/>
         </p:spPr>
+        <p:txBody>
+          <a:bodyPr/>
+          <a:lstStyle/>
+          <a:p>
+            <a:endParaRPr lang="en-US"/>
+          </a:p>
+        </p:txBody>
       </p:sp>
       <p:sp>
         <p:nvSpPr>
@@ -3805,9 +3672,6 @@
           <a:bodyPr wrap="square" lIns="0" tIns="0" rIns="0" bIns="0" rtlCol="0" anchor="ctr"/>
           <a:lstStyle/>
           <a:p>
-            <a:pPr indent="0" marL="0">
-              <a:buNone/>
-            </a:pPr>
             <a:r>
               <a:rPr lang="en-US" sz="1300" b="1" dirty="0">
                 <a:solidFill>
@@ -3816,15 +3680,12 @@
               </a:rPr>
               <a:t>Code  </a:t>
             </a:r>
-            <a:pPr indent="0" marL="0">
-              <a:buNone/>
-            </a:pPr>
             <a:r>
               <a:rPr lang="en-US" sz="1300" u="sng" dirty="0">
                 <a:solidFill>
                   <a:schemeClr val="bg1"/>
                 </a:solidFill>
-                <a:hlinkClick r:id="rId1" invalidUrl="" action="" tgtFrame="" tooltip="" history="1" highlightClick="0" endSnd="0">
+                <a:hlinkClick r:id="rId3">
                   <a:extLst>
                     <a:ext uri="{A12FA001-AC4F-418D-AE19-62706E023703}">
                       <ahyp:hlinkClr xmlns:ahyp="http://schemas.microsoft.com/office/drawing/2018/hyperlinkcolor" val="tx"/>
@@ -3832,31 +3693,61 @@
                   </a:extLst>
                 </a:hlinkClick>
               </a:rPr>
-              <a:t>github.com/aqshanto/SalaryBridge</a:t>
-            </a:r>
-            <a:pPr indent="0" marL="0">
-              <a:buNone/>
-            </a:pPr>
+              <a:t>github.com/aqshanto/</a:t>
+            </a:r>
+            <a:r>
+              <a:rPr lang="en-US" sz="1300" u="sng" dirty="0" err="1">
+                <a:solidFill>
+                  <a:schemeClr val="bg1"/>
+                </a:solidFill>
+                <a:hlinkClick r:id="rId3">
+                  <a:extLst>
+                    <a:ext uri="{A12FA001-AC4F-418D-AE19-62706E023703}">
+                      <ahyp:hlinkClr xmlns:ahyp="http://schemas.microsoft.com/office/drawing/2018/hyperlinkcolor" val="tx"/>
+                    </a:ext>
+                  </a:extLst>
+                </a:hlinkClick>
+              </a:rPr>
+              <a:t>SalaryBridge</a:t>
+            </a:r>
             <a:r>
               <a:rPr lang="en-US" sz="1300" b="1" dirty="0">
                 <a:solidFill>
                   <a:schemeClr val="accent5"/>
                 </a:solidFill>
               </a:rPr>
-              <a:t>    Live  </a:t>
-            </a:r>
-            <a:pPr indent="0" marL="0">
-              <a:buNone/>
-            </a:pPr>
-            <a:r>
-              <a:rPr lang="en-US" sz="1300" dirty="0">
+              <a:t>    </a:t>
+            </a:r>
+          </a:p>
+          <a:p>
+            <a:r>
+              <a:rPr lang="en-US" sz="1300" b="1" dirty="0">
+                <a:solidFill>
+                  <a:schemeClr val="accent5"/>
+                </a:solidFill>
+              </a:rPr>
+              <a:t>Live  </a:t>
+            </a:r>
+            <a:r>
+              <a:rPr lang="en-US" sz="1300" u="sng" dirty="0">
                 <a:solidFill>
                   <a:schemeClr val="bg1"/>
                 </a:solidFill>
-              </a:rPr>
-              <a:t>[your-app].vercel.app</a:t>
-            </a:r>
-            <a:endParaRPr lang="en-US" sz="1300" dirty="0"/>
+                <a:hlinkClick r:id="rId4">
+                  <a:extLst>
+                    <a:ext uri="{A12FA001-AC4F-418D-AE19-62706E023703}">
+                      <ahyp:hlinkClr xmlns:ahyp="http://schemas.microsoft.com/office/drawing/2018/hyperlinkcolor" val="tx"/>
+                    </a:ext>
+                  </a:extLst>
+                </a:hlinkClick>
+              </a:rPr>
+              <a:t>https://salary-bridge-iota.vercel.app</a:t>
+            </a:r>
+            <a:endParaRPr lang="en-US" sz="1300" u="sng" dirty="0">
+              <a:solidFill>
+                <a:schemeClr val="bg1"/>
+              </a:solidFill>
+            </a:endParaRPr>
           </a:p>
         </p:txBody>
       </p:sp>
@@ -3881,7 +3772,7 @@
           <a:bodyPr wrap="square" lIns="0" tIns="0" rIns="0" bIns="0" rtlCol="0" anchor="t"/>
           <a:lstStyle/>
           <a:p>
-            <a:pPr indent="0" marL="0">
+            <a:pPr marL="0" indent="0">
               <a:buNone/>
             </a:pPr>
             <a:r>
@@ -3893,7 +3784,7 @@
                 <a:ea typeface="Cambria" pitchFamily="34" charset="-122"/>
                 <a:cs typeface="Cambria" pitchFamily="34" charset="-120"/>
               </a:rPr>
-              <a:t>[Team Name]</a:t>
+              <a:t>NeuroVerse</a:t>
             </a:r>
             <a:endParaRPr lang="en-US" sz="2600" dirty="0"/>
           </a:p>
@@ -3920,6 +3811,13 @@
           </a:solidFill>
           <a:ln/>
         </p:spPr>
+        <p:txBody>
+          <a:bodyPr/>
+          <a:lstStyle/>
+          <a:p>
+            <a:endParaRPr lang="en-US"/>
+          </a:p>
+        </p:txBody>
       </p:sp>
       <p:sp>
         <p:nvSpPr>
@@ -3940,17 +3838,24 @@
           </a:solidFill>
           <a:ln/>
         </p:spPr>
+        <p:txBody>
+          <a:bodyPr/>
+          <a:lstStyle/>
+          <a:p>
+            <a:endParaRPr lang="en-US"/>
+          </a:p>
+        </p:txBody>
       </p:sp>
       <p:pic>
         <p:nvPicPr>
-          <p:cNvPr id="20" name="Member 1 icon" descr="Member 1 icon">    </p:cNvPr>
+          <p:cNvPr id="20" name="Member 1 icon" descr="Member 1 icon"/>
           <p:cNvPicPr>
             <a:picLocks noChangeAspect="1"/>
           </p:cNvPicPr>
           <p:nvPr/>
         </p:nvPicPr>
         <p:blipFill>
-          <a:blip r:embed="rId2"/>
+          <a:blip r:embed="rId5"/>
           <a:stretch>
             <a:fillRect/>
           </a:stretch>
@@ -3986,7 +3891,7 @@
           <a:bodyPr wrap="square" lIns="0" tIns="0" rIns="0" bIns="0" rtlCol="0" anchor="t"/>
           <a:lstStyle/>
           <a:p>
-            <a:pPr indent="0" marL="0">
+            <a:pPr marL="0" indent="0">
               <a:buNone/>
             </a:pPr>
             <a:r>
@@ -3995,7 +3900,7 @@
                   <a:schemeClr val="bg1"/>
                 </a:solidFill>
               </a:rPr>
-              <a:t>[Member 1 name]</a:t>
+              <a:t>Md Abdul Quym Shanto </a:t>
             </a:r>
             <a:endParaRPr lang="en-US" sz="1900" dirty="0"/>
           </a:p>
@@ -4009,8 +3914,8 @@
         </p:nvSpPr>
         <p:spPr>
           <a:xfrm>
-            <a:off x="7498080" y="2697480"/>
-            <a:ext cx="3931920" cy="365760"/>
+            <a:off x="7498080" y="2583180"/>
+            <a:ext cx="3931920" cy="681228"/>
           </a:xfrm>
           <a:prstGeom prst="rect">
             <a:avLst/>
@@ -4022,7 +3927,7 @@
           <a:bodyPr wrap="square" lIns="0" tIns="0" rIns="0" bIns="0" rtlCol="0" anchor="t"/>
           <a:lstStyle/>
           <a:p>
-            <a:pPr indent="0" marL="0">
+            <a:pPr marL="0" indent="0">
               <a:buNone/>
             </a:pPr>
             <a:r>
@@ -4031,7 +3936,20 @@
                   <a:schemeClr val="accent5"/>
                 </a:solidFill>
               </a:rPr>
-              <a:t>[Role]  ·  [Department, University]  ·  [Email]</a:t>
+              <a:t>Leader , Frontend, Ai Engineer ·  </a:t>
+            </a:r>
+          </a:p>
+          <a:p>
+            <a:pPr marL="0" indent="0">
+              <a:buNone/>
+            </a:pPr>
+            <a:r>
+              <a:rPr lang="en-US" sz="1300" dirty="0">
+                <a:solidFill>
+                  <a:schemeClr val="accent5"/>
+                </a:solidFill>
+              </a:rPr>
+              <a:t>CSE Department, Daffodil International University  ·  quym241-15-053@diu.edu.bd</a:t>
             </a:r>
             <a:endParaRPr lang="en-US" sz="1300" dirty="0"/>
           </a:p>
@@ -4058,6 +3976,13 @@
           </a:solidFill>
           <a:ln/>
         </p:spPr>
+        <p:txBody>
+          <a:bodyPr/>
+          <a:lstStyle/>
+          <a:p>
+            <a:endParaRPr lang="en-US"/>
+          </a:p>
+        </p:txBody>
       </p:sp>
       <p:sp>
         <p:nvSpPr>
@@ -4078,17 +4003,24 @@
           </a:solidFill>
           <a:ln/>
         </p:spPr>
+        <p:txBody>
+          <a:bodyPr/>
+          <a:lstStyle/>
+          <a:p>
+            <a:endParaRPr lang="en-US"/>
+          </a:p>
+        </p:txBody>
       </p:sp>
       <p:pic>
         <p:nvPicPr>
-          <p:cNvPr id="25" name="Member 2 icon" descr="Member 2 icon">    </p:cNvPr>
+          <p:cNvPr id="25" name="Member 2 icon" descr="Member 2 icon"/>
           <p:cNvPicPr>
             <a:picLocks noChangeAspect="1"/>
           </p:cNvPicPr>
           <p:nvPr/>
         </p:nvPicPr>
         <p:blipFill>
-          <a:blip r:embed="rId3"/>
+          <a:blip r:embed="rId5"/>
           <a:stretch>
             <a:fillRect/>
           </a:stretch>
@@ -4124,7 +4056,7 @@
           <a:bodyPr wrap="square" lIns="0" tIns="0" rIns="0" bIns="0" rtlCol="0" anchor="t"/>
           <a:lstStyle/>
           <a:p>
-            <a:pPr indent="0" marL="0">
+            <a:pPr marL="0" indent="0">
               <a:buNone/>
             </a:pPr>
             <a:r>
@@ -4133,7 +4065,7 @@
                   <a:schemeClr val="bg1"/>
                 </a:solidFill>
               </a:rPr>
-              <a:t>[Member 2 name]</a:t>
+              <a:t>Sajid Ahasan</a:t>
             </a:r>
             <a:endParaRPr lang="en-US" sz="1900" dirty="0"/>
           </a:p>
@@ -4147,8 +4079,8 @@
         </p:nvSpPr>
         <p:spPr>
           <a:xfrm>
-            <a:off x="7498080" y="4023360"/>
-            <a:ext cx="3931920" cy="365760"/>
+            <a:off x="7498080" y="3904488"/>
+            <a:ext cx="3931920" cy="566928"/>
           </a:xfrm>
           <a:prstGeom prst="rect">
             <a:avLst/>
@@ -4160,7 +4092,7 @@
           <a:bodyPr wrap="square" lIns="0" tIns="0" rIns="0" bIns="0" rtlCol="0" anchor="t"/>
           <a:lstStyle/>
           <a:p>
-            <a:pPr indent="0" marL="0">
+            <a:pPr marL="0" indent="0">
               <a:buNone/>
             </a:pPr>
             <a:r>
@@ -4169,7 +4101,17 @@
                   <a:schemeClr val="accent5"/>
                 </a:solidFill>
               </a:rPr>
-              <a:t>[Role]  ·  [Department, University]  ·  [Email]</a:t>
+              <a:t>Ai/ML ·  </a:t>
+            </a:r>
+          </a:p>
+          <a:p>
+            <a:r>
+              <a:rPr lang="en-US" sz="1300" dirty="0">
+                <a:solidFill>
+                  <a:schemeClr val="accent5"/>
+                </a:solidFill>
+              </a:rPr>
+              <a:t>CSE Department, Daffodil International University  ·  sajid241-15-909@diu.edu.bd</a:t>
             </a:r>
             <a:endParaRPr lang="en-US" sz="1300" dirty="0"/>
           </a:p>
@@ -4196,6 +4138,13 @@
           </a:solidFill>
           <a:ln/>
         </p:spPr>
+        <p:txBody>
+          <a:bodyPr/>
+          <a:lstStyle/>
+          <a:p>
+            <a:endParaRPr lang="en-US"/>
+          </a:p>
+        </p:txBody>
       </p:sp>
       <p:sp>
         <p:nvSpPr>
@@ -4216,17 +4165,24 @@
           </a:solidFill>
           <a:ln/>
         </p:spPr>
+        <p:txBody>
+          <a:bodyPr/>
+          <a:lstStyle/>
+          <a:p>
+            <a:endParaRPr lang="en-US"/>
+          </a:p>
+        </p:txBody>
       </p:sp>
       <p:pic>
         <p:nvPicPr>
-          <p:cNvPr id="30" name="Member 3 icon" descr="Member 3 icon">    </p:cNvPr>
+          <p:cNvPr id="30" name="Member 3 icon" descr="Member 3 icon"/>
           <p:cNvPicPr>
             <a:picLocks noChangeAspect="1"/>
           </p:cNvPicPr>
           <p:nvPr/>
         </p:nvPicPr>
         <p:blipFill>
-          <a:blip r:embed="rId4"/>
+          <a:blip r:embed="rId5"/>
           <a:stretch>
             <a:fillRect/>
           </a:stretch>
@@ -4262,7 +4218,7 @@
           <a:bodyPr wrap="square" lIns="0" tIns="0" rIns="0" bIns="0" rtlCol="0" anchor="t"/>
           <a:lstStyle/>
           <a:p>
-            <a:pPr indent="0" marL="0">
+            <a:pPr marL="0" indent="0">
               <a:buNone/>
             </a:pPr>
             <a:r>
@@ -4271,7 +4227,7 @@
                   <a:schemeClr val="bg1"/>
                 </a:solidFill>
               </a:rPr>
-              <a:t>[Member 3 name]</a:t>
+              <a:t>Sakibul Hasan Sakib</a:t>
             </a:r>
             <a:endParaRPr lang="en-US" sz="1900" dirty="0"/>
           </a:p>
@@ -4285,8 +4241,8 @@
         </p:nvSpPr>
         <p:spPr>
           <a:xfrm>
-            <a:off x="7498080" y="5349240"/>
-            <a:ext cx="3931920" cy="365760"/>
+            <a:off x="7498080" y="5216652"/>
+            <a:ext cx="3931920" cy="617220"/>
           </a:xfrm>
           <a:prstGeom prst="rect">
             <a:avLst/>
@@ -4298,16 +4254,23 @@
           <a:bodyPr wrap="square" lIns="0" tIns="0" rIns="0" bIns="0" rtlCol="0" anchor="t"/>
           <a:lstStyle/>
           <a:p>
-            <a:pPr indent="0" marL="0">
-              <a:buNone/>
-            </a:pPr>
             <a:r>
               <a:rPr lang="en-US" sz="1300" dirty="0">
                 <a:solidFill>
                   <a:schemeClr val="accent5"/>
                 </a:solidFill>
               </a:rPr>
-              <a:t>[Role]  ·  [Department, University]  ·  [Email]</a:t>
+              <a:t>Backend Engineer  ·  </a:t>
+            </a:r>
+          </a:p>
+          <a:p>
+            <a:r>
+              <a:rPr lang="en-US" sz="1300" dirty="0">
+                <a:solidFill>
+                  <a:schemeClr val="accent5"/>
+                </a:solidFill>
+              </a:rPr>
+              <a:t>CSE Department, Daffodil International University  ·  sakib241-15-048@diu.edu.bd</a:t>
             </a:r>
             <a:endParaRPr lang="en-US" sz="1300" dirty="0"/>
           </a:p>
@@ -4315,7 +4278,7 @@
       </p:sp>
       <p:sp>
         <p:nvSpPr>
-          <p:cNvPr id="25" name="Slide Number Placeholder 0"/>
+          <p:cNvPr id="33" name="Slide Number Placeholder 0"/>
           <p:cNvSpPr>
             <a:spLocks noGrp="1"/>
           </p:cNvSpPr>
@@ -4333,7 +4296,7 @@
           </a:prstGeom>
           <a:extLst>
             <a:ext uri="{C572A759-6A51-4108-AA02-DFA0A04FC94B}">
-              <ma14:wrappingTextBoxFlag xmlns:ma14="http://schemas.microsoft.com/office/mac/drawingml/2011/main" val="0"/>
+              <ma14:wrappingTextBoxFlag xmlns:ma14="http://schemas.microsoft.com/office/mac/drawingml/2011/main" xmlns="" val="0"/>
             </a:ext>
           </a:extLst>
         </p:spPr>
@@ -4351,7 +4314,7 @@
           <a:p>
             <a:pPr algn="r"/>
             <a:fld id="{F7021451-1387-4CA6-816F-3879F97B5CBC}" type="slidenum">
-              <a:rPr b="0" lang="en-US"/>
+              <a:rPr lang="en-US" b="0"/>
               <a:t>10</a:t>
             </a:fld>
             <a:endParaRPr lang="en-US"/>
@@ -4386,9 +4349,11 @@
       <p:sp>
         <p:nvSpPr>
           <p:cNvPr id="2" name="Text 0"/>
-          <p:cNvSpPr/>
+          <p:cNvSpPr>
+            <a:spLocks noGrp="1"/>
+          </p:cNvSpPr>
           <p:nvPr>
-            <p:ph idx="100" type="title" hasCustomPrompt="1"/>
+            <p:ph type="title" idx="100" hasCustomPrompt="1"/>
           </p:nvPr>
         </p:nvSpPr>
         <p:spPr>
@@ -4406,7 +4371,7 @@
           <a:bodyPr wrap="square" lIns="0" tIns="0" rIns="0" bIns="0" rtlCol="0" anchor="ctr"/>
           <a:lstStyle/>
           <a:p>
-            <a:pPr indent="0" marL="0">
+            <a:pPr marL="0" indent="0">
               <a:buNone/>
             </a:pPr>
             <a:r>
@@ -4450,13 +4415,20 @@
             <a:prstDash val="solid"/>
           </a:ln>
           <a:effectLst>
-            <a:outerShdw sx="100000" sy="100000" kx="0" ky="0" algn="bl" rotWithShape="0" blurRad="101600" dist="25400" dir="5400000">
+            <a:outerShdw blurRad="101600" dist="25400" dir="5400000" algn="bl" rotWithShape="0">
               <a:srgbClr val="000000">
                 <a:alpha val="12000"/>
               </a:srgbClr>
             </a:outerShdw>
           </a:effectLst>
         </p:spPr>
+        <p:txBody>
+          <a:bodyPr/>
+          <a:lstStyle/>
+          <a:p>
+            <a:endParaRPr lang="en-US"/>
+          </a:p>
+        </p:txBody>
       </p:sp>
       <p:sp>
         <p:nvSpPr>
@@ -4477,422 +4449,17 @@
           </a:solidFill>
           <a:ln/>
         </p:spPr>
+        <p:txBody>
+          <a:bodyPr/>
+          <a:lstStyle/>
+          <a:p>
+            <a:endParaRPr lang="en-US"/>
+          </a:p>
+        </p:txBody>
       </p:sp>
       <p:pic>
         <p:nvPicPr>
-          <p:cNvPr id="5" name="Persona icon" descr="Persona icon">    </p:cNvPr>
-          <p:cNvPicPr>
-            <a:picLocks noChangeAspect="1"/>
-          </p:cNvPicPr>
-          <p:nvPr/>
-        </p:nvPicPr>
-        <p:blipFill>
-          <a:blip r:embed="rId1"/>
-          <a:stretch>
-            <a:fillRect/>
-          </a:stretch>
-        </p:blipFill>
-        <p:spPr>
-          <a:xfrm>
-            <a:off x="1040130" y="1908810"/>
-            <a:ext cx="342900" cy="342900"/>
-          </a:xfrm>
-          <a:prstGeom prst="rect">
-            <a:avLst/>
-          </a:prstGeom>
-        </p:spPr>
-      </p:pic>
-      <p:sp>
-        <p:nvSpPr>
-          <p:cNvPr id="6" name="Text 3"/>
-          <p:cNvSpPr txBox="1"/>
-          <p:nvPr/>
-        </p:nvSpPr>
-        <p:spPr>
-          <a:xfrm>
-            <a:off x="1737360" y="1783080"/>
-            <a:ext cx="3566160" cy="365760"/>
-          </a:xfrm>
-          <a:prstGeom prst="rect">
-            <a:avLst/>
-          </a:prstGeom>
-          <a:noFill/>
-          <a:ln/>
-        </p:spPr>
-        <p:txBody>
-          <a:bodyPr wrap="square" lIns="0" tIns="0" rIns="0" bIns="0" rtlCol="0" anchor="t"/>
-          <a:lstStyle/>
-          <a:p>
-            <a:pPr indent="0" marL="0">
-              <a:buNone/>
-            </a:pPr>
-            <a:r>
-              <a:rPr lang="en-US" sz="2000" b="1" dirty="0">
-                <a:solidFill>
-                  <a:schemeClr val="tx1"/>
-                </a:solidFill>
-              </a:rPr>
-              <a:t>Rahim, garment worker</a:t>
-            </a:r>
-            <a:endParaRPr lang="en-US" sz="2000" dirty="0"/>
-          </a:p>
-        </p:txBody>
-      </p:sp>
-      <p:sp>
-        <p:nvSpPr>
-          <p:cNvPr id="7" name="Text 4"/>
-          <p:cNvSpPr txBox="1"/>
-          <p:nvPr/>
-        </p:nvSpPr>
-        <p:spPr>
-          <a:xfrm>
-            <a:off x="1737360" y="2148840"/>
-            <a:ext cx="3566160" cy="320040"/>
-          </a:xfrm>
-          <a:prstGeom prst="rect">
-            <a:avLst/>
-          </a:prstGeom>
-          <a:noFill/>
-          <a:ln/>
-        </p:spPr>
-        <p:txBody>
-          <a:bodyPr wrap="square" lIns="0" tIns="0" rIns="0" bIns="0" rtlCol="0" anchor="t"/>
-          <a:lstStyle/>
-          <a:p>
-            <a:pPr indent="0" marL="0">
-              <a:buNone/>
-            </a:pPr>
-            <a:r>
-              <a:rPr lang="en-US" sz="1400" dirty="0">
-                <a:solidFill>
-                  <a:schemeClr val="accent6"/>
-                </a:solidFill>
-              </a:rPr>
-              <a:t>Salary ৳18,000, paid on the 1st</a:t>
-            </a:r>
-            <a:endParaRPr lang="en-US" sz="1400" dirty="0"/>
-          </a:p>
-        </p:txBody>
-      </p:sp>
-      <p:sp>
-        <p:nvSpPr>
-          <p:cNvPr id="8" name="Text 5"/>
-          <p:cNvSpPr txBox="1"/>
-          <p:nvPr/>
-        </p:nvSpPr>
-        <p:spPr>
-          <a:xfrm>
-            <a:off x="868680" y="2788920"/>
-            <a:ext cx="4297680" cy="274320"/>
-          </a:xfrm>
-          <a:prstGeom prst="rect">
-            <a:avLst/>
-          </a:prstGeom>
-          <a:noFill/>
-          <a:ln/>
-        </p:spPr>
-        <p:txBody>
-          <a:bodyPr wrap="square" lIns="0" tIns="0" rIns="0" bIns="0" rtlCol="0" anchor="t"/>
-          <a:lstStyle/>
-          <a:p>
-            <a:pPr indent="0" marL="0">
-              <a:buNone/>
-            </a:pPr>
-            <a:r>
-              <a:rPr lang="en-US" sz="1400" dirty="0">
-                <a:solidFill>
-                  <a:schemeClr val="accent6"/>
-                </a:solidFill>
-              </a:rPr>
-              <a:t>Earned by 20 October</a:t>
-            </a:r>
-            <a:endParaRPr lang="en-US" sz="1400" dirty="0"/>
-          </a:p>
-        </p:txBody>
-      </p:sp>
-      <p:sp>
-        <p:nvSpPr>
-          <p:cNvPr id="9" name="Text 6"/>
-          <p:cNvSpPr txBox="1"/>
-          <p:nvPr/>
-        </p:nvSpPr>
-        <p:spPr>
-          <a:xfrm>
-            <a:off x="868680" y="3063240"/>
-            <a:ext cx="4297680" cy="822960"/>
-          </a:xfrm>
-          <a:prstGeom prst="rect">
-            <a:avLst/>
-          </a:prstGeom>
-          <a:noFill/>
-          <a:ln/>
-        </p:spPr>
-        <p:txBody>
-          <a:bodyPr wrap="square" lIns="0" tIns="0" rIns="0" bIns="0" rtlCol="0" anchor="t"/>
-          <a:lstStyle/>
-          <a:p>
-            <a:pPr indent="0" marL="0">
-              <a:buNone/>
-            </a:pPr>
-            <a:r>
-              <a:rPr lang="en-US" sz="5400" b="1" dirty="0">
-                <a:solidFill>
-                  <a:schemeClr val="accent1"/>
-                </a:solidFill>
-              </a:rPr>
-              <a:t>৳11,612</a:t>
-            </a:r>
-            <a:endParaRPr lang="en-US" sz="5400" dirty="0"/>
-          </a:p>
-        </p:txBody>
-      </p:sp>
-      <p:sp>
-        <p:nvSpPr>
-          <p:cNvPr id="10" name="Text 7"/>
-          <p:cNvSpPr txBox="1"/>
-          <p:nvPr/>
-        </p:nvSpPr>
-        <p:spPr>
-          <a:xfrm>
-            <a:off x="868680" y="3977640"/>
-            <a:ext cx="4297680" cy="274320"/>
-          </a:xfrm>
-          <a:prstGeom prst="rect">
-            <a:avLst/>
-          </a:prstGeom>
-          <a:noFill/>
-          <a:ln/>
-        </p:spPr>
-        <p:txBody>
-          <a:bodyPr wrap="square" lIns="0" tIns="0" rIns="0" bIns="0" rtlCol="0" anchor="t"/>
-          <a:lstStyle/>
-          <a:p>
-            <a:pPr indent="0" marL="0">
-              <a:buNone/>
-            </a:pPr>
-            <a:r>
-              <a:rPr lang="en-US" sz="1400" dirty="0">
-                <a:solidFill>
-                  <a:schemeClr val="accent6"/>
-                </a:solidFill>
-              </a:rPr>
-              <a:t>Reachable today without SalaryBridge</a:t>
-            </a:r>
-            <a:endParaRPr lang="en-US" sz="1400" dirty="0"/>
-          </a:p>
-        </p:txBody>
-      </p:sp>
-      <p:sp>
-        <p:nvSpPr>
-          <p:cNvPr id="11" name="Text 8"/>
-          <p:cNvSpPr txBox="1"/>
-          <p:nvPr/>
-        </p:nvSpPr>
-        <p:spPr>
-          <a:xfrm>
-            <a:off x="868680" y="4251960"/>
-            <a:ext cx="4297680" cy="822960"/>
-          </a:xfrm>
-          <a:prstGeom prst="rect">
-            <a:avLst/>
-          </a:prstGeom>
-          <a:noFill/>
-          <a:ln/>
-        </p:spPr>
-        <p:txBody>
-          <a:bodyPr wrap="square" lIns="0" tIns="0" rIns="0" bIns="0" rtlCol="0" anchor="t"/>
-          <a:lstStyle/>
-          <a:p>
-            <a:pPr indent="0" marL="0">
-              <a:buNone/>
-            </a:pPr>
-            <a:r>
-              <a:rPr lang="en-US" sz="5400" b="1" dirty="0">
-                <a:solidFill>
-                  <a:schemeClr val="accent4"/>
-                </a:solidFill>
-              </a:rPr>
-              <a:t>৳0</a:t>
-            </a:r>
-            <a:endParaRPr lang="en-US" sz="5400" dirty="0"/>
-          </a:p>
-        </p:txBody>
-      </p:sp>
-      <p:sp>
-        <p:nvSpPr>
-          <p:cNvPr id="12" name="Text 9"/>
-          <p:cNvSpPr txBox="1"/>
-          <p:nvPr/>
-        </p:nvSpPr>
-        <p:spPr>
-          <a:xfrm>
-            <a:off x="868680" y="5440680"/>
-            <a:ext cx="4389120" cy="274320"/>
-          </a:xfrm>
-          <a:prstGeom prst="rect">
-            <a:avLst/>
-          </a:prstGeom>
-          <a:noFill/>
-          <a:ln/>
-        </p:spPr>
-        <p:txBody>
-          <a:bodyPr wrap="square" lIns="0" tIns="0" rIns="0" bIns="0" rtlCol="0" anchor="t"/>
-          <a:lstStyle/>
-          <a:p>
-            <a:pPr indent="0" marL="0">
-              <a:buNone/>
-            </a:pPr>
-            <a:r>
-              <a:rPr lang="en-US" sz="1100" i="1" dirty="0">
-                <a:solidFill>
-                  <a:schemeClr val="accent6"/>
-                </a:solidFill>
-              </a:rPr>
-              <a:t>Figures from the SalaryBridge sandbox (synthetic persona).</a:t>
-            </a:r>
-            <a:endParaRPr lang="en-US" sz="1100" dirty="0"/>
-          </a:p>
-        </p:txBody>
-      </p:sp>
-      <p:sp>
-        <p:nvSpPr>
-          <p:cNvPr id="13" name="The gap is filled informally circle"/>
-          <p:cNvSpPr/>
-          <p:nvPr/>
-        </p:nvSpPr>
-        <p:spPr>
-          <a:xfrm>
-            <a:off x="6035040" y="1463040"/>
-            <a:ext cx="640080" cy="640080"/>
-          </a:xfrm>
-          <a:prstGeom prst="ellipse">
-            <a:avLst/>
-          </a:prstGeom>
-          <a:solidFill>
-            <a:schemeClr val="accent1"/>
-          </a:solidFill>
-          <a:ln/>
-        </p:spPr>
-      </p:sp>
-      <p:pic>
-        <p:nvPicPr>
-          <p:cNvPr id="14" name="The gap is filled informally icon" descr="The gap is filled informally icon">    </p:cNvPr>
-          <p:cNvPicPr>
-            <a:picLocks noChangeAspect="1"/>
-          </p:cNvPicPr>
-          <p:nvPr/>
-        </p:nvPicPr>
-        <p:blipFill>
-          <a:blip r:embed="rId2"/>
-          <a:stretch>
-            <a:fillRect/>
-          </a:stretch>
-        </p:blipFill>
-        <p:spPr>
-          <a:xfrm>
-            <a:off x="6195060" y="1623060"/>
-            <a:ext cx="320040" cy="320040"/>
-          </a:xfrm>
-          <a:prstGeom prst="rect">
-            <a:avLst/>
-          </a:prstGeom>
-        </p:spPr>
-      </p:pic>
-      <p:sp>
-        <p:nvSpPr>
-          <p:cNvPr id="15" name="Text 11"/>
-          <p:cNvSpPr txBox="1"/>
-          <p:nvPr/>
-        </p:nvSpPr>
-        <p:spPr>
-          <a:xfrm>
-            <a:off x="6903720" y="1444752"/>
-            <a:ext cx="4754880" cy="365760"/>
-          </a:xfrm>
-          <a:prstGeom prst="rect">
-            <a:avLst/>
-          </a:prstGeom>
-          <a:noFill/>
-          <a:ln/>
-        </p:spPr>
-        <p:txBody>
-          <a:bodyPr wrap="square" lIns="0" tIns="0" rIns="0" bIns="0" rtlCol="0" anchor="t"/>
-          <a:lstStyle/>
-          <a:p>
-            <a:pPr indent="0" marL="0">
-              <a:buNone/>
-            </a:pPr>
-            <a:r>
-              <a:rPr lang="en-US" sz="2000" b="1" dirty="0">
-                <a:solidFill>
-                  <a:schemeClr val="tx1"/>
-                </a:solidFill>
-              </a:rPr>
-              <a:t>The gap is filled informally</a:t>
-            </a:r>
-            <a:endParaRPr lang="en-US" sz="2000" dirty="0"/>
-          </a:p>
-        </p:txBody>
-      </p:sp>
-      <p:sp>
-        <p:nvSpPr>
-          <p:cNvPr id="16" name="Text 12"/>
-          <p:cNvSpPr txBox="1"/>
-          <p:nvPr/>
-        </p:nvSpPr>
-        <p:spPr>
-          <a:xfrm>
-            <a:off x="6903720" y="1847088"/>
-            <a:ext cx="4754880" cy="777240"/>
-          </a:xfrm>
-          <a:prstGeom prst="rect">
-            <a:avLst/>
-          </a:prstGeom>
-          <a:noFill/>
-          <a:ln/>
-        </p:spPr>
-        <p:txBody>
-          <a:bodyPr wrap="square" lIns="0" tIns="0" rIns="0" bIns="0" rtlCol="0" anchor="t"/>
-          <a:lstStyle/>
-          <a:p>
-            <a:pPr indent="0" marL="0">
-              <a:buNone/>
-            </a:pPr>
-            <a:r>
-              <a:rPr lang="en-US" sz="1500" dirty="0">
-                <a:solidFill>
-                  <a:schemeClr val="accent6"/>
-                </a:solidFill>
-              </a:rPr>
-              <a:t>Shop credit, advances from a supervisor or a moneylender: costly, opaque and outside any wallet.</a:t>
-            </a:r>
-            <a:endParaRPr lang="en-US" sz="1500" dirty="0"/>
-          </a:p>
-        </p:txBody>
-      </p:sp>
-      <p:sp>
-        <p:nvSpPr>
-          <p:cNvPr id="17" name="Lenders cannot see wages circle"/>
-          <p:cNvSpPr/>
-          <p:nvPr/>
-        </p:nvSpPr>
-        <p:spPr>
-          <a:xfrm>
-            <a:off x="6035040" y="2926080"/>
-            <a:ext cx="640080" cy="640080"/>
-          </a:xfrm>
-          <a:prstGeom prst="ellipse">
-            <a:avLst/>
-          </a:prstGeom>
-          <a:solidFill>
-            <a:schemeClr val="accent1"/>
-          </a:solidFill>
-          <a:ln/>
-        </p:spPr>
-      </p:sp>
-      <p:pic>
-        <p:nvPicPr>
-          <p:cNvPr id="18" name="Lenders cannot see wages icon" descr="Lenders cannot see wages icon">    </p:cNvPr>
+          <p:cNvPr id="5" name="Persona icon" descr="Persona icon"/>
           <p:cNvPicPr>
             <a:picLocks noChangeAspect="1"/>
           </p:cNvPicPr>
@@ -4906,8 +4473,8 @@
         </p:blipFill>
         <p:spPr>
           <a:xfrm>
-            <a:off x="6195060" y="3086100"/>
-            <a:ext cx="320040" cy="320040"/>
+            <a:off x="1040130" y="1908810"/>
+            <a:ext cx="342900" cy="342900"/>
           </a:xfrm>
           <a:prstGeom prst="rect">
             <a:avLst/>
@@ -4916,14 +4483,14 @@
       </p:pic>
       <p:sp>
         <p:nvSpPr>
-          <p:cNvPr id="19" name="Text 14"/>
+          <p:cNvPr id="6" name="Text 3"/>
           <p:cNvSpPr txBox="1"/>
           <p:nvPr/>
         </p:nvSpPr>
         <p:spPr>
           <a:xfrm>
-            <a:off x="6903720" y="2907792"/>
-            <a:ext cx="4754880" cy="365760"/>
+            <a:off x="1737360" y="1783080"/>
+            <a:ext cx="3566160" cy="365760"/>
           </a:xfrm>
           <a:prstGeom prst="rect">
             <a:avLst/>
@@ -4935,7 +4502,7 @@
           <a:bodyPr wrap="square" lIns="0" tIns="0" rIns="0" bIns="0" rtlCol="0" anchor="t"/>
           <a:lstStyle/>
           <a:p>
-            <a:pPr indent="0" marL="0">
+            <a:pPr marL="0" indent="0">
               <a:buNone/>
             </a:pPr>
             <a:r>
@@ -4944,7 +4511,7 @@
                   <a:schemeClr val="tx1"/>
                 </a:solidFill>
               </a:rPr>
-              <a:t>Lenders cannot see wages</a:t>
+              <a:t>Rahim, garment worker</a:t>
             </a:r>
             <a:endParaRPr lang="en-US" sz="2000" dirty="0"/>
           </a:p>
@@ -4952,14 +4519,14 @@
       </p:sp>
       <p:sp>
         <p:nvSpPr>
-          <p:cNvPr id="20" name="Text 15"/>
+          <p:cNvPr id="7" name="Text 4"/>
           <p:cNvSpPr txBox="1"/>
           <p:nvPr/>
         </p:nvSpPr>
         <p:spPr>
           <a:xfrm>
-            <a:off x="6903720" y="3310128"/>
-            <a:ext cx="4754880" cy="777240"/>
+            <a:off x="1737360" y="2148840"/>
+            <a:ext cx="3566160" cy="320040"/>
           </a:xfrm>
           <a:prstGeom prst="rect">
             <a:avLst/>
@@ -4971,30 +4538,210 @@
           <a:bodyPr wrap="square" lIns="0" tIns="0" rIns="0" bIns="0" rtlCol="0" anchor="t"/>
           <a:lstStyle/>
           <a:p>
-            <a:pPr indent="0" marL="0">
-              <a:buNone/>
-            </a:pPr>
-            <a:r>
-              <a:rPr lang="en-US" sz="1500" dirty="0">
+            <a:pPr marL="0" indent="0">
+              <a:buNone/>
+            </a:pPr>
+            <a:r>
+              <a:rPr lang="en-US" sz="1400" dirty="0">
                 <a:solidFill>
                   <a:schemeClr val="accent6"/>
                 </a:solidFill>
               </a:rPr>
-              <a:t>Without payroll data nobody can size a safe advance, so the answer is usually no.</a:t>
-            </a:r>
-            <a:endParaRPr lang="en-US" sz="1500" dirty="0"/>
-          </a:p>
-        </p:txBody>
-      </p:sp>
-      <p:sp>
-        <p:nvSpPr>
-          <p:cNvPr id="21" name="Employers will not run it circle"/>
+              <a:t>Salary ৳18,000, paid on the 1st</a:t>
+            </a:r>
+            <a:endParaRPr lang="en-US" sz="1400" dirty="0"/>
+          </a:p>
+        </p:txBody>
+      </p:sp>
+      <p:sp>
+        <p:nvSpPr>
+          <p:cNvPr id="8" name="Text 5"/>
+          <p:cNvSpPr txBox="1"/>
+          <p:nvPr/>
+        </p:nvSpPr>
+        <p:spPr>
+          <a:xfrm>
+            <a:off x="868680" y="2788920"/>
+            <a:ext cx="4297680" cy="274320"/>
+          </a:xfrm>
+          <a:prstGeom prst="rect">
+            <a:avLst/>
+          </a:prstGeom>
+          <a:noFill/>
+          <a:ln/>
+        </p:spPr>
+        <p:txBody>
+          <a:bodyPr wrap="square" lIns="0" tIns="0" rIns="0" bIns="0" rtlCol="0" anchor="t"/>
+          <a:lstStyle/>
+          <a:p>
+            <a:pPr marL="0" indent="0">
+              <a:buNone/>
+            </a:pPr>
+            <a:r>
+              <a:rPr lang="en-US" sz="1400" dirty="0">
+                <a:solidFill>
+                  <a:schemeClr val="accent6"/>
+                </a:solidFill>
+              </a:rPr>
+              <a:t>Earned by 20 October</a:t>
+            </a:r>
+            <a:endParaRPr lang="en-US" sz="1400" dirty="0"/>
+          </a:p>
+        </p:txBody>
+      </p:sp>
+      <p:sp>
+        <p:nvSpPr>
+          <p:cNvPr id="9" name="Text 6"/>
+          <p:cNvSpPr txBox="1"/>
+          <p:nvPr/>
+        </p:nvSpPr>
+        <p:spPr>
+          <a:xfrm>
+            <a:off x="868680" y="3063240"/>
+            <a:ext cx="4297680" cy="822960"/>
+          </a:xfrm>
+          <a:prstGeom prst="rect">
+            <a:avLst/>
+          </a:prstGeom>
+          <a:noFill/>
+          <a:ln/>
+        </p:spPr>
+        <p:txBody>
+          <a:bodyPr wrap="square" lIns="0" tIns="0" rIns="0" bIns="0" rtlCol="0" anchor="t"/>
+          <a:lstStyle/>
+          <a:p>
+            <a:pPr marL="0" indent="0">
+              <a:buNone/>
+            </a:pPr>
+            <a:r>
+              <a:rPr lang="en-US" sz="5400" b="1" dirty="0">
+                <a:solidFill>
+                  <a:schemeClr val="accent1"/>
+                </a:solidFill>
+              </a:rPr>
+              <a:t>৳11,612</a:t>
+            </a:r>
+            <a:endParaRPr lang="en-US" sz="5400" dirty="0"/>
+          </a:p>
+        </p:txBody>
+      </p:sp>
+      <p:sp>
+        <p:nvSpPr>
+          <p:cNvPr id="10" name="Text 7"/>
+          <p:cNvSpPr txBox="1"/>
+          <p:nvPr/>
+        </p:nvSpPr>
+        <p:spPr>
+          <a:xfrm>
+            <a:off x="868680" y="3977640"/>
+            <a:ext cx="4297680" cy="274320"/>
+          </a:xfrm>
+          <a:prstGeom prst="rect">
+            <a:avLst/>
+          </a:prstGeom>
+          <a:noFill/>
+          <a:ln/>
+        </p:spPr>
+        <p:txBody>
+          <a:bodyPr wrap="square" lIns="0" tIns="0" rIns="0" bIns="0" rtlCol="0" anchor="t"/>
+          <a:lstStyle/>
+          <a:p>
+            <a:pPr marL="0" indent="0">
+              <a:buNone/>
+            </a:pPr>
+            <a:r>
+              <a:rPr lang="en-US" sz="1400" dirty="0">
+                <a:solidFill>
+                  <a:schemeClr val="accent6"/>
+                </a:solidFill>
+              </a:rPr>
+              <a:t>Reachable today without SalaryBridge</a:t>
+            </a:r>
+            <a:endParaRPr lang="en-US" sz="1400" dirty="0"/>
+          </a:p>
+        </p:txBody>
+      </p:sp>
+      <p:sp>
+        <p:nvSpPr>
+          <p:cNvPr id="11" name="Text 8"/>
+          <p:cNvSpPr txBox="1"/>
+          <p:nvPr/>
+        </p:nvSpPr>
+        <p:spPr>
+          <a:xfrm>
+            <a:off x="868680" y="4251960"/>
+            <a:ext cx="4297680" cy="822960"/>
+          </a:xfrm>
+          <a:prstGeom prst="rect">
+            <a:avLst/>
+          </a:prstGeom>
+          <a:noFill/>
+          <a:ln/>
+        </p:spPr>
+        <p:txBody>
+          <a:bodyPr wrap="square" lIns="0" tIns="0" rIns="0" bIns="0" rtlCol="0" anchor="t"/>
+          <a:lstStyle/>
+          <a:p>
+            <a:pPr marL="0" indent="0">
+              <a:buNone/>
+            </a:pPr>
+            <a:r>
+              <a:rPr lang="en-US" sz="5400" b="1" dirty="0">
+                <a:solidFill>
+                  <a:schemeClr val="accent4"/>
+                </a:solidFill>
+              </a:rPr>
+              <a:t>৳0</a:t>
+            </a:r>
+            <a:endParaRPr lang="en-US" sz="5400" dirty="0"/>
+          </a:p>
+        </p:txBody>
+      </p:sp>
+      <p:sp>
+        <p:nvSpPr>
+          <p:cNvPr id="12" name="Text 9"/>
+          <p:cNvSpPr txBox="1"/>
+          <p:nvPr/>
+        </p:nvSpPr>
+        <p:spPr>
+          <a:xfrm>
+            <a:off x="868680" y="5440680"/>
+            <a:ext cx="4389120" cy="274320"/>
+          </a:xfrm>
+          <a:prstGeom prst="rect">
+            <a:avLst/>
+          </a:prstGeom>
+          <a:noFill/>
+          <a:ln/>
+        </p:spPr>
+        <p:txBody>
+          <a:bodyPr wrap="square" lIns="0" tIns="0" rIns="0" bIns="0" rtlCol="0" anchor="t"/>
+          <a:lstStyle/>
+          <a:p>
+            <a:pPr marL="0" indent="0">
+              <a:buNone/>
+            </a:pPr>
+            <a:r>
+              <a:rPr lang="en-US" sz="1100" i="1" dirty="0">
+                <a:solidFill>
+                  <a:schemeClr val="accent6"/>
+                </a:solidFill>
+              </a:rPr>
+              <a:t>Figures from the SalaryBridge sandbox (synthetic persona).</a:t>
+            </a:r>
+            <a:endParaRPr lang="en-US" sz="1100" dirty="0"/>
+          </a:p>
+        </p:txBody>
+      </p:sp>
+      <p:sp>
+        <p:nvSpPr>
+          <p:cNvPr id="13" name="The gap is filled informally circle"/>
           <p:cNvSpPr/>
           <p:nvPr/>
         </p:nvSpPr>
         <p:spPr>
           <a:xfrm>
-            <a:off x="6035040" y="4389120"/>
+            <a:off x="6035040" y="1463040"/>
             <a:ext cx="640080" cy="640080"/>
           </a:xfrm>
           <a:prstGeom prst="ellipse">
@@ -5005,10 +4752,17 @@
           </a:solidFill>
           <a:ln/>
         </p:spPr>
+        <p:txBody>
+          <a:bodyPr/>
+          <a:lstStyle/>
+          <a:p>
+            <a:endParaRPr lang="en-US"/>
+          </a:p>
+        </p:txBody>
       </p:sp>
       <p:pic>
         <p:nvPicPr>
-          <p:cNvPr id="22" name="Employers will not run it icon" descr="Employers will not run it icon">    </p:cNvPr>
+          <p:cNvPr id="14" name="The gap is filled informally icon" descr="The gap is filled informally icon"/>
           <p:cNvPicPr>
             <a:picLocks noChangeAspect="1"/>
           </p:cNvPicPr>
@@ -5022,6 +4776,252 @@
         </p:blipFill>
         <p:spPr>
           <a:xfrm>
+            <a:off x="6195060" y="1623060"/>
+            <a:ext cx="320040" cy="320040"/>
+          </a:xfrm>
+          <a:prstGeom prst="rect">
+            <a:avLst/>
+          </a:prstGeom>
+        </p:spPr>
+      </p:pic>
+      <p:sp>
+        <p:nvSpPr>
+          <p:cNvPr id="15" name="Text 11"/>
+          <p:cNvSpPr txBox="1"/>
+          <p:nvPr/>
+        </p:nvSpPr>
+        <p:spPr>
+          <a:xfrm>
+            <a:off x="6903720" y="1444752"/>
+            <a:ext cx="4754880" cy="365760"/>
+          </a:xfrm>
+          <a:prstGeom prst="rect">
+            <a:avLst/>
+          </a:prstGeom>
+          <a:noFill/>
+          <a:ln/>
+        </p:spPr>
+        <p:txBody>
+          <a:bodyPr wrap="square" lIns="0" tIns="0" rIns="0" bIns="0" rtlCol="0" anchor="t"/>
+          <a:lstStyle/>
+          <a:p>
+            <a:pPr marL="0" indent="0">
+              <a:buNone/>
+            </a:pPr>
+            <a:r>
+              <a:rPr lang="en-US" sz="2000" b="1" dirty="0">
+                <a:solidFill>
+                  <a:schemeClr val="tx1"/>
+                </a:solidFill>
+              </a:rPr>
+              <a:t>The gap is filled informally</a:t>
+            </a:r>
+            <a:endParaRPr lang="en-US" sz="2000" dirty="0"/>
+          </a:p>
+        </p:txBody>
+      </p:sp>
+      <p:sp>
+        <p:nvSpPr>
+          <p:cNvPr id="16" name="Text 12"/>
+          <p:cNvSpPr txBox="1"/>
+          <p:nvPr/>
+        </p:nvSpPr>
+        <p:spPr>
+          <a:xfrm>
+            <a:off x="6903720" y="1847088"/>
+            <a:ext cx="4754880" cy="777240"/>
+          </a:xfrm>
+          <a:prstGeom prst="rect">
+            <a:avLst/>
+          </a:prstGeom>
+          <a:noFill/>
+          <a:ln/>
+        </p:spPr>
+        <p:txBody>
+          <a:bodyPr wrap="square" lIns="0" tIns="0" rIns="0" bIns="0" rtlCol="0" anchor="t"/>
+          <a:lstStyle/>
+          <a:p>
+            <a:pPr marL="0" indent="0">
+              <a:buNone/>
+            </a:pPr>
+            <a:r>
+              <a:rPr lang="en-US" sz="1500" dirty="0">
+                <a:solidFill>
+                  <a:schemeClr val="accent6"/>
+                </a:solidFill>
+              </a:rPr>
+              <a:t>Shop credit, advances from a supervisor or a moneylender: costly, opaque and outside any wallet.</a:t>
+            </a:r>
+            <a:endParaRPr lang="en-US" sz="1500" dirty="0"/>
+          </a:p>
+        </p:txBody>
+      </p:sp>
+      <p:sp>
+        <p:nvSpPr>
+          <p:cNvPr id="17" name="Lenders cannot see wages circle"/>
+          <p:cNvSpPr/>
+          <p:nvPr/>
+        </p:nvSpPr>
+        <p:spPr>
+          <a:xfrm>
+            <a:off x="6035040" y="2926080"/>
+            <a:ext cx="640080" cy="640080"/>
+          </a:xfrm>
+          <a:prstGeom prst="ellipse">
+            <a:avLst/>
+          </a:prstGeom>
+          <a:solidFill>
+            <a:schemeClr val="accent1"/>
+          </a:solidFill>
+          <a:ln/>
+        </p:spPr>
+        <p:txBody>
+          <a:bodyPr/>
+          <a:lstStyle/>
+          <a:p>
+            <a:endParaRPr lang="en-US"/>
+          </a:p>
+        </p:txBody>
+      </p:sp>
+      <p:pic>
+        <p:nvPicPr>
+          <p:cNvPr id="18" name="Lenders cannot see wages icon" descr="Lenders cannot see wages icon"/>
+          <p:cNvPicPr>
+            <a:picLocks noChangeAspect="1"/>
+          </p:cNvPicPr>
+          <p:nvPr/>
+        </p:nvPicPr>
+        <p:blipFill>
+          <a:blip r:embed="rId5"/>
+          <a:stretch>
+            <a:fillRect/>
+          </a:stretch>
+        </p:blipFill>
+        <p:spPr>
+          <a:xfrm>
+            <a:off x="6195060" y="3086100"/>
+            <a:ext cx="320040" cy="320040"/>
+          </a:xfrm>
+          <a:prstGeom prst="rect">
+            <a:avLst/>
+          </a:prstGeom>
+        </p:spPr>
+      </p:pic>
+      <p:sp>
+        <p:nvSpPr>
+          <p:cNvPr id="19" name="Text 14"/>
+          <p:cNvSpPr txBox="1"/>
+          <p:nvPr/>
+        </p:nvSpPr>
+        <p:spPr>
+          <a:xfrm>
+            <a:off x="6903720" y="2907792"/>
+            <a:ext cx="4754880" cy="365760"/>
+          </a:xfrm>
+          <a:prstGeom prst="rect">
+            <a:avLst/>
+          </a:prstGeom>
+          <a:noFill/>
+          <a:ln/>
+        </p:spPr>
+        <p:txBody>
+          <a:bodyPr wrap="square" lIns="0" tIns="0" rIns="0" bIns="0" rtlCol="0" anchor="t"/>
+          <a:lstStyle/>
+          <a:p>
+            <a:pPr marL="0" indent="0">
+              <a:buNone/>
+            </a:pPr>
+            <a:r>
+              <a:rPr lang="en-US" sz="2000" b="1" dirty="0">
+                <a:solidFill>
+                  <a:schemeClr val="tx1"/>
+                </a:solidFill>
+              </a:rPr>
+              <a:t>Lenders cannot see wages</a:t>
+            </a:r>
+            <a:endParaRPr lang="en-US" sz="2000" dirty="0"/>
+          </a:p>
+        </p:txBody>
+      </p:sp>
+      <p:sp>
+        <p:nvSpPr>
+          <p:cNvPr id="20" name="Text 15"/>
+          <p:cNvSpPr txBox="1"/>
+          <p:nvPr/>
+        </p:nvSpPr>
+        <p:spPr>
+          <a:xfrm>
+            <a:off x="6903720" y="3310128"/>
+            <a:ext cx="4754880" cy="777240"/>
+          </a:xfrm>
+          <a:prstGeom prst="rect">
+            <a:avLst/>
+          </a:prstGeom>
+          <a:noFill/>
+          <a:ln/>
+        </p:spPr>
+        <p:txBody>
+          <a:bodyPr wrap="square" lIns="0" tIns="0" rIns="0" bIns="0" rtlCol="0" anchor="t"/>
+          <a:lstStyle/>
+          <a:p>
+            <a:pPr marL="0" indent="0">
+              <a:buNone/>
+            </a:pPr>
+            <a:r>
+              <a:rPr lang="en-US" sz="1500" dirty="0">
+                <a:solidFill>
+                  <a:schemeClr val="accent6"/>
+                </a:solidFill>
+              </a:rPr>
+              <a:t>Without payroll data nobody can size a safe advance, so the answer is usually no.</a:t>
+            </a:r>
+            <a:endParaRPr lang="en-US" sz="1500" dirty="0"/>
+          </a:p>
+        </p:txBody>
+      </p:sp>
+      <p:sp>
+        <p:nvSpPr>
+          <p:cNvPr id="21" name="Employers will not run it circle"/>
+          <p:cNvSpPr/>
+          <p:nvPr/>
+        </p:nvSpPr>
+        <p:spPr>
+          <a:xfrm>
+            <a:off x="6035040" y="4389120"/>
+            <a:ext cx="640080" cy="640080"/>
+          </a:xfrm>
+          <a:prstGeom prst="ellipse">
+            <a:avLst/>
+          </a:prstGeom>
+          <a:solidFill>
+            <a:schemeClr val="accent1"/>
+          </a:solidFill>
+          <a:ln/>
+        </p:spPr>
+        <p:txBody>
+          <a:bodyPr/>
+          <a:lstStyle/>
+          <a:p>
+            <a:endParaRPr lang="en-US"/>
+          </a:p>
+        </p:txBody>
+      </p:sp>
+      <p:pic>
+        <p:nvPicPr>
+          <p:cNvPr id="22" name="Employers will not run it icon" descr="Employers will not run it icon"/>
+          <p:cNvPicPr>
+            <a:picLocks noChangeAspect="1"/>
+          </p:cNvPicPr>
+          <p:nvPr/>
+        </p:nvPicPr>
+        <p:blipFill>
+          <a:blip r:embed="rId6"/>
+          <a:stretch>
+            <a:fillRect/>
+          </a:stretch>
+        </p:blipFill>
+        <p:spPr>
+          <a:xfrm>
             <a:off x="6195060" y="4549140"/>
             <a:ext cx="320040" cy="320040"/>
           </a:xfrm>
@@ -5051,7 +5051,7 @@
           <a:bodyPr wrap="square" lIns="0" tIns="0" rIns="0" bIns="0" rtlCol="0" anchor="t"/>
           <a:lstStyle/>
           <a:p>
-            <a:pPr indent="0" marL="0">
+            <a:pPr marL="0" indent="0">
               <a:buNone/>
             </a:pPr>
             <a:r>
@@ -5087,7 +5087,7 @@
           <a:bodyPr wrap="square" lIns="0" tIns="0" rIns="0" bIns="0" rtlCol="0" anchor="t"/>
           <a:lstStyle/>
           <a:p>
-            <a:pPr indent="0" marL="0">
+            <a:pPr marL="0" indent="0">
               <a:buNone/>
             </a:pPr>
             <a:r>
@@ -5122,7 +5122,7 @@
           </a:prstGeom>
           <a:extLst>
             <a:ext uri="{C572A759-6A51-4108-AA02-DFA0A04FC94B}">
-              <ma14:wrappingTextBoxFlag xmlns:ma14="http://schemas.microsoft.com/office/mac/drawingml/2011/main" val="0"/>
+              <ma14:wrappingTextBoxFlag xmlns:ma14="http://schemas.microsoft.com/office/mac/drawingml/2011/main" xmlns="" val="0"/>
             </a:ext>
           </a:extLst>
         </p:spPr>
@@ -5140,7 +5140,7 @@
           <a:p>
             <a:pPr algn="r"/>
             <a:fld id="{F7021451-1387-4CA6-816F-3879F97B5CBC}" type="slidenum">
-              <a:rPr b="0" lang="en-US"/>
+              <a:rPr lang="en-US" b="0"/>
               <a:t>2</a:t>
             </a:fld>
             <a:endParaRPr lang="en-US"/>
@@ -5175,9 +5175,11 @@
       <p:sp>
         <p:nvSpPr>
           <p:cNvPr id="2" name="Text 0"/>
-          <p:cNvSpPr/>
+          <p:cNvSpPr>
+            <a:spLocks noGrp="1"/>
+          </p:cNvSpPr>
           <p:nvPr>
-            <p:ph idx="100" type="title" hasCustomPrompt="1"/>
+            <p:ph type="title" idx="100" hasCustomPrompt="1"/>
           </p:nvPr>
         </p:nvSpPr>
         <p:spPr>
@@ -5195,7 +5197,7 @@
           <a:bodyPr wrap="square" lIns="0" tIns="0" rIns="0" bIns="0" rtlCol="0" anchor="ctr"/>
           <a:lstStyle/>
           <a:p>
-            <a:pPr indent="0" marL="0">
+            <a:pPr marL="0" indent="0">
               <a:buNone/>
             </a:pPr>
             <a:r>
@@ -5239,13 +5241,20 @@
             <a:prstDash val="solid"/>
           </a:ln>
           <a:effectLst>
-            <a:outerShdw sx="100000" sy="100000" kx="0" ky="0" algn="bl" rotWithShape="0" blurRad="101600" dist="25400" dir="5400000">
+            <a:outerShdw blurRad="101600" dist="25400" dir="5400000" algn="bl" rotWithShape="0">
               <a:srgbClr val="000000">
                 <a:alpha val="12000"/>
               </a:srgbClr>
             </a:outerShdw>
           </a:effectLst>
         </p:spPr>
+        <p:txBody>
+          <a:bodyPr/>
+          <a:lstStyle/>
+          <a:p>
+            <a:endParaRPr lang="en-US"/>
+          </a:p>
+        </p:txBody>
       </p:sp>
       <p:sp>
         <p:nvSpPr>
@@ -5266,17 +5275,24 @@
           </a:solidFill>
           <a:ln/>
         </p:spPr>
+        <p:txBody>
+          <a:bodyPr/>
+          <a:lstStyle/>
+          <a:p>
+            <a:endParaRPr lang="en-US"/>
+          </a:p>
+        </p:txBody>
       </p:sp>
       <p:pic>
         <p:nvPicPr>
-          <p:cNvPr id="5" name="Step 1 icon" descr="Step 1 icon">    </p:cNvPr>
+          <p:cNvPr id="5" name="Step 1 icon" descr="Step 1 icon"/>
           <p:cNvPicPr>
             <a:picLocks noChangeAspect="1"/>
           </p:cNvPicPr>
           <p:nvPr/>
         </p:nvPicPr>
         <p:blipFill>
-          <a:blip r:embed="rId1"/>
+          <a:blip r:embed="rId3"/>
           <a:stretch>
             <a:fillRect/>
           </a:stretch>
@@ -5312,7 +5328,7 @@
           <a:bodyPr wrap="square" lIns="0" tIns="0" rIns="0" bIns="0" rtlCol="0" anchor="t"/>
           <a:lstStyle/>
           <a:p>
-            <a:pPr algn="r" indent="0" marL="0">
+            <a:pPr marL="0" indent="0" algn="r">
               <a:buNone/>
             </a:pPr>
             <a:r>
@@ -5348,7 +5364,7 @@
           <a:bodyPr wrap="square" lIns="0" tIns="0" rIns="0" bIns="0" rtlCol="0" anchor="t"/>
           <a:lstStyle/>
           <a:p>
-            <a:pPr indent="0" marL="0">
+            <a:pPr marL="0" indent="0">
               <a:buNone/>
             </a:pPr>
             <a:r>
@@ -5384,7 +5400,7 @@
           <a:bodyPr wrap="square" lIns="0" tIns="0" rIns="0" bIns="0" rtlCol="0" anchor="t"/>
           <a:lstStyle/>
           <a:p>
-            <a:pPr indent="0" marL="0">
+            <a:pPr marL="0" indent="0">
               <a:buNone/>
             </a:pPr>
             <a:r>
@@ -5420,7 +5436,7 @@
           <a:bodyPr wrap="square" lIns="0" tIns="0" rIns="0" bIns="0" rtlCol="0" anchor="t"/>
           <a:lstStyle/>
           <a:p>
-            <a:pPr algn="ctr" indent="0" marL="0">
+            <a:pPr marL="0" indent="0" algn="ctr">
               <a:buNone/>
             </a:pPr>
             <a:r>
@@ -5461,13 +5477,20 @@
             <a:prstDash val="solid"/>
           </a:ln>
           <a:effectLst>
-            <a:outerShdw sx="100000" sy="100000" kx="0" ky="0" algn="bl" rotWithShape="0" blurRad="101600" dist="25400" dir="5400000">
+            <a:outerShdw blurRad="101600" dist="25400" dir="5400000" algn="bl" rotWithShape="0">
               <a:srgbClr val="000000">
                 <a:alpha val="12000"/>
               </a:srgbClr>
             </a:outerShdw>
           </a:effectLst>
         </p:spPr>
+        <p:txBody>
+          <a:bodyPr/>
+          <a:lstStyle/>
+          <a:p>
+            <a:endParaRPr lang="en-US"/>
+          </a:p>
+        </p:txBody>
       </p:sp>
       <p:sp>
         <p:nvSpPr>
@@ -5488,17 +5511,24 @@
           </a:solidFill>
           <a:ln/>
         </p:spPr>
+        <p:txBody>
+          <a:bodyPr/>
+          <a:lstStyle/>
+          <a:p>
+            <a:endParaRPr lang="en-US"/>
+          </a:p>
+        </p:txBody>
       </p:sp>
       <p:pic>
         <p:nvPicPr>
-          <p:cNvPr id="12" name="Step 2 icon" descr="Step 2 icon">    </p:cNvPr>
+          <p:cNvPr id="12" name="Step 2 icon" descr="Step 2 icon"/>
           <p:cNvPicPr>
             <a:picLocks noChangeAspect="1"/>
           </p:cNvPicPr>
           <p:nvPr/>
         </p:nvPicPr>
         <p:blipFill>
-          <a:blip r:embed="rId2"/>
+          <a:blip r:embed="rId4"/>
           <a:stretch>
             <a:fillRect/>
           </a:stretch>
@@ -5534,7 +5564,7 @@
           <a:bodyPr wrap="square" lIns="0" tIns="0" rIns="0" bIns="0" rtlCol="0" anchor="t"/>
           <a:lstStyle/>
           <a:p>
-            <a:pPr algn="r" indent="0" marL="0">
+            <a:pPr marL="0" indent="0" algn="r">
               <a:buNone/>
             </a:pPr>
             <a:r>
@@ -5570,7 +5600,7 @@
           <a:bodyPr wrap="square" lIns="0" tIns="0" rIns="0" bIns="0" rtlCol="0" anchor="t"/>
           <a:lstStyle/>
           <a:p>
-            <a:pPr indent="0" marL="0">
+            <a:pPr marL="0" indent="0">
               <a:buNone/>
             </a:pPr>
             <a:r>
@@ -5606,7 +5636,7 @@
           <a:bodyPr wrap="square" lIns="0" tIns="0" rIns="0" bIns="0" rtlCol="0" anchor="t"/>
           <a:lstStyle/>
           <a:p>
-            <a:pPr indent="0" marL="0">
+            <a:pPr marL="0" indent="0">
               <a:buNone/>
             </a:pPr>
             <a:r>
@@ -5642,7 +5672,7 @@
           <a:bodyPr wrap="square" lIns="0" tIns="0" rIns="0" bIns="0" rtlCol="0" anchor="t"/>
           <a:lstStyle/>
           <a:p>
-            <a:pPr algn="ctr" indent="0" marL="0">
+            <a:pPr marL="0" indent="0" algn="ctr">
               <a:buNone/>
             </a:pPr>
             <a:r>
@@ -5683,13 +5713,20 @@
             <a:prstDash val="solid"/>
           </a:ln>
           <a:effectLst>
-            <a:outerShdw sx="100000" sy="100000" kx="0" ky="0" algn="bl" rotWithShape="0" blurRad="101600" dist="25400" dir="5400000">
+            <a:outerShdw blurRad="101600" dist="25400" dir="5400000" algn="bl" rotWithShape="0">
               <a:srgbClr val="000000">
                 <a:alpha val="12000"/>
               </a:srgbClr>
             </a:outerShdw>
           </a:effectLst>
         </p:spPr>
+        <p:txBody>
+          <a:bodyPr/>
+          <a:lstStyle/>
+          <a:p>
+            <a:endParaRPr lang="en-US"/>
+          </a:p>
+        </p:txBody>
       </p:sp>
       <p:sp>
         <p:nvSpPr>
@@ -5710,17 +5747,24 @@
           </a:solidFill>
           <a:ln/>
         </p:spPr>
+        <p:txBody>
+          <a:bodyPr/>
+          <a:lstStyle/>
+          <a:p>
+            <a:endParaRPr lang="en-US"/>
+          </a:p>
+        </p:txBody>
       </p:sp>
       <p:pic>
         <p:nvPicPr>
-          <p:cNvPr id="19" name="Step 3 icon" descr="Step 3 icon">    </p:cNvPr>
+          <p:cNvPr id="19" name="Step 3 icon" descr="Step 3 icon"/>
           <p:cNvPicPr>
             <a:picLocks noChangeAspect="1"/>
           </p:cNvPicPr>
           <p:nvPr/>
         </p:nvPicPr>
         <p:blipFill>
-          <a:blip r:embed="rId3"/>
+          <a:blip r:embed="rId5"/>
           <a:stretch>
             <a:fillRect/>
           </a:stretch>
@@ -5756,7 +5800,7 @@
           <a:bodyPr wrap="square" lIns="0" tIns="0" rIns="0" bIns="0" rtlCol="0" anchor="t"/>
           <a:lstStyle/>
           <a:p>
-            <a:pPr algn="r" indent="0" marL="0">
+            <a:pPr marL="0" indent="0" algn="r">
               <a:buNone/>
             </a:pPr>
             <a:r>
@@ -5792,7 +5836,7 @@
           <a:bodyPr wrap="square" lIns="0" tIns="0" rIns="0" bIns="0" rtlCol="0" anchor="t"/>
           <a:lstStyle/>
           <a:p>
-            <a:pPr indent="0" marL="0">
+            <a:pPr marL="0" indent="0">
               <a:buNone/>
             </a:pPr>
             <a:r>
@@ -5828,7 +5872,7 @@
           <a:bodyPr wrap="square" lIns="0" tIns="0" rIns="0" bIns="0" rtlCol="0" anchor="t"/>
           <a:lstStyle/>
           <a:p>
-            <a:pPr indent="0" marL="0">
+            <a:pPr marL="0" indent="0">
               <a:buNone/>
             </a:pPr>
             <a:r>
@@ -5864,7 +5908,7 @@
           <a:bodyPr wrap="square" lIns="0" tIns="0" rIns="0" bIns="0" rtlCol="0" anchor="t"/>
           <a:lstStyle/>
           <a:p>
-            <a:pPr algn="ctr" indent="0" marL="0">
+            <a:pPr marL="0" indent="0" algn="ctr">
               <a:buNone/>
             </a:pPr>
             <a:r>
@@ -5905,13 +5949,20 @@
             <a:prstDash val="solid"/>
           </a:ln>
           <a:effectLst>
-            <a:outerShdw sx="100000" sy="100000" kx="0" ky="0" algn="bl" rotWithShape="0" blurRad="101600" dist="25400" dir="5400000">
+            <a:outerShdw blurRad="101600" dist="25400" dir="5400000" algn="bl" rotWithShape="0">
               <a:srgbClr val="000000">
                 <a:alpha val="12000"/>
               </a:srgbClr>
             </a:outerShdw>
           </a:effectLst>
         </p:spPr>
+        <p:txBody>
+          <a:bodyPr/>
+          <a:lstStyle/>
+          <a:p>
+            <a:endParaRPr lang="en-US"/>
+          </a:p>
+        </p:txBody>
       </p:sp>
       <p:sp>
         <p:nvSpPr>
@@ -5932,17 +5983,24 @@
           </a:solidFill>
           <a:ln/>
         </p:spPr>
+        <p:txBody>
+          <a:bodyPr/>
+          <a:lstStyle/>
+          <a:p>
+            <a:endParaRPr lang="en-US"/>
+          </a:p>
+        </p:txBody>
       </p:sp>
       <p:pic>
         <p:nvPicPr>
-          <p:cNvPr id="26" name="Step 4 icon" descr="Step 4 icon">    </p:cNvPr>
+          <p:cNvPr id="26" name="Step 4 icon" descr="Step 4 icon"/>
           <p:cNvPicPr>
             <a:picLocks noChangeAspect="1"/>
           </p:cNvPicPr>
           <p:nvPr/>
         </p:nvPicPr>
         <p:blipFill>
-          <a:blip r:embed="rId4"/>
+          <a:blip r:embed="rId6"/>
           <a:stretch>
             <a:fillRect/>
           </a:stretch>
@@ -5978,7 +6036,7 @@
           <a:bodyPr wrap="square" lIns="0" tIns="0" rIns="0" bIns="0" rtlCol="0" anchor="t"/>
           <a:lstStyle/>
           <a:p>
-            <a:pPr algn="r" indent="0" marL="0">
+            <a:pPr marL="0" indent="0" algn="r">
               <a:buNone/>
             </a:pPr>
             <a:r>
@@ -6014,7 +6072,7 @@
           <a:bodyPr wrap="square" lIns="0" tIns="0" rIns="0" bIns="0" rtlCol="0" anchor="t"/>
           <a:lstStyle/>
           <a:p>
-            <a:pPr indent="0" marL="0">
+            <a:pPr marL="0" indent="0">
               <a:buNone/>
             </a:pPr>
             <a:r>
@@ -6050,7 +6108,7 @@
           <a:bodyPr wrap="square" lIns="0" tIns="0" rIns="0" bIns="0" rtlCol="0" anchor="t"/>
           <a:lstStyle/>
           <a:p>
-            <a:pPr indent="0" marL="0">
+            <a:pPr marL="0" indent="0">
               <a:buNone/>
             </a:pPr>
             <a:r>
@@ -6086,6 +6144,13 @@
           </a:solidFill>
           <a:ln/>
         </p:spPr>
+        <p:txBody>
+          <a:bodyPr/>
+          <a:lstStyle/>
+          <a:p>
+            <a:endParaRPr lang="en-US"/>
+          </a:p>
+        </p:txBody>
       </p:sp>
       <p:sp>
         <p:nvSpPr>
@@ -6108,7 +6173,7 @@
           <a:bodyPr wrap="square" lIns="0" tIns="0" rIns="0" bIns="0" rtlCol="0" anchor="t"/>
           <a:lstStyle/>
           <a:p>
-            <a:pPr indent="0" marL="0">
+            <a:pPr marL="0" indent="0">
               <a:buNone/>
             </a:pPr>
             <a:r>
@@ -6144,7 +6209,7 @@
           <a:bodyPr wrap="square" lIns="0" tIns="0" rIns="0" bIns="0" rtlCol="0" anchor="t"/>
           <a:lstStyle/>
           <a:p>
-            <a:pPr indent="0" marL="0">
+            <a:pPr marL="0" indent="0">
               <a:buNone/>
             </a:pPr>
             <a:r>
@@ -6180,6 +6245,13 @@
           </a:solidFill>
           <a:ln/>
         </p:spPr>
+        <p:txBody>
+          <a:bodyPr/>
+          <a:lstStyle/>
+          <a:p>
+            <a:endParaRPr lang="en-US"/>
+          </a:p>
+        </p:txBody>
       </p:sp>
       <p:sp>
         <p:nvSpPr>
@@ -6202,7 +6274,7 @@
           <a:bodyPr wrap="square" lIns="0" tIns="0" rIns="0" bIns="0" rtlCol="0" anchor="t"/>
           <a:lstStyle/>
           <a:p>
-            <a:pPr indent="0" marL="0">
+            <a:pPr marL="0" indent="0">
               <a:buNone/>
             </a:pPr>
             <a:r>
@@ -6238,7 +6310,7 @@
           <a:bodyPr wrap="square" lIns="0" tIns="0" rIns="0" bIns="0" rtlCol="0" anchor="t"/>
           <a:lstStyle/>
           <a:p>
-            <a:pPr indent="0" marL="0">
+            <a:pPr marL="0" indent="0">
               <a:buNone/>
             </a:pPr>
             <a:r>
@@ -6274,6 +6346,13 @@
           </a:solidFill>
           <a:ln/>
         </p:spPr>
+        <p:txBody>
+          <a:bodyPr/>
+          <a:lstStyle/>
+          <a:p>
+            <a:endParaRPr lang="en-US"/>
+          </a:p>
+        </p:txBody>
       </p:sp>
       <p:sp>
         <p:nvSpPr>
@@ -6296,7 +6375,7 @@
           <a:bodyPr wrap="square" lIns="0" tIns="0" rIns="0" bIns="0" rtlCol="0" anchor="t"/>
           <a:lstStyle/>
           <a:p>
-            <a:pPr indent="0" marL="0">
+            <a:pPr marL="0" indent="0">
               <a:buNone/>
             </a:pPr>
             <a:r>
@@ -6332,7 +6411,7 @@
           <a:bodyPr wrap="square" lIns="0" tIns="0" rIns="0" bIns="0" rtlCol="0" anchor="t"/>
           <a:lstStyle/>
           <a:p>
-            <a:pPr indent="0" marL="0">
+            <a:pPr marL="0" indent="0">
               <a:buNone/>
             </a:pPr>
             <a:r>
@@ -6349,7 +6428,7 @@
       </p:sp>
       <p:sp>
         <p:nvSpPr>
-          <p:cNvPr id="25" name="Slide Number Placeholder 0"/>
+          <p:cNvPr id="39" name="Slide Number Placeholder 0"/>
           <p:cNvSpPr>
             <a:spLocks noGrp="1"/>
           </p:cNvSpPr>
@@ -6367,7 +6446,7 @@
           </a:prstGeom>
           <a:extLst>
             <a:ext uri="{C572A759-6A51-4108-AA02-DFA0A04FC94B}">
-              <ma14:wrappingTextBoxFlag xmlns:ma14="http://schemas.microsoft.com/office/mac/drawingml/2011/main" val="0"/>
+              <ma14:wrappingTextBoxFlag xmlns:ma14="http://schemas.microsoft.com/office/mac/drawingml/2011/main" xmlns="" val="0"/>
             </a:ext>
           </a:extLst>
         </p:spPr>
@@ -6385,7 +6464,7 @@
           <a:p>
             <a:pPr algn="r"/>
             <a:fld id="{F7021451-1387-4CA6-816F-3879F97B5CBC}" type="slidenum">
-              <a:rPr b="0" lang="en-US"/>
+              <a:rPr lang="en-US" b="0"/>
               <a:t>3</a:t>
             </a:fld>
             <a:endParaRPr lang="en-US"/>
@@ -6420,9 +6499,11 @@
       <p:sp>
         <p:nvSpPr>
           <p:cNvPr id="2" name="Text 0"/>
-          <p:cNvSpPr/>
+          <p:cNvSpPr>
+            <a:spLocks noGrp="1"/>
+          </p:cNvSpPr>
           <p:nvPr>
-            <p:ph idx="100" type="title" hasCustomPrompt="1"/>
+            <p:ph type="title" idx="100" hasCustomPrompt="1"/>
           </p:nvPr>
         </p:nvSpPr>
         <p:spPr>
@@ -6440,7 +6521,7 @@
           <a:bodyPr wrap="square" lIns="0" tIns="0" rIns="0" bIns="0" rtlCol="0" anchor="ctr"/>
           <a:lstStyle/>
           <a:p>
-            <a:pPr indent="0" marL="0">
+            <a:pPr marL="0" indent="0">
               <a:buNone/>
             </a:pPr>
             <a:r>
@@ -6479,267 +6560,24 @@
           </a:solidFill>
           <a:ln/>
           <a:effectLst>
-            <a:outerShdw sx="100000" sy="100000" kx="0" ky="0" algn="bl" rotWithShape="0" blurRad="127000" dist="38100" dir="5400000">
+            <a:outerShdw blurRad="127000" dist="38100" dir="5400000" algn="bl" rotWithShape="0">
               <a:srgbClr val="000000">
                 <a:alpha val="25000"/>
               </a:srgbClr>
             </a:outerShdw>
           </a:effectLst>
         </p:spPr>
+        <p:txBody>
+          <a:bodyPr/>
+          <a:lstStyle/>
+          <a:p>
+            <a:endParaRPr lang="en-US"/>
+          </a:p>
+        </p:txBody>
       </p:sp>
       <p:pic>
         <p:nvPicPr>
-          <p:cNvPr id="4" name="See what you have earned" descr="See what you have earned">    </p:cNvPr>
-          <p:cNvPicPr>
-            <a:picLocks noChangeAspect="1"/>
-          </p:cNvPicPr>
-          <p:nvPr/>
-        </p:nvPicPr>
-        <p:blipFill>
-          <a:blip r:embed="rId1"/>
-          <a:stretch>
-            <a:fillRect/>
-          </a:stretch>
-        </p:blipFill>
-        <p:spPr>
-          <a:xfrm>
-            <a:off x="1440759" y="1463040"/>
-            <a:ext cx="1736203" cy="3429000"/>
-          </a:xfrm>
-          <a:prstGeom prst="rect">
-            <a:avLst/>
-          </a:prstGeom>
-        </p:spPr>
-      </p:pic>
-      <p:sp>
-        <p:nvSpPr>
-          <p:cNvPr id="5" name="Text 2"/>
-          <p:cNvSpPr txBox="1"/>
-          <p:nvPr/>
-        </p:nvSpPr>
-        <p:spPr>
-          <a:xfrm>
-            <a:off x="548640" y="5120640"/>
-            <a:ext cx="3520440" cy="365760"/>
-          </a:xfrm>
-          <a:prstGeom prst="rect">
-            <a:avLst/>
-          </a:prstGeom>
-          <a:noFill/>
-          <a:ln/>
-        </p:spPr>
-        <p:txBody>
-          <a:bodyPr wrap="square" lIns="0" tIns="0" rIns="0" bIns="0" rtlCol="0" anchor="t"/>
-          <a:lstStyle/>
-          <a:p>
-            <a:pPr algn="ctr" indent="0" marL="0">
-              <a:buNone/>
-            </a:pPr>
-            <a:r>
-              <a:rPr lang="en-US" sz="1700" b="1" dirty="0">
-                <a:solidFill>
-                  <a:schemeClr val="tx1"/>
-                </a:solidFill>
-              </a:rPr>
-              <a:t>See what you have earned</a:t>
-            </a:r>
-            <a:endParaRPr lang="en-US" sz="1700" dirty="0"/>
-          </a:p>
-        </p:txBody>
-      </p:sp>
-      <p:sp>
-        <p:nvSpPr>
-          <p:cNvPr id="6" name="Text 3"/>
-          <p:cNvSpPr txBox="1"/>
-          <p:nvPr/>
-        </p:nvSpPr>
-        <p:spPr>
-          <a:xfrm>
-            <a:off x="548640" y="5486400"/>
-            <a:ext cx="3520440" cy="548640"/>
-          </a:xfrm>
-          <a:prstGeom prst="rect">
-            <a:avLst/>
-          </a:prstGeom>
-          <a:noFill/>
-          <a:ln/>
-        </p:spPr>
-        <p:txBody>
-          <a:bodyPr wrap="square" lIns="0" tIns="0" rIns="0" bIns="0" rtlCol="0" anchor="t"/>
-          <a:lstStyle/>
-          <a:p>
-            <a:pPr algn="ctr" indent="0" marL="0">
-              <a:buNone/>
-            </a:pPr>
-            <a:r>
-              <a:rPr lang="en-US" sz="1300" dirty="0">
-                <a:solidFill>
-                  <a:schemeClr val="accent6"/>
-                </a:solidFill>
-              </a:rPr>
-              <a:t>Earned to date and the safe limit, live from the simulated payroll.</a:t>
-            </a:r>
-            <a:endParaRPr lang="en-US" sz="1300" dirty="0"/>
-          </a:p>
-        </p:txBody>
-      </p:sp>
-      <p:sp>
-        <p:nvSpPr>
-          <p:cNvPr id="7" name="Offer with a reason frame"/>
-          <p:cNvSpPr/>
-          <p:nvPr/>
-        </p:nvSpPr>
-        <p:spPr>
-          <a:xfrm>
-            <a:off x="5107503" y="1380744"/>
-            <a:ext cx="1900795" cy="3593592"/>
-          </a:xfrm>
-          <a:prstGeom prst="roundRect">
-            <a:avLst>
-              <a:gd name="adj" fmla="val 10583"/>
-            </a:avLst>
-          </a:prstGeom>
-          <a:solidFill>
-            <a:srgbClr val="0F1C22"/>
-          </a:solidFill>
-          <a:ln/>
-          <a:effectLst>
-            <a:outerShdw sx="100000" sy="100000" kx="0" ky="0" algn="bl" rotWithShape="0" blurRad="127000" dist="38100" dir="5400000">
-              <a:srgbClr val="000000">
-                <a:alpha val="25000"/>
-              </a:srgbClr>
-            </a:outerShdw>
-          </a:effectLst>
-        </p:spPr>
-      </p:sp>
-      <p:pic>
-        <p:nvPicPr>
-          <p:cNvPr id="8" name="Offer with a reason" descr="Offer with a reason">    </p:cNvPr>
-          <p:cNvPicPr>
-            <a:picLocks noChangeAspect="1"/>
-          </p:cNvPicPr>
-          <p:nvPr/>
-        </p:nvPicPr>
-        <p:blipFill>
-          <a:blip r:embed="rId2"/>
-          <a:stretch>
-            <a:fillRect/>
-          </a:stretch>
-        </p:blipFill>
-        <p:spPr>
-          <a:xfrm>
-            <a:off x="5189799" y="1463040"/>
-            <a:ext cx="1736203" cy="3429000"/>
-          </a:xfrm>
-          <a:prstGeom prst="rect">
-            <a:avLst/>
-          </a:prstGeom>
-        </p:spPr>
-      </p:pic>
-      <p:sp>
-        <p:nvSpPr>
-          <p:cNvPr id="9" name="Text 5"/>
-          <p:cNvSpPr txBox="1"/>
-          <p:nvPr/>
-        </p:nvSpPr>
-        <p:spPr>
-          <a:xfrm>
-            <a:off x="4297680" y="5120640"/>
-            <a:ext cx="3520440" cy="365760"/>
-          </a:xfrm>
-          <a:prstGeom prst="rect">
-            <a:avLst/>
-          </a:prstGeom>
-          <a:noFill/>
-          <a:ln/>
-        </p:spPr>
-        <p:txBody>
-          <a:bodyPr wrap="square" lIns="0" tIns="0" rIns="0" bIns="0" rtlCol="0" anchor="t"/>
-          <a:lstStyle/>
-          <a:p>
-            <a:pPr algn="ctr" indent="0" marL="0">
-              <a:buNone/>
-            </a:pPr>
-            <a:r>
-              <a:rPr lang="en-US" sz="1700" b="1" dirty="0">
-                <a:solidFill>
-                  <a:schemeClr val="tx1"/>
-                </a:solidFill>
-              </a:rPr>
-              <a:t>Offer with a reason</a:t>
-            </a:r>
-            <a:endParaRPr lang="en-US" sz="1700" dirty="0"/>
-          </a:p>
-        </p:txBody>
-      </p:sp>
-      <p:sp>
-        <p:nvSpPr>
-          <p:cNvPr id="10" name="Text 6"/>
-          <p:cNvSpPr txBox="1"/>
-          <p:nvPr/>
-        </p:nvSpPr>
-        <p:spPr>
-          <a:xfrm>
-            <a:off x="4297680" y="5486400"/>
-            <a:ext cx="3520440" cy="548640"/>
-          </a:xfrm>
-          <a:prstGeom prst="rect">
-            <a:avLst/>
-          </a:prstGeom>
-          <a:noFill/>
-          <a:ln/>
-        </p:spPr>
-        <p:txBody>
-          <a:bodyPr wrap="square" lIns="0" tIns="0" rIns="0" bIns="0" rtlCol="0" anchor="t"/>
-          <a:lstStyle/>
-          <a:p>
-            <a:pPr algn="ctr" indent="0" marL="0">
-              <a:buNone/>
-            </a:pPr>
-            <a:r>
-              <a:rPr lang="en-US" sz="1300" dirty="0">
-                <a:solidFill>
-                  <a:schemeClr val="accent6"/>
-                </a:solidFill>
-              </a:rPr>
-              <a:t>Fee, total deduction and date, with why this amount, in plain words.</a:t>
-            </a:r>
-            <a:endParaRPr lang="en-US" sz="1300" dirty="0"/>
-          </a:p>
-        </p:txBody>
-      </p:sp>
-      <p:sp>
-        <p:nvSpPr>
-          <p:cNvPr id="11" name="Fully in Bangla frame"/>
-          <p:cNvSpPr/>
-          <p:nvPr/>
-        </p:nvSpPr>
-        <p:spPr>
-          <a:xfrm>
-            <a:off x="8856543" y="1380744"/>
-            <a:ext cx="1900795" cy="3593592"/>
-          </a:xfrm>
-          <a:prstGeom prst="roundRect">
-            <a:avLst>
-              <a:gd name="adj" fmla="val 10583"/>
-            </a:avLst>
-          </a:prstGeom>
-          <a:solidFill>
-            <a:srgbClr val="0F1C22"/>
-          </a:solidFill>
-          <a:ln/>
-          <a:effectLst>
-            <a:outerShdw sx="100000" sy="100000" kx="0" ky="0" algn="bl" rotWithShape="0" blurRad="127000" dist="38100" dir="5400000">
-              <a:srgbClr val="000000">
-                <a:alpha val="25000"/>
-              </a:srgbClr>
-            </a:outerShdw>
-          </a:effectLst>
-        </p:spPr>
-      </p:sp>
-      <p:pic>
-        <p:nvPicPr>
-          <p:cNvPr id="12" name="Fully in Bangla" descr="Fully in Bangla">    </p:cNvPr>
+          <p:cNvPr id="4" name="See what you have earned" descr="See what you have earned"/>
           <p:cNvPicPr>
             <a:picLocks noChangeAspect="1"/>
           </p:cNvPicPr>
@@ -6753,6 +6591,270 @@
         </p:blipFill>
         <p:spPr>
           <a:xfrm>
+            <a:off x="1440759" y="1463040"/>
+            <a:ext cx="1736203" cy="3429000"/>
+          </a:xfrm>
+          <a:prstGeom prst="rect">
+            <a:avLst/>
+          </a:prstGeom>
+        </p:spPr>
+      </p:pic>
+      <p:sp>
+        <p:nvSpPr>
+          <p:cNvPr id="5" name="Text 2"/>
+          <p:cNvSpPr txBox="1"/>
+          <p:nvPr/>
+        </p:nvSpPr>
+        <p:spPr>
+          <a:xfrm>
+            <a:off x="548640" y="5120640"/>
+            <a:ext cx="3520440" cy="365760"/>
+          </a:xfrm>
+          <a:prstGeom prst="rect">
+            <a:avLst/>
+          </a:prstGeom>
+          <a:noFill/>
+          <a:ln/>
+        </p:spPr>
+        <p:txBody>
+          <a:bodyPr wrap="square" lIns="0" tIns="0" rIns="0" bIns="0" rtlCol="0" anchor="t"/>
+          <a:lstStyle/>
+          <a:p>
+            <a:pPr marL="0" indent="0" algn="ctr">
+              <a:buNone/>
+            </a:pPr>
+            <a:r>
+              <a:rPr lang="en-US" sz="1700" b="1" dirty="0">
+                <a:solidFill>
+                  <a:schemeClr val="tx1"/>
+                </a:solidFill>
+              </a:rPr>
+              <a:t>See what you have earned</a:t>
+            </a:r>
+            <a:endParaRPr lang="en-US" sz="1700" dirty="0"/>
+          </a:p>
+        </p:txBody>
+      </p:sp>
+      <p:sp>
+        <p:nvSpPr>
+          <p:cNvPr id="6" name="Text 3"/>
+          <p:cNvSpPr txBox="1"/>
+          <p:nvPr/>
+        </p:nvSpPr>
+        <p:spPr>
+          <a:xfrm>
+            <a:off x="548640" y="5486400"/>
+            <a:ext cx="3520440" cy="548640"/>
+          </a:xfrm>
+          <a:prstGeom prst="rect">
+            <a:avLst/>
+          </a:prstGeom>
+          <a:noFill/>
+          <a:ln/>
+        </p:spPr>
+        <p:txBody>
+          <a:bodyPr wrap="square" lIns="0" tIns="0" rIns="0" bIns="0" rtlCol="0" anchor="t"/>
+          <a:lstStyle/>
+          <a:p>
+            <a:pPr marL="0" indent="0" algn="ctr">
+              <a:buNone/>
+            </a:pPr>
+            <a:r>
+              <a:rPr lang="en-US" sz="1300" dirty="0">
+                <a:solidFill>
+                  <a:schemeClr val="accent6"/>
+                </a:solidFill>
+              </a:rPr>
+              <a:t>Earned to date and the safe limit, live from the simulated payroll.</a:t>
+            </a:r>
+            <a:endParaRPr lang="en-US" sz="1300" dirty="0"/>
+          </a:p>
+        </p:txBody>
+      </p:sp>
+      <p:sp>
+        <p:nvSpPr>
+          <p:cNvPr id="7" name="Offer with a reason frame"/>
+          <p:cNvSpPr/>
+          <p:nvPr/>
+        </p:nvSpPr>
+        <p:spPr>
+          <a:xfrm>
+            <a:off x="5107503" y="1380744"/>
+            <a:ext cx="1900795" cy="3593592"/>
+          </a:xfrm>
+          <a:prstGeom prst="roundRect">
+            <a:avLst>
+              <a:gd name="adj" fmla="val 10583"/>
+            </a:avLst>
+          </a:prstGeom>
+          <a:solidFill>
+            <a:srgbClr val="0F1C22"/>
+          </a:solidFill>
+          <a:ln/>
+          <a:effectLst>
+            <a:outerShdw blurRad="127000" dist="38100" dir="5400000" algn="bl" rotWithShape="0">
+              <a:srgbClr val="000000">
+                <a:alpha val="25000"/>
+              </a:srgbClr>
+            </a:outerShdw>
+          </a:effectLst>
+        </p:spPr>
+        <p:txBody>
+          <a:bodyPr/>
+          <a:lstStyle/>
+          <a:p>
+            <a:endParaRPr lang="en-US"/>
+          </a:p>
+        </p:txBody>
+      </p:sp>
+      <p:pic>
+        <p:nvPicPr>
+          <p:cNvPr id="8" name="Offer with a reason" descr="Offer with a reason"/>
+          <p:cNvPicPr>
+            <a:picLocks noChangeAspect="1"/>
+          </p:cNvPicPr>
+          <p:nvPr/>
+        </p:nvPicPr>
+        <p:blipFill>
+          <a:blip r:embed="rId4"/>
+          <a:stretch>
+            <a:fillRect/>
+          </a:stretch>
+        </p:blipFill>
+        <p:spPr>
+          <a:xfrm>
+            <a:off x="5189799" y="1463040"/>
+            <a:ext cx="1736203" cy="3429000"/>
+          </a:xfrm>
+          <a:prstGeom prst="rect">
+            <a:avLst/>
+          </a:prstGeom>
+        </p:spPr>
+      </p:pic>
+      <p:sp>
+        <p:nvSpPr>
+          <p:cNvPr id="9" name="Text 5"/>
+          <p:cNvSpPr txBox="1"/>
+          <p:nvPr/>
+        </p:nvSpPr>
+        <p:spPr>
+          <a:xfrm>
+            <a:off x="4297680" y="5120640"/>
+            <a:ext cx="3520440" cy="365760"/>
+          </a:xfrm>
+          <a:prstGeom prst="rect">
+            <a:avLst/>
+          </a:prstGeom>
+          <a:noFill/>
+          <a:ln/>
+        </p:spPr>
+        <p:txBody>
+          <a:bodyPr wrap="square" lIns="0" tIns="0" rIns="0" bIns="0" rtlCol="0" anchor="t"/>
+          <a:lstStyle/>
+          <a:p>
+            <a:pPr marL="0" indent="0" algn="ctr">
+              <a:buNone/>
+            </a:pPr>
+            <a:r>
+              <a:rPr lang="en-US" sz="1700" b="1" dirty="0">
+                <a:solidFill>
+                  <a:schemeClr val="tx1"/>
+                </a:solidFill>
+              </a:rPr>
+              <a:t>Offer with a reason</a:t>
+            </a:r>
+            <a:endParaRPr lang="en-US" sz="1700" dirty="0"/>
+          </a:p>
+        </p:txBody>
+      </p:sp>
+      <p:sp>
+        <p:nvSpPr>
+          <p:cNvPr id="10" name="Text 6"/>
+          <p:cNvSpPr txBox="1"/>
+          <p:nvPr/>
+        </p:nvSpPr>
+        <p:spPr>
+          <a:xfrm>
+            <a:off x="4297680" y="5486400"/>
+            <a:ext cx="3520440" cy="548640"/>
+          </a:xfrm>
+          <a:prstGeom prst="rect">
+            <a:avLst/>
+          </a:prstGeom>
+          <a:noFill/>
+          <a:ln/>
+        </p:spPr>
+        <p:txBody>
+          <a:bodyPr wrap="square" lIns="0" tIns="0" rIns="0" bIns="0" rtlCol="0" anchor="t"/>
+          <a:lstStyle/>
+          <a:p>
+            <a:pPr marL="0" indent="0" algn="ctr">
+              <a:buNone/>
+            </a:pPr>
+            <a:r>
+              <a:rPr lang="en-US" sz="1300" dirty="0">
+                <a:solidFill>
+                  <a:schemeClr val="accent6"/>
+                </a:solidFill>
+              </a:rPr>
+              <a:t>Fee, total deduction and date, with why this amount, in plain words.</a:t>
+            </a:r>
+            <a:endParaRPr lang="en-US" sz="1300" dirty="0"/>
+          </a:p>
+        </p:txBody>
+      </p:sp>
+      <p:sp>
+        <p:nvSpPr>
+          <p:cNvPr id="11" name="Fully in Bangla frame"/>
+          <p:cNvSpPr/>
+          <p:nvPr/>
+        </p:nvSpPr>
+        <p:spPr>
+          <a:xfrm>
+            <a:off x="8856543" y="1380744"/>
+            <a:ext cx="1900795" cy="3593592"/>
+          </a:xfrm>
+          <a:prstGeom prst="roundRect">
+            <a:avLst>
+              <a:gd name="adj" fmla="val 10583"/>
+            </a:avLst>
+          </a:prstGeom>
+          <a:solidFill>
+            <a:srgbClr val="0F1C22"/>
+          </a:solidFill>
+          <a:ln/>
+          <a:effectLst>
+            <a:outerShdw blurRad="127000" dist="38100" dir="5400000" algn="bl" rotWithShape="0">
+              <a:srgbClr val="000000">
+                <a:alpha val="25000"/>
+              </a:srgbClr>
+            </a:outerShdw>
+          </a:effectLst>
+        </p:spPr>
+        <p:txBody>
+          <a:bodyPr/>
+          <a:lstStyle/>
+          <a:p>
+            <a:endParaRPr lang="en-US"/>
+          </a:p>
+        </p:txBody>
+      </p:sp>
+      <p:pic>
+        <p:nvPicPr>
+          <p:cNvPr id="12" name="Fully in Bangla" descr="Fully in Bangla"/>
+          <p:cNvPicPr>
+            <a:picLocks noChangeAspect="1"/>
+          </p:cNvPicPr>
+          <p:nvPr/>
+        </p:nvPicPr>
+        <p:blipFill>
+          <a:blip r:embed="rId5"/>
+          <a:stretch>
+            <a:fillRect/>
+          </a:stretch>
+        </p:blipFill>
+        <p:spPr>
+          <a:xfrm>
             <a:off x="8938839" y="1463040"/>
             <a:ext cx="1736203" cy="3429000"/>
           </a:xfrm>
@@ -6782,7 +6884,7 @@
           <a:bodyPr wrap="square" lIns="0" tIns="0" rIns="0" bIns="0" rtlCol="0" anchor="t"/>
           <a:lstStyle/>
           <a:p>
-            <a:pPr algn="ctr" indent="0" marL="0">
+            <a:pPr marL="0" indent="0" algn="ctr">
               <a:buNone/>
             </a:pPr>
             <a:r>
@@ -6818,7 +6920,7 @@
           <a:bodyPr wrap="square" lIns="0" tIns="0" rIns="0" bIns="0" rtlCol="0" anchor="t"/>
           <a:lstStyle/>
           <a:p>
-            <a:pPr algn="ctr" indent="0" marL="0">
+            <a:pPr marL="0" indent="0" algn="ctr">
               <a:buNone/>
             </a:pPr>
             <a:r>
@@ -6854,7 +6956,7 @@
           <a:bodyPr wrap="square" lIns="0" tIns="0" rIns="0" bIns="0" rtlCol="0" anchor="t"/>
           <a:lstStyle/>
           <a:p>
-            <a:pPr indent="0" marL="0">
+            <a:pPr marL="0" indent="0">
               <a:buNone/>
             </a:pPr>
             <a:r>
@@ -6889,7 +6991,7 @@
           </a:prstGeom>
           <a:extLst>
             <a:ext uri="{C572A759-6A51-4108-AA02-DFA0A04FC94B}">
-              <ma14:wrappingTextBoxFlag xmlns:ma14="http://schemas.microsoft.com/office/mac/drawingml/2011/main" val="0"/>
+              <ma14:wrappingTextBoxFlag xmlns:ma14="http://schemas.microsoft.com/office/mac/drawingml/2011/main" xmlns="" val="0"/>
             </a:ext>
           </a:extLst>
         </p:spPr>
@@ -6907,7 +7009,7 @@
           <a:p>
             <a:pPr algn="r"/>
             <a:fld id="{F7021451-1387-4CA6-816F-3879F97B5CBC}" type="slidenum">
-              <a:rPr b="0" lang="en-US"/>
+              <a:rPr lang="en-US" b="0"/>
               <a:t>4</a:t>
             </a:fld>
             <a:endParaRPr lang="en-US"/>
@@ -6942,9 +7044,11 @@
       <p:sp>
         <p:nvSpPr>
           <p:cNvPr id="2" name="Text 0"/>
-          <p:cNvSpPr/>
+          <p:cNvSpPr>
+            <a:spLocks noGrp="1"/>
+          </p:cNvSpPr>
           <p:nvPr>
-            <p:ph idx="100" type="title" hasCustomPrompt="1"/>
+            <p:ph type="title" idx="100" hasCustomPrompt="1"/>
           </p:nvPr>
         </p:nvSpPr>
         <p:spPr>
@@ -6962,7 +7066,7 @@
           <a:bodyPr wrap="square" lIns="0" tIns="0" rIns="0" bIns="0" rtlCol="0" anchor="ctr"/>
           <a:lstStyle/>
           <a:p>
-            <a:pPr indent="0" marL="0">
+            <a:pPr marL="0" indent="0">
               <a:buNone/>
             </a:pPr>
             <a:r>
@@ -7006,24 +7110,31 @@
             <a:prstDash val="solid"/>
           </a:ln>
           <a:effectLst>
-            <a:outerShdw sx="100000" sy="100000" kx="0" ky="0" algn="bl" rotWithShape="0" blurRad="101600" dist="25400" dir="5400000">
+            <a:outerShdw blurRad="101600" dist="25400" dir="5400000" algn="bl" rotWithShape="0">
               <a:srgbClr val="000000">
                 <a:alpha val="12000"/>
               </a:srgbClr>
             </a:outerShdw>
           </a:effectLst>
         </p:spPr>
+        <p:txBody>
+          <a:bodyPr/>
+          <a:lstStyle/>
+          <a:p>
+            <a:endParaRPr lang="en-US"/>
+          </a:p>
+        </p:txBody>
       </p:sp>
       <p:pic>
         <p:nvPicPr>
-          <p:cNvPr id="4" name="Employer HR dashboard" descr="Employer HR dashboard">    </p:cNvPr>
+          <p:cNvPr id="4" name="Employer HR dashboard" descr="Employer HR dashboard"/>
           <p:cNvPicPr>
             <a:picLocks noChangeAspect="1"/>
           </p:cNvPicPr>
           <p:nvPr/>
         </p:nvPicPr>
         <p:blipFill>
-          <a:blip r:embed="rId1"/>
+          <a:blip r:embed="rId3"/>
           <a:stretch>
             <a:fillRect/>
           </a:stretch>
@@ -7064,24 +7175,31 @@
             <a:prstDash val="solid"/>
           </a:ln>
           <a:effectLst>
-            <a:outerShdw sx="100000" sy="100000" kx="0" ky="0" algn="bl" rotWithShape="0" blurRad="101600" dist="25400" dir="5400000">
+            <a:outerShdw blurRad="101600" dist="25400" dir="5400000" algn="bl" rotWithShape="0">
               <a:srgbClr val="000000">
                 <a:alpha val="12000"/>
               </a:srgbClr>
             </a:outerShdw>
           </a:effectLst>
         </p:spPr>
+        <p:txBody>
+          <a:bodyPr/>
+          <a:lstStyle/>
+          <a:p>
+            <a:endParaRPr lang="en-US"/>
+          </a:p>
+        </p:txBody>
       </p:sp>
       <p:pic>
         <p:nvPicPr>
-          <p:cNvPr id="6" name="upay ops dashboard, Eid surge" descr="upay ops dashboard, Eid surge">    </p:cNvPr>
+          <p:cNvPr id="6" name="upay ops dashboard, Eid surge" descr="upay ops dashboard, Eid surge"/>
           <p:cNvPicPr>
             <a:picLocks noChangeAspect="1"/>
           </p:cNvPicPr>
           <p:nvPr/>
         </p:nvPicPr>
         <p:blipFill>
-          <a:blip r:embed="rId2"/>
+          <a:blip r:embed="rId4"/>
           <a:stretch>
             <a:fillRect/>
           </a:stretch>
@@ -7117,7 +7235,7 @@
           <a:bodyPr wrap="square" lIns="0" tIns="0" rIns="0" bIns="0" rtlCol="0" anchor="t"/>
           <a:lstStyle/>
           <a:p>
-            <a:pPr indent="0" marL="0">
+            <a:pPr marL="0" indent="0">
               <a:buNone/>
             </a:pPr>
             <a:r>
@@ -7211,7 +7329,7 @@
           <a:bodyPr wrap="square" lIns="0" tIns="0" rIns="0" bIns="0" rtlCol="0" anchor="t"/>
           <a:lstStyle/>
           <a:p>
-            <a:pPr indent="0" marL="0">
+            <a:pPr marL="0" indent="0">
               <a:buNone/>
             </a:pPr>
             <a:r>
@@ -7304,7 +7422,7 @@
           </a:prstGeom>
           <a:extLst>
             <a:ext uri="{C572A759-6A51-4108-AA02-DFA0A04FC94B}">
-              <ma14:wrappingTextBoxFlag xmlns:ma14="http://schemas.microsoft.com/office/mac/drawingml/2011/main" val="0"/>
+              <ma14:wrappingTextBoxFlag xmlns:ma14="http://schemas.microsoft.com/office/mac/drawingml/2011/main" xmlns="" val="0"/>
             </a:ext>
           </a:extLst>
         </p:spPr>
@@ -7322,7 +7440,7 @@
           <a:p>
             <a:pPr algn="r"/>
             <a:fld id="{F7021451-1387-4CA6-816F-3879F97B5CBC}" type="slidenum">
-              <a:rPr b="0" lang="en-US"/>
+              <a:rPr lang="en-US" b="0"/>
               <a:t>5</a:t>
             </a:fld>
             <a:endParaRPr lang="en-US"/>
@@ -7357,9 +7475,11 @@
       <p:sp>
         <p:nvSpPr>
           <p:cNvPr id="2" name="Text 0"/>
-          <p:cNvSpPr/>
+          <p:cNvSpPr>
+            <a:spLocks noGrp="1"/>
+          </p:cNvSpPr>
           <p:nvPr>
-            <p:ph idx="100" type="title" hasCustomPrompt="1"/>
+            <p:ph type="title" idx="100" hasCustomPrompt="1"/>
           </p:nvPr>
         </p:nvSpPr>
         <p:spPr>
@@ -7377,7 +7497,7 @@
           <a:bodyPr wrap="square" lIns="0" tIns="0" rIns="0" bIns="0" rtlCol="0" anchor="ctr"/>
           <a:lstStyle/>
           <a:p>
-            <a:pPr indent="0" marL="0">
+            <a:pPr marL="0" indent="0">
               <a:buNone/>
             </a:pPr>
             <a:r>
@@ -7421,13 +7541,20 @@
             <a:prstDash val="solid"/>
           </a:ln>
           <a:effectLst>
-            <a:outerShdw sx="100000" sy="100000" kx="0" ky="0" algn="bl" rotWithShape="0" blurRad="101600" dist="25400" dir="5400000">
+            <a:outerShdw blurRad="101600" dist="25400" dir="5400000" algn="bl" rotWithShape="0">
               <a:srgbClr val="000000">
                 <a:alpha val="12000"/>
               </a:srgbClr>
             </a:outerShdw>
           </a:effectLst>
         </p:spPr>
+        <p:txBody>
+          <a:bodyPr/>
+          <a:lstStyle/>
+          <a:p>
+            <a:endParaRPr lang="en-US"/>
+          </a:p>
+        </p:txBody>
       </p:sp>
       <p:sp>
         <p:nvSpPr>
@@ -7448,17 +7575,24 @@
           </a:solidFill>
           <a:ln/>
         </p:spPr>
+        <p:txBody>
+          <a:bodyPr/>
+          <a:lstStyle/>
+          <a:p>
+            <a:endParaRPr lang="en-US"/>
+          </a:p>
+        </p:txBody>
       </p:sp>
       <p:pic>
         <p:nvPicPr>
-          <p:cNvPr id="5" name="M1 · Employer payroll risk icon" descr="M1 · Employer payroll risk icon">    </p:cNvPr>
+          <p:cNvPr id="5" name="M1 · Employer payroll risk icon" descr="M1 · Employer payroll risk icon"/>
           <p:cNvPicPr>
             <a:picLocks noChangeAspect="1"/>
           </p:cNvPicPr>
           <p:nvPr/>
         </p:nvPicPr>
         <p:blipFill>
-          <a:blip r:embed="rId1"/>
+          <a:blip r:embed="rId3"/>
           <a:stretch>
             <a:fillRect/>
           </a:stretch>
@@ -7494,7 +7628,7 @@
           <a:bodyPr wrap="square" lIns="0" tIns="0" rIns="0" bIns="0" rtlCol="0" anchor="ctr"/>
           <a:lstStyle/>
           <a:p>
-            <a:pPr indent="0" marL="0">
+            <a:pPr marL="0" indent="0">
               <a:buNone/>
             </a:pPr>
             <a:r>
@@ -7530,7 +7664,7 @@
           <a:bodyPr wrap="square" lIns="0" tIns="0" rIns="0" bIns="0" rtlCol="0" anchor="t"/>
           <a:lstStyle/>
           <a:p>
-            <a:pPr indent="0" marL="0">
+            <a:pPr marL="0" indent="0">
               <a:buNone/>
             </a:pPr>
             <a:r>
@@ -7566,7 +7700,7 @@
           <a:bodyPr wrap="square" lIns="0" tIns="0" rIns="0" bIns="0" rtlCol="0" anchor="t"/>
           <a:lstStyle/>
           <a:p>
-            <a:pPr indent="0" marL="0">
+            <a:pPr marL="0" indent="0">
               <a:buNone/>
             </a:pPr>
             <a:r>
@@ -7607,13 +7741,20 @@
             <a:prstDash val="solid"/>
           </a:ln>
           <a:effectLst>
-            <a:outerShdw sx="100000" sy="100000" kx="0" ky="0" algn="bl" rotWithShape="0" blurRad="101600" dist="25400" dir="5400000">
+            <a:outerShdw blurRad="101600" dist="25400" dir="5400000" algn="bl" rotWithShape="0">
               <a:srgbClr val="000000">
                 <a:alpha val="12000"/>
               </a:srgbClr>
             </a:outerShdw>
           </a:effectLst>
         </p:spPr>
+        <p:txBody>
+          <a:bodyPr/>
+          <a:lstStyle/>
+          <a:p>
+            <a:endParaRPr lang="en-US"/>
+          </a:p>
+        </p:txBody>
       </p:sp>
       <p:sp>
         <p:nvSpPr>
@@ -7634,17 +7775,24 @@
           </a:solidFill>
           <a:ln/>
         </p:spPr>
+        <p:txBody>
+          <a:bodyPr/>
+          <a:lstStyle/>
+          <a:p>
+            <a:endParaRPr lang="en-US"/>
+          </a:p>
+        </p:txBody>
       </p:sp>
       <p:pic>
         <p:nvPicPr>
-          <p:cNvPr id="11" name="M2 · Repayment risk → tier icon" descr="M2 · Repayment risk → tier icon">    </p:cNvPr>
+          <p:cNvPr id="11" name="M2 · Repayment risk → tier icon" descr="M2 · Repayment risk → tier icon"/>
           <p:cNvPicPr>
             <a:picLocks noChangeAspect="1"/>
           </p:cNvPicPr>
           <p:nvPr/>
         </p:nvPicPr>
         <p:blipFill>
-          <a:blip r:embed="rId2"/>
+          <a:blip r:embed="rId4"/>
           <a:stretch>
             <a:fillRect/>
           </a:stretch>
@@ -7680,7 +7828,7 @@
           <a:bodyPr wrap="square" lIns="0" tIns="0" rIns="0" bIns="0" rtlCol="0" anchor="ctr"/>
           <a:lstStyle/>
           <a:p>
-            <a:pPr indent="0" marL="0">
+            <a:pPr marL="0" indent="0">
               <a:buNone/>
             </a:pPr>
             <a:r>
@@ -7716,7 +7864,7 @@
           <a:bodyPr wrap="square" lIns="0" tIns="0" rIns="0" bIns="0" rtlCol="0" anchor="t"/>
           <a:lstStyle/>
           <a:p>
-            <a:pPr indent="0" marL="0">
+            <a:pPr marL="0" indent="0">
               <a:buNone/>
             </a:pPr>
             <a:r>
@@ -7752,7 +7900,7 @@
           <a:bodyPr wrap="square" lIns="0" tIns="0" rIns="0" bIns="0" rtlCol="0" anchor="t"/>
           <a:lstStyle/>
           <a:p>
-            <a:pPr indent="0" marL="0">
+            <a:pPr marL="0" indent="0">
               <a:buNone/>
             </a:pPr>
             <a:r>
@@ -7793,13 +7941,20 @@
             <a:prstDash val="solid"/>
           </a:ln>
           <a:effectLst>
-            <a:outerShdw sx="100000" sy="100000" kx="0" ky="0" algn="bl" rotWithShape="0" blurRad="101600" dist="25400" dir="5400000">
+            <a:outerShdw blurRad="101600" dist="25400" dir="5400000" algn="bl" rotWithShape="0">
               <a:srgbClr val="000000">
                 <a:alpha val="12000"/>
               </a:srgbClr>
             </a:outerShdw>
           </a:effectLst>
         </p:spPr>
+        <p:txBody>
+          <a:bodyPr/>
+          <a:lstStyle/>
+          <a:p>
+            <a:endParaRPr lang="en-US"/>
+          </a:p>
+        </p:txBody>
       </p:sp>
       <p:sp>
         <p:nvSpPr>
@@ -7820,17 +7975,24 @@
           </a:solidFill>
           <a:ln/>
         </p:spPr>
+        <p:txBody>
+          <a:bodyPr/>
+          <a:lstStyle/>
+          <a:p>
+            <a:endParaRPr lang="en-US"/>
+          </a:p>
+        </p:txBody>
       </p:sp>
       <p:pic>
         <p:nvPicPr>
-          <p:cNvPr id="17" name="M3 · Leaving before payday icon" descr="M3 · Leaving before payday icon">    </p:cNvPr>
+          <p:cNvPr id="17" name="M3 · Leaving before payday icon" descr="M3 · Leaving before payday icon"/>
           <p:cNvPicPr>
             <a:picLocks noChangeAspect="1"/>
           </p:cNvPicPr>
           <p:nvPr/>
         </p:nvPicPr>
         <p:blipFill>
-          <a:blip r:embed="rId3"/>
+          <a:blip r:embed="rId5"/>
           <a:stretch>
             <a:fillRect/>
           </a:stretch>
@@ -7866,7 +8028,7 @@
           <a:bodyPr wrap="square" lIns="0" tIns="0" rIns="0" bIns="0" rtlCol="0" anchor="ctr"/>
           <a:lstStyle/>
           <a:p>
-            <a:pPr indent="0" marL="0">
+            <a:pPr marL="0" indent="0">
               <a:buNone/>
             </a:pPr>
             <a:r>
@@ -7902,7 +8064,7 @@
           <a:bodyPr wrap="square" lIns="0" tIns="0" rIns="0" bIns="0" rtlCol="0" anchor="t"/>
           <a:lstStyle/>
           <a:p>
-            <a:pPr indent="0" marL="0">
+            <a:pPr marL="0" indent="0">
               <a:buNone/>
             </a:pPr>
             <a:r>
@@ -7938,7 +8100,7 @@
           <a:bodyPr wrap="square" lIns="0" tIns="0" rIns="0" bIns="0" rtlCol="0" anchor="t"/>
           <a:lstStyle/>
           <a:p>
-            <a:pPr indent="0" marL="0">
+            <a:pPr marL="0" indent="0">
               <a:buNone/>
             </a:pPr>
             <a:r>
@@ -7979,13 +8141,20 @@
             <a:prstDash val="solid"/>
           </a:ln>
           <a:effectLst>
-            <a:outerShdw sx="100000" sy="100000" kx="0" ky="0" algn="bl" rotWithShape="0" blurRad="101600" dist="25400" dir="5400000">
+            <a:outerShdw blurRad="101600" dist="25400" dir="5400000" algn="bl" rotWithShape="0">
               <a:srgbClr val="000000">
                 <a:alpha val="12000"/>
               </a:srgbClr>
             </a:outerShdw>
           </a:effectLst>
         </p:spPr>
+        <p:txBody>
+          <a:bodyPr/>
+          <a:lstStyle/>
+          <a:p>
+            <a:endParaRPr lang="en-US"/>
+          </a:p>
+        </p:txBody>
       </p:sp>
       <p:sp>
         <p:nvSpPr>
@@ -8006,17 +8175,24 @@
           </a:solidFill>
           <a:ln/>
         </p:spPr>
+        <p:txBody>
+          <a:bodyPr/>
+          <a:lstStyle/>
+          <a:p>
+            <a:endParaRPr lang="en-US"/>
+          </a:p>
+        </p:txBody>
       </p:sp>
       <p:pic>
         <p:nvPicPr>
-          <p:cNvPr id="23" name="M4 · Capital forecast icon" descr="M4 · Capital forecast icon">    </p:cNvPr>
+          <p:cNvPr id="23" name="M4 · Capital forecast icon" descr="M4 · Capital forecast icon"/>
           <p:cNvPicPr>
             <a:picLocks noChangeAspect="1"/>
           </p:cNvPicPr>
           <p:nvPr/>
         </p:nvPicPr>
         <p:blipFill>
-          <a:blip r:embed="rId4"/>
+          <a:blip r:embed="rId6"/>
           <a:stretch>
             <a:fillRect/>
           </a:stretch>
@@ -8052,7 +8228,7 @@
           <a:bodyPr wrap="square" lIns="0" tIns="0" rIns="0" bIns="0" rtlCol="0" anchor="ctr"/>
           <a:lstStyle/>
           <a:p>
-            <a:pPr indent="0" marL="0">
+            <a:pPr marL="0" indent="0">
               <a:buNone/>
             </a:pPr>
             <a:r>
@@ -8088,7 +8264,7 @@
           <a:bodyPr wrap="square" lIns="0" tIns="0" rIns="0" bIns="0" rtlCol="0" anchor="t"/>
           <a:lstStyle/>
           <a:p>
-            <a:pPr indent="0" marL="0">
+            <a:pPr marL="0" indent="0">
               <a:buNone/>
             </a:pPr>
             <a:r>
@@ -8124,7 +8300,7 @@
           <a:bodyPr wrap="square" lIns="0" tIns="0" rIns="0" bIns="0" rtlCol="0" anchor="t"/>
           <a:lstStyle/>
           <a:p>
-            <a:pPr indent="0" marL="0">
+            <a:pPr marL="0" indent="0">
               <a:buNone/>
             </a:pPr>
             <a:r>
@@ -8165,13 +8341,20 @@
             <a:prstDash val="solid"/>
           </a:ln>
           <a:effectLst>
-            <a:outerShdw sx="100000" sy="100000" kx="0" ky="0" algn="bl" rotWithShape="0" blurRad="101600" dist="25400" dir="5400000">
+            <a:outerShdw blurRad="101600" dist="25400" dir="5400000" algn="bl" rotWithShape="0">
               <a:srgbClr val="000000">
                 <a:alpha val="12000"/>
               </a:srgbClr>
             </a:outerShdw>
           </a:effectLst>
         </p:spPr>
+        <p:txBody>
+          <a:bodyPr/>
+          <a:lstStyle/>
+          <a:p>
+            <a:endParaRPr lang="en-US"/>
+          </a:p>
+        </p:txBody>
       </p:sp>
       <p:sp>
         <p:nvSpPr>
@@ -8192,17 +8375,24 @@
           </a:solidFill>
           <a:ln/>
         </p:spPr>
+        <p:txBody>
+          <a:bodyPr/>
+          <a:lstStyle/>
+          <a:p>
+            <a:endParaRPr lang="en-US"/>
+          </a:p>
+        </p:txBody>
       </p:sp>
       <p:pic>
         <p:nvPicPr>
-          <p:cNvPr id="29" name="M5 · Borrowing monitor icon" descr="M5 · Borrowing monitor icon">    </p:cNvPr>
+          <p:cNvPr id="29" name="M5 · Borrowing monitor icon" descr="M5 · Borrowing monitor icon"/>
           <p:cNvPicPr>
             <a:picLocks noChangeAspect="1"/>
           </p:cNvPicPr>
           <p:nvPr/>
         </p:nvPicPr>
         <p:blipFill>
-          <a:blip r:embed="rId5"/>
+          <a:blip r:embed="rId7"/>
           <a:stretch>
             <a:fillRect/>
           </a:stretch>
@@ -8238,7 +8428,7 @@
           <a:bodyPr wrap="square" lIns="0" tIns="0" rIns="0" bIns="0" rtlCol="0" anchor="ctr"/>
           <a:lstStyle/>
           <a:p>
-            <a:pPr indent="0" marL="0">
+            <a:pPr marL="0" indent="0">
               <a:buNone/>
             </a:pPr>
             <a:r>
@@ -8274,7 +8464,7 @@
           <a:bodyPr wrap="square" lIns="0" tIns="0" rIns="0" bIns="0" rtlCol="0" anchor="t"/>
           <a:lstStyle/>
           <a:p>
-            <a:pPr indent="0" marL="0">
+            <a:pPr marL="0" indent="0">
               <a:buNone/>
             </a:pPr>
             <a:r>
@@ -8310,7 +8500,7 @@
           <a:bodyPr wrap="square" lIns="0" tIns="0" rIns="0" bIns="0" rtlCol="0" anchor="t"/>
           <a:lstStyle/>
           <a:p>
-            <a:pPr indent="0" marL="0">
+            <a:pPr marL="0" indent="0">
               <a:buNone/>
             </a:pPr>
             <a:r>
@@ -8351,13 +8541,20 @@
             <a:prstDash val="solid"/>
           </a:ln>
           <a:effectLst>
-            <a:outerShdw sx="100000" sy="100000" kx="0" ky="0" algn="bl" rotWithShape="0" blurRad="101600" dist="25400" dir="5400000">
+            <a:outerShdw blurRad="101600" dist="25400" dir="5400000" algn="bl" rotWithShape="0">
               <a:srgbClr val="000000">
                 <a:alpha val="12000"/>
               </a:srgbClr>
             </a:outerShdw>
           </a:effectLst>
         </p:spPr>
+        <p:txBody>
+          <a:bodyPr/>
+          <a:lstStyle/>
+          <a:p>
+            <a:endParaRPr lang="en-US"/>
+          </a:p>
+        </p:txBody>
       </p:sp>
       <p:sp>
         <p:nvSpPr>
@@ -8378,17 +8575,24 @@
           </a:solidFill>
           <a:ln/>
         </p:spPr>
+        <p:txBody>
+          <a:bodyPr/>
+          <a:lstStyle/>
+          <a:p>
+            <a:endParaRPr lang="en-US"/>
+          </a:p>
+        </p:txBody>
       </p:sp>
       <p:pic>
         <p:nvPicPr>
-          <p:cNvPr id="35" name="Claude · explanations icon" descr="Claude · explanations icon">    </p:cNvPr>
+          <p:cNvPr id="35" name="Claude · explanations icon" descr="Claude · explanations icon"/>
           <p:cNvPicPr>
             <a:picLocks noChangeAspect="1"/>
           </p:cNvPicPr>
           <p:nvPr/>
         </p:nvPicPr>
         <p:blipFill>
-          <a:blip r:embed="rId6"/>
+          <a:blip r:embed="rId8"/>
           <a:stretch>
             <a:fillRect/>
           </a:stretch>
@@ -8424,7 +8628,7 @@
           <a:bodyPr wrap="square" lIns="0" tIns="0" rIns="0" bIns="0" rtlCol="0" anchor="ctr"/>
           <a:lstStyle/>
           <a:p>
-            <a:pPr indent="0" marL="0">
+            <a:pPr marL="0" indent="0">
               <a:buNone/>
             </a:pPr>
             <a:r>
@@ -8460,7 +8664,7 @@
           <a:bodyPr wrap="square" lIns="0" tIns="0" rIns="0" bIns="0" rtlCol="0" anchor="t"/>
           <a:lstStyle/>
           <a:p>
-            <a:pPr indent="0" marL="0">
+            <a:pPr marL="0" indent="0">
               <a:buNone/>
             </a:pPr>
             <a:r>
@@ -8496,7 +8700,7 @@
           <a:bodyPr wrap="square" lIns="0" tIns="0" rIns="0" bIns="0" rtlCol="0" anchor="t"/>
           <a:lstStyle/>
           <a:p>
-            <a:pPr indent="0" marL="0">
+            <a:pPr marL="0" indent="0">
               <a:buNone/>
             </a:pPr>
             <a:r>
@@ -8532,7 +8736,7 @@
           <a:bodyPr wrap="square" lIns="0" tIns="0" rIns="0" bIns="0" rtlCol="0" anchor="t"/>
           <a:lstStyle/>
           <a:p>
-            <a:pPr indent="0" marL="0">
+            <a:pPr marL="0" indent="0">
               <a:buNone/>
             </a:pPr>
             <a:r>
@@ -8549,7 +8753,7 @@
       </p:sp>
       <p:sp>
         <p:nvSpPr>
-          <p:cNvPr id="25" name="Slide Number Placeholder 0"/>
+          <p:cNvPr id="40" name="Slide Number Placeholder 0"/>
           <p:cNvSpPr>
             <a:spLocks noGrp="1"/>
           </p:cNvSpPr>
@@ -8567,7 +8771,7 @@
           </a:prstGeom>
           <a:extLst>
             <a:ext uri="{C572A759-6A51-4108-AA02-DFA0A04FC94B}">
-              <ma14:wrappingTextBoxFlag xmlns:ma14="http://schemas.microsoft.com/office/mac/drawingml/2011/main" val="0"/>
+              <ma14:wrappingTextBoxFlag xmlns:ma14="http://schemas.microsoft.com/office/mac/drawingml/2011/main" xmlns="" val="0"/>
             </a:ext>
           </a:extLst>
         </p:spPr>
@@ -8585,7 +8789,7 @@
           <a:p>
             <a:pPr algn="r"/>
             <a:fld id="{F7021451-1387-4CA6-816F-3879F97B5CBC}" type="slidenum">
-              <a:rPr b="0" lang="en-US"/>
+              <a:rPr lang="en-US" b="0"/>
               <a:t>6</a:t>
             </a:fld>
             <a:endParaRPr lang="en-US"/>
@@ -8620,9 +8824,11 @@
       <p:sp>
         <p:nvSpPr>
           <p:cNvPr id="2" name="Text 0"/>
-          <p:cNvSpPr/>
+          <p:cNvSpPr>
+            <a:spLocks noGrp="1"/>
+          </p:cNvSpPr>
           <p:nvPr>
-            <p:ph idx="100" type="title" hasCustomPrompt="1"/>
+            <p:ph type="title" idx="100" hasCustomPrompt="1"/>
           </p:nvPr>
         </p:nvSpPr>
         <p:spPr>
@@ -8640,7 +8846,7 @@
           <a:bodyPr wrap="square" lIns="0" tIns="0" rIns="0" bIns="0" rtlCol="0" anchor="ctr"/>
           <a:lstStyle/>
           <a:p>
-            <a:pPr indent="0" marL="0">
+            <a:pPr marL="0" indent="0">
               <a:buNone/>
             </a:pPr>
             <a:r>
@@ -8660,7 +8866,7 @@
       </p:sp>
       <p:graphicFrame>
         <p:nvGraphicFramePr>
-          <p:cNvPr id="3" name="Chart 0" descr=""/>
+          <p:cNvPr id="3" name="Chart 0"/>
           <p:cNvGraphicFramePr/>
           <p:nvPr/>
         </p:nvGraphicFramePr>
@@ -8668,9 +8874,9 @@
           <a:off x="548640" y="1371600"/>
           <a:ext cx="5577840" cy="3749040"/>
         </p:xfrm>
-        <a:graphic xmlns:a="http://schemas.openxmlformats.org/drawingml/2006/main">
+        <a:graphic>
           <a:graphicData uri="http://schemas.openxmlformats.org/drawingml/2006/chart">
-            <c:chart xmlns:c="http://schemas.openxmlformats.org/drawingml/2006/chart" r:id="rId1"/>
+            <c:chart xmlns:c="http://schemas.openxmlformats.org/drawingml/2006/chart" xmlns:r="http://schemas.openxmlformats.org/officeDocument/2006/relationships" r:id="rId3"/>
           </a:graphicData>
         </a:graphic>
       </p:graphicFrame>
@@ -8695,7 +8901,7 @@
           <a:bodyPr wrap="square" lIns="0" tIns="0" rIns="0" bIns="0" rtlCol="0" anchor="t"/>
           <a:lstStyle/>
           <a:p>
-            <a:pPr indent="0" marL="0">
+            <a:pPr marL="0" indent="0">
               <a:buNone/>
             </a:pPr>
             <a:r>
@@ -8736,24 +8942,31 @@
             <a:prstDash val="solid"/>
           </a:ln>
           <a:effectLst>
-            <a:outerShdw sx="100000" sy="100000" kx="0" ky="0" algn="bl" rotWithShape="0" blurRad="101600" dist="25400" dir="5400000">
+            <a:outerShdw blurRad="101600" dist="25400" dir="5400000" algn="bl" rotWithShape="0">
               <a:srgbClr val="000000">
                 <a:alpha val="12000"/>
               </a:srgbClr>
             </a:outerShdw>
           </a:effectLst>
         </p:spPr>
+        <p:txBody>
+          <a:bodyPr/>
+          <a:lstStyle/>
+          <a:p>
+            <a:endParaRPr lang="en-US"/>
+          </a:p>
+        </p:txBody>
       </p:sp>
       <p:pic>
         <p:nvPicPr>
-          <p:cNvPr id="6" name="Validation targets screen" descr="Validation targets screen">    </p:cNvPr>
+          <p:cNvPr id="6" name="Validation targets screen" descr="Validation targets screen"/>
           <p:cNvPicPr>
             <a:picLocks noChangeAspect="1"/>
           </p:cNvPicPr>
           <p:nvPr/>
         </p:nvPicPr>
         <p:blipFill>
-          <a:blip r:embed="rId2"/>
+          <a:blip r:embed="rId4"/>
           <a:stretch>
             <a:fillRect/>
           </a:stretch>
@@ -8789,7 +9002,7 @@
           <a:bodyPr wrap="square" lIns="0" tIns="0" rIns="0" bIns="0" rtlCol="0" anchor="t"/>
           <a:lstStyle/>
           <a:p>
-            <a:pPr indent="0" marL="0">
+            <a:pPr marL="0" indent="0">
               <a:buNone/>
             </a:pPr>
             <a:r>
@@ -8824,7 +9037,7 @@
           </a:prstGeom>
           <a:extLst>
             <a:ext uri="{C572A759-6A51-4108-AA02-DFA0A04FC94B}">
-              <ma14:wrappingTextBoxFlag xmlns:ma14="http://schemas.microsoft.com/office/mac/drawingml/2011/main" val="0"/>
+              <ma14:wrappingTextBoxFlag xmlns:ma14="http://schemas.microsoft.com/office/mac/drawingml/2011/main" xmlns="" val="0"/>
             </a:ext>
           </a:extLst>
         </p:spPr>
@@ -8842,7 +9055,7 @@
           <a:p>
             <a:pPr algn="r"/>
             <a:fld id="{F7021451-1387-4CA6-816F-3879F97B5CBC}" type="slidenum">
-              <a:rPr b="0" lang="en-US"/>
+              <a:rPr lang="en-US" b="0"/>
               <a:t>7</a:t>
             </a:fld>
             <a:endParaRPr lang="en-US"/>
@@ -8877,9 +9090,11 @@
       <p:sp>
         <p:nvSpPr>
           <p:cNvPr id="2" name="Text 0"/>
-          <p:cNvSpPr/>
+          <p:cNvSpPr>
+            <a:spLocks noGrp="1"/>
+          </p:cNvSpPr>
           <p:nvPr>
-            <p:ph idx="100" type="title" hasCustomPrompt="1"/>
+            <p:ph type="title" idx="100" hasCustomPrompt="1"/>
           </p:nvPr>
         </p:nvSpPr>
         <p:spPr>
@@ -8897,7 +9112,7 @@
           <a:bodyPr wrap="square" lIns="0" tIns="0" rIns="0" bIns="0" rtlCol="0" anchor="ctr"/>
           <a:lstStyle/>
           <a:p>
-            <a:pPr indent="0" marL="0">
+            <a:pPr marL="0" indent="0">
               <a:buNone/>
             </a:pPr>
             <a:r>
@@ -8936,6 +9151,13 @@
           </a:solidFill>
           <a:ln/>
         </p:spPr>
+        <p:txBody>
+          <a:bodyPr/>
+          <a:lstStyle/>
+          <a:p>
+            <a:endParaRPr lang="en-US"/>
+          </a:p>
+        </p:txBody>
       </p:sp>
       <p:sp>
         <p:nvSpPr>
@@ -8956,286 +9178,17 @@
           </a:solidFill>
           <a:ln/>
         </p:spPr>
+        <p:txBody>
+          <a:bodyPr/>
+          <a:lstStyle/>
+          <a:p>
+            <a:endParaRPr lang="en-US"/>
+          </a:p>
+        </p:txBody>
       </p:sp>
       <p:pic>
         <p:nvPicPr>
-          <p:cNvPr id="5" name="No debt spiral icon" descr="No debt spiral icon">    </p:cNvPr>
-          <p:cNvPicPr>
-            <a:picLocks noChangeAspect="1"/>
-          </p:cNvPicPr>
-          <p:nvPr/>
-        </p:nvPicPr>
-        <p:blipFill>
-          <a:blip r:embed="rId1"/>
-          <a:stretch>
-            <a:fillRect/>
-          </a:stretch>
-        </p:blipFill>
-        <p:spPr>
-          <a:xfrm>
-            <a:off x="1005840" y="1920240"/>
-            <a:ext cx="365760" cy="365760"/>
-          </a:xfrm>
-          <a:prstGeom prst="rect">
-            <a:avLst/>
-          </a:prstGeom>
-        </p:spPr>
-      </p:pic>
-      <p:sp>
-        <p:nvSpPr>
-          <p:cNvPr id="6" name="Text 3"/>
-          <p:cNvSpPr txBox="1"/>
-          <p:nvPr/>
-        </p:nvSpPr>
-        <p:spPr>
-          <a:xfrm>
-            <a:off x="1783080" y="1618488"/>
-            <a:ext cx="4023360" cy="365760"/>
-          </a:xfrm>
-          <a:prstGeom prst="rect">
-            <a:avLst/>
-          </a:prstGeom>
-          <a:noFill/>
-          <a:ln/>
-        </p:spPr>
-        <p:txBody>
-          <a:bodyPr wrap="square" lIns="0" tIns="0" rIns="0" bIns="0" rtlCol="0" anchor="t"/>
-          <a:lstStyle/>
-          <a:p>
-            <a:pPr indent="0" marL="0">
-              <a:buNone/>
-            </a:pPr>
-            <a:r>
-              <a:rPr lang="en-US" sz="1800" b="1" dirty="0">
-                <a:solidFill>
-                  <a:schemeClr val="tx1"/>
-                </a:solidFill>
-              </a:rPr>
-              <a:t>No debt spiral</a:t>
-            </a:r>
-            <a:endParaRPr lang="en-US" sz="1800" dirty="0"/>
-          </a:p>
-        </p:txBody>
-      </p:sp>
-      <p:sp>
-        <p:nvSpPr>
-          <p:cNvPr id="7" name="Text 4"/>
-          <p:cNvSpPr txBox="1"/>
-          <p:nvPr/>
-        </p:nvSpPr>
-        <p:spPr>
-          <a:xfrm>
-            <a:off x="1783080" y="2011680"/>
-            <a:ext cx="4023360" cy="685800"/>
-          </a:xfrm>
-          <a:prstGeom prst="rect">
-            <a:avLst/>
-          </a:prstGeom>
-          <a:noFill/>
-          <a:ln/>
-        </p:spPr>
-        <p:txBody>
-          <a:bodyPr wrap="square" lIns="0" tIns="0" rIns="0" bIns="0" rtlCol="0" anchor="t"/>
-          <a:lstStyle/>
-          <a:p>
-            <a:pPr indent="0" marL="0">
-              <a:buNone/>
-            </a:pPr>
-            <a:r>
-              <a:rPr lang="en-US" sz="1400" dirty="0">
-                <a:solidFill>
-                  <a:schemeClr val="accent6"/>
-                </a:solidFill>
-              </a:rPr>
-              <a:t>Cap = min(20% of salary, earned − owed). Fee inside earned wages. No interest.</a:t>
-            </a:r>
-            <a:endParaRPr lang="en-US" sz="1400" dirty="0"/>
-          </a:p>
-        </p:txBody>
-      </p:sp>
-      <p:sp>
-        <p:nvSpPr>
-          <p:cNvPr id="8" name="People decide the edges"/>
-          <p:cNvSpPr/>
-          <p:nvPr/>
-        </p:nvSpPr>
-        <p:spPr>
-          <a:xfrm>
-            <a:off x="6172200" y="1417320"/>
-            <a:ext cx="5440680" cy="1371600"/>
-          </a:xfrm>
-          <a:prstGeom prst="roundRect">
-            <a:avLst>
-              <a:gd name="adj" fmla="val 8000"/>
-            </a:avLst>
-          </a:prstGeom>
-          <a:solidFill>
-            <a:schemeClr val="bg2"/>
-          </a:solidFill>
-          <a:ln/>
-        </p:spPr>
-      </p:sp>
-      <p:sp>
-        <p:nvSpPr>
-          <p:cNvPr id="9" name="People decide the edges circle"/>
-          <p:cNvSpPr/>
-          <p:nvPr/>
-        </p:nvSpPr>
-        <p:spPr>
-          <a:xfrm>
-            <a:off x="6446520" y="1737360"/>
-            <a:ext cx="731520" cy="731520"/>
-          </a:xfrm>
-          <a:prstGeom prst="ellipse">
-            <a:avLst/>
-          </a:prstGeom>
-          <a:solidFill>
-            <a:schemeClr val="accent1"/>
-          </a:solidFill>
-          <a:ln/>
-        </p:spPr>
-      </p:sp>
-      <p:pic>
-        <p:nvPicPr>
-          <p:cNvPr id="10" name="People decide the edges icon" descr="People decide the edges icon">    </p:cNvPr>
-          <p:cNvPicPr>
-            <a:picLocks noChangeAspect="1"/>
-          </p:cNvPicPr>
-          <p:nvPr/>
-        </p:nvPicPr>
-        <p:blipFill>
-          <a:blip r:embed="rId2"/>
-          <a:stretch>
-            <a:fillRect/>
-          </a:stretch>
-        </p:blipFill>
-        <p:spPr>
-          <a:xfrm>
-            <a:off x="6629400" y="1920240"/>
-            <a:ext cx="365760" cy="365760"/>
-          </a:xfrm>
-          <a:prstGeom prst="rect">
-            <a:avLst/>
-          </a:prstGeom>
-        </p:spPr>
-      </p:pic>
-      <p:sp>
-        <p:nvSpPr>
-          <p:cNvPr id="11" name="Text 7"/>
-          <p:cNvSpPr txBox="1"/>
-          <p:nvPr/>
-        </p:nvSpPr>
-        <p:spPr>
-          <a:xfrm>
-            <a:off x="7406640" y="1618488"/>
-            <a:ext cx="4023360" cy="365760"/>
-          </a:xfrm>
-          <a:prstGeom prst="rect">
-            <a:avLst/>
-          </a:prstGeom>
-          <a:noFill/>
-          <a:ln/>
-        </p:spPr>
-        <p:txBody>
-          <a:bodyPr wrap="square" lIns="0" tIns="0" rIns="0" bIns="0" rtlCol="0" anchor="t"/>
-          <a:lstStyle/>
-          <a:p>
-            <a:pPr indent="0" marL="0">
-              <a:buNone/>
-            </a:pPr>
-            <a:r>
-              <a:rPr lang="en-US" sz="1800" b="1" dirty="0">
-                <a:solidFill>
-                  <a:schemeClr val="tx1"/>
-                </a:solidFill>
-              </a:rPr>
-              <a:t>People decide the edges</a:t>
-            </a:r>
-            <a:endParaRPr lang="en-US" sz="1800" dirty="0"/>
-          </a:p>
-        </p:txBody>
-      </p:sp>
-      <p:sp>
-        <p:nvSpPr>
-          <p:cNvPr id="12" name="Text 8"/>
-          <p:cNvSpPr txBox="1"/>
-          <p:nvPr/>
-        </p:nvSpPr>
-        <p:spPr>
-          <a:xfrm>
-            <a:off x="7406640" y="2011680"/>
-            <a:ext cx="4023360" cy="685800"/>
-          </a:xfrm>
-          <a:prstGeom prst="rect">
-            <a:avLst/>
-          </a:prstGeom>
-          <a:noFill/>
-          <a:ln/>
-        </p:spPr>
-        <p:txBody>
-          <a:bodyPr wrap="square" lIns="0" tIns="0" rIns="0" bIns="0" rtlCol="0" anchor="t"/>
-          <a:lstStyle/>
-          <a:p>
-            <a:pPr indent="0" marL="0">
-              <a:buNone/>
-            </a:pPr>
-            <a:r>
-              <a:rPr lang="en-US" sz="1400" dirty="0">
-                <a:solidFill>
-                  <a:schemeClr val="accent6"/>
-                </a:solidFill>
-              </a:rPr>
-              <a:t>৳10,000+, tier D and flagged patterns go to a human queue.</a:t>
-            </a:r>
-            <a:endParaRPr lang="en-US" sz="1400" dirty="0"/>
-          </a:p>
-        </p:txBody>
-      </p:sp>
-      <p:sp>
-        <p:nvSpPr>
-          <p:cNvPr id="13" name="Supportive pause"/>
-          <p:cNvSpPr/>
-          <p:nvPr/>
-        </p:nvSpPr>
-        <p:spPr>
-          <a:xfrm>
-            <a:off x="548640" y="2971800"/>
-            <a:ext cx="5440680" cy="1371600"/>
-          </a:xfrm>
-          <a:prstGeom prst="roundRect">
-            <a:avLst>
-              <a:gd name="adj" fmla="val 8000"/>
-            </a:avLst>
-          </a:prstGeom>
-          <a:solidFill>
-            <a:schemeClr val="bg2"/>
-          </a:solidFill>
-          <a:ln/>
-        </p:spPr>
-      </p:sp>
-      <p:sp>
-        <p:nvSpPr>
-          <p:cNvPr id="14" name="Supportive pause circle"/>
-          <p:cNvSpPr/>
-          <p:nvPr/>
-        </p:nvSpPr>
-        <p:spPr>
-          <a:xfrm>
-            <a:off x="822960" y="3291840"/>
-            <a:ext cx="731520" cy="731520"/>
-          </a:xfrm>
-          <a:prstGeom prst="ellipse">
-            <a:avLst/>
-          </a:prstGeom>
-          <a:solidFill>
-            <a:schemeClr val="accent1"/>
-          </a:solidFill>
-          <a:ln/>
-        </p:spPr>
-      </p:sp>
-      <p:pic>
-        <p:nvPicPr>
-          <p:cNvPr id="15" name="Supportive pause icon" descr="Supportive pause icon">    </p:cNvPr>
+          <p:cNvPr id="5" name="No debt spiral icon" descr="No debt spiral icon"/>
           <p:cNvPicPr>
             <a:picLocks noChangeAspect="1"/>
           </p:cNvPicPr>
@@ -9249,7 +9202,7 @@
         </p:blipFill>
         <p:spPr>
           <a:xfrm>
-            <a:off x="1005840" y="3474720"/>
+            <a:off x="1005840" y="1920240"/>
             <a:ext cx="365760" cy="365760"/>
           </a:xfrm>
           <a:prstGeom prst="rect">
@@ -9259,13 +9212,13 @@
       </p:pic>
       <p:sp>
         <p:nvSpPr>
-          <p:cNvPr id="16" name="Text 11"/>
+          <p:cNvPr id="6" name="Text 3"/>
           <p:cNvSpPr txBox="1"/>
           <p:nvPr/>
         </p:nvSpPr>
         <p:spPr>
           <a:xfrm>
-            <a:off x="1783080" y="3172968"/>
+            <a:off x="1783080" y="1618488"/>
             <a:ext cx="4023360" cy="365760"/>
           </a:xfrm>
           <a:prstGeom prst="rect">
@@ -9278,7 +9231,7 @@
           <a:bodyPr wrap="square" lIns="0" tIns="0" rIns="0" bIns="0" rtlCol="0" anchor="t"/>
           <a:lstStyle/>
           <a:p>
-            <a:pPr indent="0" marL="0">
+            <a:pPr marL="0" indent="0">
               <a:buNone/>
             </a:pPr>
             <a:r>
@@ -9287,7 +9240,7 @@
                   <a:schemeClr val="tx1"/>
                 </a:solidFill>
               </a:rPr>
-              <a:t>Supportive pause</a:t>
+              <a:t>No debt spiral</a:t>
             </a:r>
             <a:endParaRPr lang="en-US" sz="1800" dirty="0"/>
           </a:p>
@@ -9295,13 +9248,13 @@
       </p:sp>
       <p:sp>
         <p:nvSpPr>
-          <p:cNvPr id="17" name="Text 12"/>
+          <p:cNvPr id="7" name="Text 4"/>
           <p:cNvSpPr txBox="1"/>
           <p:nvPr/>
         </p:nvSpPr>
         <p:spPr>
           <a:xfrm>
-            <a:off x="1783080" y="3566160"/>
+            <a:off x="1783080" y="2011680"/>
             <a:ext cx="4023360" cy="685800"/>
           </a:xfrm>
           <a:prstGeom prst="rect">
@@ -9314,7 +9267,7 @@
           <a:bodyPr wrap="square" lIns="0" tIns="0" rIns="0" bIns="0" rtlCol="0" anchor="t"/>
           <a:lstStyle/>
           <a:p>
-            <a:pPr indent="0" marL="0">
+            <a:pPr marL="0" indent="0">
               <a:buNone/>
             </a:pPr>
             <a:r>
@@ -9323,7 +9276,7 @@
                   <a:schemeClr val="accent6"/>
                 </a:solidFill>
               </a:rPr>
-              <a:t>After 3 months in a row, a cooling-off month, worded as protection.</a:t>
+              <a:t>Cap = min(20% of salary, earned − owed). Fee inside earned wages. No interest.</a:t>
             </a:r>
             <a:endParaRPr lang="en-US" sz="1400" dirty="0"/>
           </a:p>
@@ -9331,13 +9284,13 @@
       </p:sp>
       <p:sp>
         <p:nvSpPr>
-          <p:cNvPr id="18" name="Fairness audit"/>
+          <p:cNvPr id="8" name="People decide the edges"/>
           <p:cNvSpPr/>
           <p:nvPr/>
         </p:nvSpPr>
         <p:spPr>
           <a:xfrm>
-            <a:off x="6172200" y="2971800"/>
+            <a:off x="6172200" y="1417320"/>
             <a:ext cx="5440680" cy="1371600"/>
           </a:xfrm>
           <a:prstGeom prst="roundRect">
@@ -9350,16 +9303,23 @@
           </a:solidFill>
           <a:ln/>
         </p:spPr>
-      </p:sp>
-      <p:sp>
-        <p:nvSpPr>
-          <p:cNvPr id="19" name="Fairness audit circle"/>
+        <p:txBody>
+          <a:bodyPr/>
+          <a:lstStyle/>
+          <a:p>
+            <a:endParaRPr lang="en-US"/>
+          </a:p>
+        </p:txBody>
+      </p:sp>
+      <p:sp>
+        <p:nvSpPr>
+          <p:cNvPr id="9" name="People decide the edges circle"/>
           <p:cNvSpPr/>
           <p:nvPr/>
         </p:nvSpPr>
         <p:spPr>
           <a:xfrm>
-            <a:off x="6446520" y="3291840"/>
+            <a:off x="6446520" y="1737360"/>
             <a:ext cx="731520" cy="731520"/>
           </a:xfrm>
           <a:prstGeom prst="ellipse">
@@ -9370,10 +9330,17 @@
           </a:solidFill>
           <a:ln/>
         </p:spPr>
+        <p:txBody>
+          <a:bodyPr/>
+          <a:lstStyle/>
+          <a:p>
+            <a:endParaRPr lang="en-US"/>
+          </a:p>
+        </p:txBody>
       </p:sp>
       <p:pic>
         <p:nvPicPr>
-          <p:cNvPr id="20" name="Fairness audit icon" descr="Fairness audit icon">    </p:cNvPr>
+          <p:cNvPr id="10" name="People decide the edges icon" descr="People decide the edges icon"/>
           <p:cNvPicPr>
             <a:picLocks noChangeAspect="1"/>
           </p:cNvPicPr>
@@ -9387,7 +9354,7 @@
         </p:blipFill>
         <p:spPr>
           <a:xfrm>
-            <a:off x="6629400" y="3474720"/>
+            <a:off x="6629400" y="1920240"/>
             <a:ext cx="365760" cy="365760"/>
           </a:xfrm>
           <a:prstGeom prst="rect">
@@ -9397,13 +9364,13 @@
       </p:pic>
       <p:sp>
         <p:nvSpPr>
-          <p:cNvPr id="21" name="Text 15"/>
+          <p:cNvPr id="11" name="Text 7"/>
           <p:cNvSpPr txBox="1"/>
           <p:nvPr/>
         </p:nvSpPr>
         <p:spPr>
           <a:xfrm>
-            <a:off x="7406640" y="3172968"/>
+            <a:off x="7406640" y="1618488"/>
             <a:ext cx="4023360" cy="365760"/>
           </a:xfrm>
           <a:prstGeom prst="rect">
@@ -9416,7 +9383,7 @@
           <a:bodyPr wrap="square" lIns="0" tIns="0" rIns="0" bIns="0" rtlCol="0" anchor="t"/>
           <a:lstStyle/>
           <a:p>
-            <a:pPr indent="0" marL="0">
+            <a:pPr marL="0" indent="0">
               <a:buNone/>
             </a:pPr>
             <a:r>
@@ -9425,7 +9392,7 @@
                   <a:schemeClr val="tx1"/>
                 </a:solidFill>
               </a:rPr>
-              <a:t>Fairness audit</a:t>
+              <a:t>People decide the edges</a:t>
             </a:r>
             <a:endParaRPr lang="en-US" sz="1800" dirty="0"/>
           </a:p>
@@ -9433,13 +9400,13 @@
       </p:sp>
       <p:sp>
         <p:nvSpPr>
-          <p:cNvPr id="22" name="Text 16"/>
+          <p:cNvPr id="12" name="Text 8"/>
           <p:cNvSpPr txBox="1"/>
           <p:nvPr/>
         </p:nvSpPr>
         <p:spPr>
           <a:xfrm>
-            <a:off x="7406640" y="3566160"/>
+            <a:off x="7406640" y="2011680"/>
             <a:ext cx="4023360" cy="685800"/>
           </a:xfrm>
           <a:prstGeom prst="rect">
@@ -9452,7 +9419,7 @@
           <a:bodyPr wrap="square" lIns="0" tIns="0" rIns="0" bIns="0" rtlCol="0" anchor="t"/>
           <a:lstStyle/>
           <a:p>
-            <a:pPr indent="0" marL="0">
+            <a:pPr marL="0" indent="0">
               <a:buNone/>
             </a:pPr>
             <a:r>
@@ -9461,7 +9428,7 @@
                   <a:schemeClr val="accent6"/>
                 </a:solidFill>
               </a:rPr>
-              <a:t>Approval gaps by gender, region and employer size must be ≤ 5 pp or explained.</a:t>
+              <a:t>৳10,000+, tier D and flagged patterns go to a human queue.</a:t>
             </a:r>
             <a:endParaRPr lang="en-US" sz="1400" dirty="0"/>
           </a:p>
@@ -9469,13 +9436,13 @@
       </p:sp>
       <p:sp>
         <p:nvSpPr>
-          <p:cNvPr id="23" name="Capital guard + kill switch"/>
+          <p:cNvPr id="13" name="Supportive pause"/>
           <p:cNvSpPr/>
           <p:nvPr/>
         </p:nvSpPr>
         <p:spPr>
           <a:xfrm>
-            <a:off x="548640" y="4526280"/>
+            <a:off x="548640" y="2971800"/>
             <a:ext cx="5440680" cy="1371600"/>
           </a:xfrm>
           <a:prstGeom prst="roundRect">
@@ -9488,16 +9455,23 @@
           </a:solidFill>
           <a:ln/>
         </p:spPr>
-      </p:sp>
-      <p:sp>
-        <p:nvSpPr>
-          <p:cNvPr id="24" name="Capital guard + kill switch circle"/>
+        <p:txBody>
+          <a:bodyPr/>
+          <a:lstStyle/>
+          <a:p>
+            <a:endParaRPr lang="en-US"/>
+          </a:p>
+        </p:txBody>
+      </p:sp>
+      <p:sp>
+        <p:nvSpPr>
+          <p:cNvPr id="14" name="Supportive pause circle"/>
           <p:cNvSpPr/>
           <p:nvPr/>
         </p:nvSpPr>
         <p:spPr>
           <a:xfrm>
-            <a:off x="822960" y="4846320"/>
+            <a:off x="822960" y="3291840"/>
             <a:ext cx="731520" cy="731520"/>
           </a:xfrm>
           <a:prstGeom prst="ellipse">
@@ -9508,10 +9482,17 @@
           </a:solidFill>
           <a:ln/>
         </p:spPr>
+        <p:txBody>
+          <a:bodyPr/>
+          <a:lstStyle/>
+          <a:p>
+            <a:endParaRPr lang="en-US"/>
+          </a:p>
+        </p:txBody>
       </p:sp>
       <p:pic>
         <p:nvPicPr>
-          <p:cNvPr id="25" name="Capital guard + kill switch icon" descr="Capital guard + kill switch icon">    </p:cNvPr>
+          <p:cNvPr id="15" name="Supportive pause icon" descr="Supportive pause icon"/>
           <p:cNvPicPr>
             <a:picLocks noChangeAspect="1"/>
           </p:cNvPicPr>
@@ -9525,7 +9506,7 @@
         </p:blipFill>
         <p:spPr>
           <a:xfrm>
-            <a:off x="1005840" y="5029200"/>
+            <a:off x="1005840" y="3474720"/>
             <a:ext cx="365760" cy="365760"/>
           </a:xfrm>
           <a:prstGeom prst="rect">
@@ -9535,13 +9516,13 @@
       </p:pic>
       <p:sp>
         <p:nvSpPr>
-          <p:cNvPr id="26" name="Text 19"/>
+          <p:cNvPr id="16" name="Text 11"/>
           <p:cNvSpPr txBox="1"/>
           <p:nvPr/>
         </p:nvSpPr>
         <p:spPr>
           <a:xfrm>
-            <a:off x="1783080" y="4727448"/>
+            <a:off x="1783080" y="3172968"/>
             <a:ext cx="4023360" cy="365760"/>
           </a:xfrm>
           <a:prstGeom prst="rect">
@@ -9554,7 +9535,7 @@
           <a:bodyPr wrap="square" lIns="0" tIns="0" rIns="0" bIns="0" rtlCol="0" anchor="t"/>
           <a:lstStyle/>
           <a:p>
-            <a:pPr indent="0" marL="0">
+            <a:pPr marL="0" indent="0">
               <a:buNone/>
             </a:pPr>
             <a:r>
@@ -9563,7 +9544,7 @@
                   <a:schemeClr val="tx1"/>
                 </a:solidFill>
               </a:rPr>
-              <a:t>Capital guard + kill switch</a:t>
+              <a:t>Supportive pause</a:t>
             </a:r>
             <a:endParaRPr lang="en-US" sz="1800" dirty="0"/>
           </a:p>
@@ -9571,13 +9552,13 @@
       </p:sp>
       <p:sp>
         <p:nvSpPr>
-          <p:cNvPr id="27" name="Text 20"/>
+          <p:cNvPr id="17" name="Text 12"/>
           <p:cNvSpPr txBox="1"/>
           <p:nvPr/>
         </p:nvSpPr>
         <p:spPr>
           <a:xfrm>
-            <a:off x="1783080" y="5120640"/>
+            <a:off x="1783080" y="3566160"/>
             <a:ext cx="4023360" cy="685800"/>
           </a:xfrm>
           <a:prstGeom prst="rect">
@@ -9590,7 +9571,7 @@
           <a:bodyPr wrap="square" lIns="0" tIns="0" rIns="0" bIns="0" rtlCol="0" anchor="t"/>
           <a:lstStyle/>
           <a:p>
-            <a:pPr indent="0" marL="0">
+            <a:pPr marL="0" indent="0">
               <a:buNone/>
             </a:pPr>
             <a:r>
@@ -9599,7 +9580,7 @@
                   <a:schemeClr val="accent6"/>
                 </a:solidFill>
               </a:rPr>
-              <a:t>Pool below P90 + 15% queues requests; one switch pauses all new advances.</a:t>
+              <a:t>After 3 months in a row, a cooling-off month, worded as protection.</a:t>
             </a:r>
             <a:endParaRPr lang="en-US" sz="1400" dirty="0"/>
           </a:p>
@@ -9607,13 +9588,13 @@
       </p:sp>
       <p:sp>
         <p:nvSpPr>
-          <p:cNvPr id="28" name="Explained, in Bangla"/>
+          <p:cNvPr id="18" name="Fairness audit"/>
           <p:cNvSpPr/>
           <p:nvPr/>
         </p:nvSpPr>
         <p:spPr>
           <a:xfrm>
-            <a:off x="6172200" y="4526280"/>
+            <a:off x="6172200" y="2971800"/>
             <a:ext cx="5440680" cy="1371600"/>
           </a:xfrm>
           <a:prstGeom prst="roundRect">
@@ -9626,16 +9607,23 @@
           </a:solidFill>
           <a:ln/>
         </p:spPr>
-      </p:sp>
-      <p:sp>
-        <p:nvSpPr>
-          <p:cNvPr id="29" name="Explained, in Bangla circle"/>
+        <p:txBody>
+          <a:bodyPr/>
+          <a:lstStyle/>
+          <a:p>
+            <a:endParaRPr lang="en-US"/>
+          </a:p>
+        </p:txBody>
+      </p:sp>
+      <p:sp>
+        <p:nvSpPr>
+          <p:cNvPr id="19" name="Fairness audit circle"/>
           <p:cNvSpPr/>
           <p:nvPr/>
         </p:nvSpPr>
         <p:spPr>
           <a:xfrm>
-            <a:off x="6446520" y="4846320"/>
+            <a:off x="6446520" y="3291840"/>
             <a:ext cx="731520" cy="731520"/>
           </a:xfrm>
           <a:prstGeom prst="ellipse">
@@ -9646,10 +9634,17 @@
           </a:solidFill>
           <a:ln/>
         </p:spPr>
+        <p:txBody>
+          <a:bodyPr/>
+          <a:lstStyle/>
+          <a:p>
+            <a:endParaRPr lang="en-US"/>
+          </a:p>
+        </p:txBody>
       </p:sp>
       <p:pic>
         <p:nvPicPr>
-          <p:cNvPr id="30" name="Explained, in Bangla icon" descr="Explained, in Bangla icon">    </p:cNvPr>
+          <p:cNvPr id="20" name="Fairness audit icon" descr="Fairness audit icon"/>
           <p:cNvPicPr>
             <a:picLocks noChangeAspect="1"/>
           </p:cNvPicPr>
@@ -9663,6 +9658,310 @@
         </p:blipFill>
         <p:spPr>
           <a:xfrm>
+            <a:off x="6629400" y="3474720"/>
+            <a:ext cx="365760" cy="365760"/>
+          </a:xfrm>
+          <a:prstGeom prst="rect">
+            <a:avLst/>
+          </a:prstGeom>
+        </p:spPr>
+      </p:pic>
+      <p:sp>
+        <p:nvSpPr>
+          <p:cNvPr id="21" name="Text 15"/>
+          <p:cNvSpPr txBox="1"/>
+          <p:nvPr/>
+        </p:nvSpPr>
+        <p:spPr>
+          <a:xfrm>
+            <a:off x="7406640" y="3172968"/>
+            <a:ext cx="4023360" cy="365760"/>
+          </a:xfrm>
+          <a:prstGeom prst="rect">
+            <a:avLst/>
+          </a:prstGeom>
+          <a:noFill/>
+          <a:ln/>
+        </p:spPr>
+        <p:txBody>
+          <a:bodyPr wrap="square" lIns="0" tIns="0" rIns="0" bIns="0" rtlCol="0" anchor="t"/>
+          <a:lstStyle/>
+          <a:p>
+            <a:pPr marL="0" indent="0">
+              <a:buNone/>
+            </a:pPr>
+            <a:r>
+              <a:rPr lang="en-US" sz="1800" b="1" dirty="0">
+                <a:solidFill>
+                  <a:schemeClr val="tx1"/>
+                </a:solidFill>
+              </a:rPr>
+              <a:t>Fairness audit</a:t>
+            </a:r>
+            <a:endParaRPr lang="en-US" sz="1800" dirty="0"/>
+          </a:p>
+        </p:txBody>
+      </p:sp>
+      <p:sp>
+        <p:nvSpPr>
+          <p:cNvPr id="22" name="Text 16"/>
+          <p:cNvSpPr txBox="1"/>
+          <p:nvPr/>
+        </p:nvSpPr>
+        <p:spPr>
+          <a:xfrm>
+            <a:off x="7406640" y="3566160"/>
+            <a:ext cx="4023360" cy="685800"/>
+          </a:xfrm>
+          <a:prstGeom prst="rect">
+            <a:avLst/>
+          </a:prstGeom>
+          <a:noFill/>
+          <a:ln/>
+        </p:spPr>
+        <p:txBody>
+          <a:bodyPr wrap="square" lIns="0" tIns="0" rIns="0" bIns="0" rtlCol="0" anchor="t"/>
+          <a:lstStyle/>
+          <a:p>
+            <a:pPr marL="0" indent="0">
+              <a:buNone/>
+            </a:pPr>
+            <a:r>
+              <a:rPr lang="en-US" sz="1400" dirty="0">
+                <a:solidFill>
+                  <a:schemeClr val="accent6"/>
+                </a:solidFill>
+              </a:rPr>
+              <a:t>Approval gaps by gender, region and employer size must be ≤ 5 pp or explained.</a:t>
+            </a:r>
+            <a:endParaRPr lang="en-US" sz="1400" dirty="0"/>
+          </a:p>
+        </p:txBody>
+      </p:sp>
+      <p:sp>
+        <p:nvSpPr>
+          <p:cNvPr id="23" name="Capital guard + kill switch"/>
+          <p:cNvSpPr/>
+          <p:nvPr/>
+        </p:nvSpPr>
+        <p:spPr>
+          <a:xfrm>
+            <a:off x="548640" y="4526280"/>
+            <a:ext cx="5440680" cy="1371600"/>
+          </a:xfrm>
+          <a:prstGeom prst="roundRect">
+            <a:avLst>
+              <a:gd name="adj" fmla="val 8000"/>
+            </a:avLst>
+          </a:prstGeom>
+          <a:solidFill>
+            <a:schemeClr val="bg2"/>
+          </a:solidFill>
+          <a:ln/>
+        </p:spPr>
+        <p:txBody>
+          <a:bodyPr/>
+          <a:lstStyle/>
+          <a:p>
+            <a:endParaRPr lang="en-US"/>
+          </a:p>
+        </p:txBody>
+      </p:sp>
+      <p:sp>
+        <p:nvSpPr>
+          <p:cNvPr id="24" name="Capital guard + kill switch circle"/>
+          <p:cNvSpPr/>
+          <p:nvPr/>
+        </p:nvSpPr>
+        <p:spPr>
+          <a:xfrm>
+            <a:off x="822960" y="4846320"/>
+            <a:ext cx="731520" cy="731520"/>
+          </a:xfrm>
+          <a:prstGeom prst="ellipse">
+            <a:avLst/>
+          </a:prstGeom>
+          <a:solidFill>
+            <a:schemeClr val="accent1"/>
+          </a:solidFill>
+          <a:ln/>
+        </p:spPr>
+        <p:txBody>
+          <a:bodyPr/>
+          <a:lstStyle/>
+          <a:p>
+            <a:endParaRPr lang="en-US"/>
+          </a:p>
+        </p:txBody>
+      </p:sp>
+      <p:pic>
+        <p:nvPicPr>
+          <p:cNvPr id="25" name="Capital guard + kill switch icon" descr="Capital guard + kill switch icon"/>
+          <p:cNvPicPr>
+            <a:picLocks noChangeAspect="1"/>
+          </p:cNvPicPr>
+          <p:nvPr/>
+        </p:nvPicPr>
+        <p:blipFill>
+          <a:blip r:embed="rId7"/>
+          <a:stretch>
+            <a:fillRect/>
+          </a:stretch>
+        </p:blipFill>
+        <p:spPr>
+          <a:xfrm>
+            <a:off x="1005840" y="5029200"/>
+            <a:ext cx="365760" cy="365760"/>
+          </a:xfrm>
+          <a:prstGeom prst="rect">
+            <a:avLst/>
+          </a:prstGeom>
+        </p:spPr>
+      </p:pic>
+      <p:sp>
+        <p:nvSpPr>
+          <p:cNvPr id="26" name="Text 19"/>
+          <p:cNvSpPr txBox="1"/>
+          <p:nvPr/>
+        </p:nvSpPr>
+        <p:spPr>
+          <a:xfrm>
+            <a:off x="1783080" y="4727448"/>
+            <a:ext cx="4023360" cy="365760"/>
+          </a:xfrm>
+          <a:prstGeom prst="rect">
+            <a:avLst/>
+          </a:prstGeom>
+          <a:noFill/>
+          <a:ln/>
+        </p:spPr>
+        <p:txBody>
+          <a:bodyPr wrap="square" lIns="0" tIns="0" rIns="0" bIns="0" rtlCol="0" anchor="t"/>
+          <a:lstStyle/>
+          <a:p>
+            <a:pPr marL="0" indent="0">
+              <a:buNone/>
+            </a:pPr>
+            <a:r>
+              <a:rPr lang="en-US" sz="1800" b="1" dirty="0">
+                <a:solidFill>
+                  <a:schemeClr val="tx1"/>
+                </a:solidFill>
+              </a:rPr>
+              <a:t>Capital guard + kill switch</a:t>
+            </a:r>
+            <a:endParaRPr lang="en-US" sz="1800" dirty="0"/>
+          </a:p>
+        </p:txBody>
+      </p:sp>
+      <p:sp>
+        <p:nvSpPr>
+          <p:cNvPr id="27" name="Text 20"/>
+          <p:cNvSpPr txBox="1"/>
+          <p:nvPr/>
+        </p:nvSpPr>
+        <p:spPr>
+          <a:xfrm>
+            <a:off x="1783080" y="5120640"/>
+            <a:ext cx="4023360" cy="685800"/>
+          </a:xfrm>
+          <a:prstGeom prst="rect">
+            <a:avLst/>
+          </a:prstGeom>
+          <a:noFill/>
+          <a:ln/>
+        </p:spPr>
+        <p:txBody>
+          <a:bodyPr wrap="square" lIns="0" tIns="0" rIns="0" bIns="0" rtlCol="0" anchor="t"/>
+          <a:lstStyle/>
+          <a:p>
+            <a:pPr marL="0" indent="0">
+              <a:buNone/>
+            </a:pPr>
+            <a:r>
+              <a:rPr lang="en-US" sz="1400" dirty="0">
+                <a:solidFill>
+                  <a:schemeClr val="accent6"/>
+                </a:solidFill>
+              </a:rPr>
+              <a:t>Pool below P90 + 15% queues requests; one switch pauses all new advances.</a:t>
+            </a:r>
+            <a:endParaRPr lang="en-US" sz="1400" dirty="0"/>
+          </a:p>
+        </p:txBody>
+      </p:sp>
+      <p:sp>
+        <p:nvSpPr>
+          <p:cNvPr id="28" name="Explained, in Bangla"/>
+          <p:cNvSpPr/>
+          <p:nvPr/>
+        </p:nvSpPr>
+        <p:spPr>
+          <a:xfrm>
+            <a:off x="6172200" y="4526280"/>
+            <a:ext cx="5440680" cy="1371600"/>
+          </a:xfrm>
+          <a:prstGeom prst="roundRect">
+            <a:avLst>
+              <a:gd name="adj" fmla="val 8000"/>
+            </a:avLst>
+          </a:prstGeom>
+          <a:solidFill>
+            <a:schemeClr val="bg2"/>
+          </a:solidFill>
+          <a:ln/>
+        </p:spPr>
+        <p:txBody>
+          <a:bodyPr/>
+          <a:lstStyle/>
+          <a:p>
+            <a:endParaRPr lang="en-US"/>
+          </a:p>
+        </p:txBody>
+      </p:sp>
+      <p:sp>
+        <p:nvSpPr>
+          <p:cNvPr id="29" name="Explained, in Bangla circle"/>
+          <p:cNvSpPr/>
+          <p:nvPr/>
+        </p:nvSpPr>
+        <p:spPr>
+          <a:xfrm>
+            <a:off x="6446520" y="4846320"/>
+            <a:ext cx="731520" cy="731520"/>
+          </a:xfrm>
+          <a:prstGeom prst="ellipse">
+            <a:avLst/>
+          </a:prstGeom>
+          <a:solidFill>
+            <a:schemeClr val="accent1"/>
+          </a:solidFill>
+          <a:ln/>
+        </p:spPr>
+        <p:txBody>
+          <a:bodyPr/>
+          <a:lstStyle/>
+          <a:p>
+            <a:endParaRPr lang="en-US"/>
+          </a:p>
+        </p:txBody>
+      </p:sp>
+      <p:pic>
+        <p:nvPicPr>
+          <p:cNvPr id="30" name="Explained, in Bangla icon" descr="Explained, in Bangla icon"/>
+          <p:cNvPicPr>
+            <a:picLocks noChangeAspect="1"/>
+          </p:cNvPicPr>
+          <p:nvPr/>
+        </p:nvPicPr>
+        <p:blipFill>
+          <a:blip r:embed="rId8"/>
+          <a:stretch>
+            <a:fillRect/>
+          </a:stretch>
+        </p:blipFill>
+        <p:spPr>
+          <a:xfrm>
             <a:off x="6629400" y="5029200"/>
             <a:ext cx="365760" cy="365760"/>
           </a:xfrm>
@@ -9692,7 +9991,7 @@
           <a:bodyPr wrap="square" lIns="0" tIns="0" rIns="0" bIns="0" rtlCol="0" anchor="t"/>
           <a:lstStyle/>
           <a:p>
-            <a:pPr indent="0" marL="0">
+            <a:pPr marL="0" indent="0">
               <a:buNone/>
             </a:pPr>
             <a:r>
@@ -9728,7 +10027,7 @@
           <a:bodyPr wrap="square" lIns="0" tIns="0" rIns="0" bIns="0" rtlCol="0" anchor="t"/>
           <a:lstStyle/>
           <a:p>
-            <a:pPr indent="0" marL="0">
+            <a:pPr marL="0" indent="0">
               <a:buNone/>
             </a:pPr>
             <a:r>
@@ -9764,7 +10063,7 @@
           <a:bodyPr wrap="square" lIns="0" tIns="0" rIns="0" bIns="0" rtlCol="0" anchor="t"/>
           <a:lstStyle/>
           <a:p>
-            <a:pPr indent="0" marL="0">
+            <a:pPr marL="0" indent="0">
               <a:buNone/>
             </a:pPr>
             <a:r>
@@ -9781,7 +10080,7 @@
       </p:sp>
       <p:sp>
         <p:nvSpPr>
-          <p:cNvPr id="25" name="Slide Number Placeholder 0"/>
+          <p:cNvPr id="34" name="Slide Number Placeholder 0"/>
           <p:cNvSpPr>
             <a:spLocks noGrp="1"/>
           </p:cNvSpPr>
@@ -9799,7 +10098,7 @@
           </a:prstGeom>
           <a:extLst>
             <a:ext uri="{C572A759-6A51-4108-AA02-DFA0A04FC94B}">
-              <ma14:wrappingTextBoxFlag xmlns:ma14="http://schemas.microsoft.com/office/mac/drawingml/2011/main" val="0"/>
+              <ma14:wrappingTextBoxFlag xmlns:ma14="http://schemas.microsoft.com/office/mac/drawingml/2011/main" xmlns="" val="0"/>
             </a:ext>
           </a:extLst>
         </p:spPr>
@@ -9817,7 +10116,7 @@
           <a:p>
             <a:pPr algn="r"/>
             <a:fld id="{F7021451-1387-4CA6-816F-3879F97B5CBC}" type="slidenum">
-              <a:rPr b="0" lang="en-US"/>
+              <a:rPr lang="en-US" b="0"/>
               <a:t>8</a:t>
             </a:fld>
             <a:endParaRPr lang="en-US"/>
@@ -9852,9 +10151,11 @@
       <p:sp>
         <p:nvSpPr>
           <p:cNvPr id="2" name="Text 0"/>
-          <p:cNvSpPr/>
+          <p:cNvSpPr>
+            <a:spLocks noGrp="1"/>
+          </p:cNvSpPr>
           <p:nvPr>
-            <p:ph idx="100" type="title" hasCustomPrompt="1"/>
+            <p:ph type="title" idx="100" hasCustomPrompt="1"/>
           </p:nvPr>
         </p:nvSpPr>
         <p:spPr>
@@ -9872,7 +10173,7 @@
           <a:bodyPr wrap="square" lIns="0" tIns="0" rIns="0" bIns="0" rtlCol="0" anchor="ctr"/>
           <a:lstStyle/>
           <a:p>
-            <a:pPr indent="0" marL="0">
+            <a:pPr marL="0" indent="0">
               <a:buNone/>
             </a:pPr>
             <a:r>
@@ -9892,7 +10193,7 @@
       </p:sp>
       <p:graphicFrame>
         <p:nvGraphicFramePr>
-          <p:cNvPr id="3" name="Chart 0" descr=""/>
+          <p:cNvPr id="3" name="Chart 0"/>
           <p:cNvGraphicFramePr/>
           <p:nvPr/>
         </p:nvGraphicFramePr>
@@ -9900,9 +10201,9 @@
           <a:off x="548640" y="1371600"/>
           <a:ext cx="6400800" cy="4206240"/>
         </p:xfrm>
-        <a:graphic xmlns:a="http://schemas.openxmlformats.org/drawingml/2006/main">
+        <a:graphic>
           <a:graphicData uri="http://schemas.openxmlformats.org/drawingml/2006/chart">
-            <c:chart xmlns:c="http://schemas.openxmlformats.org/drawingml/2006/chart" r:id="rId1"/>
+            <c:chart xmlns:c="http://schemas.openxmlformats.org/drawingml/2006/chart" xmlns:r="http://schemas.openxmlformats.org/officeDocument/2006/relationships" r:id="rId3"/>
           </a:graphicData>
         </a:graphic>
       </p:graphicFrame>
@@ -9927,6 +10228,13 @@
           </a:solidFill>
           <a:ln/>
         </p:spPr>
+        <p:txBody>
+          <a:bodyPr/>
+          <a:lstStyle/>
+          <a:p>
+            <a:endParaRPr lang="en-US"/>
+          </a:p>
+        </p:txBody>
       </p:sp>
       <p:sp>
         <p:nvSpPr>
@@ -9949,7 +10257,7 @@
           <a:bodyPr wrap="square" lIns="0" tIns="0" rIns="0" bIns="0" rtlCol="0" anchor="ctr"/>
           <a:lstStyle/>
           <a:p>
-            <a:pPr indent="0" marL="0">
+            <a:pPr marL="0" indent="0">
               <a:buNone/>
             </a:pPr>
             <a:r>
@@ -9985,7 +10293,7 @@
           <a:bodyPr wrap="square" lIns="0" tIns="0" rIns="0" bIns="0" rtlCol="0" anchor="ctr"/>
           <a:lstStyle/>
           <a:p>
-            <a:pPr indent="0" marL="0">
+            <a:pPr marL="0" indent="0">
               <a:buNone/>
             </a:pPr>
             <a:r>
@@ -10021,6 +10329,13 @@
           </a:solidFill>
           <a:ln/>
         </p:spPr>
+        <p:txBody>
+          <a:bodyPr/>
+          <a:lstStyle/>
+          <a:p>
+            <a:endParaRPr lang="en-US"/>
+          </a:p>
+        </p:txBody>
       </p:sp>
       <p:sp>
         <p:nvSpPr>
@@ -10043,7 +10358,7 @@
           <a:bodyPr wrap="square" lIns="0" tIns="0" rIns="0" bIns="0" rtlCol="0" anchor="ctr"/>
           <a:lstStyle/>
           <a:p>
-            <a:pPr indent="0" marL="0">
+            <a:pPr marL="0" indent="0">
               <a:buNone/>
             </a:pPr>
             <a:r>
@@ -10079,7 +10394,7 @@
           <a:bodyPr wrap="square" lIns="0" tIns="0" rIns="0" bIns="0" rtlCol="0" anchor="ctr"/>
           <a:lstStyle/>
           <a:p>
-            <a:pPr indent="0" marL="0">
+            <a:pPr marL="0" indent="0">
               <a:buNone/>
             </a:pPr>
             <a:r>
@@ -10115,6 +10430,13 @@
           </a:solidFill>
           <a:ln/>
         </p:spPr>
+        <p:txBody>
+          <a:bodyPr/>
+          <a:lstStyle/>
+          <a:p>
+            <a:endParaRPr lang="en-US"/>
+          </a:p>
+        </p:txBody>
       </p:sp>
       <p:sp>
         <p:nvSpPr>
@@ -10137,7 +10459,7 @@
           <a:bodyPr wrap="square" lIns="0" tIns="0" rIns="0" bIns="0" rtlCol="0" anchor="ctr"/>
           <a:lstStyle/>
           <a:p>
-            <a:pPr indent="0" marL="0">
+            <a:pPr marL="0" indent="0">
               <a:buNone/>
             </a:pPr>
             <a:r>
@@ -10173,7 +10495,7 @@
           <a:bodyPr wrap="square" lIns="0" tIns="0" rIns="0" bIns="0" rtlCol="0" anchor="ctr"/>
           <a:lstStyle/>
           <a:p>
-            <a:pPr indent="0" marL="0">
+            <a:pPr marL="0" indent="0">
               <a:buNone/>
             </a:pPr>
             <a:r>
@@ -10209,7 +10531,7 @@
           <a:bodyPr wrap="square" lIns="0" tIns="0" rIns="0" bIns="0" rtlCol="0" anchor="t"/>
           <a:lstStyle/>
           <a:p>
-            <a:pPr indent="0" marL="0">
+            <a:pPr marL="0" indent="0">
               <a:buNone/>
             </a:pPr>
             <a:r>
@@ -10302,7 +10624,7 @@
           </a:prstGeom>
           <a:extLst>
             <a:ext uri="{C572A759-6A51-4108-AA02-DFA0A04FC94B}">
-              <ma14:wrappingTextBoxFlag xmlns:ma14="http://schemas.microsoft.com/office/mac/drawingml/2011/main" val="0"/>
+              <ma14:wrappingTextBoxFlag xmlns:ma14="http://schemas.microsoft.com/office/mac/drawingml/2011/main" xmlns="" val="0"/>
             </a:ext>
           </a:extLst>
         </p:spPr>
@@ -10320,7 +10642,7 @@
           <a:p>
             <a:pPr algn="r"/>
             <a:fld id="{F7021451-1387-4CA6-816F-3879F97B5CBC}" type="slidenum">
-              <a:rPr b="0" lang="en-US"/>
+              <a:rPr lang="en-US" b="0"/>
               <a:t>9</a:t>
             </a:fld>
             <a:endParaRPr lang="en-US"/>
@@ -10628,4 +10950,319 @@
     </a:ext>
   </a:extLst>
 </a:theme>
+</file>
+
+<file path=ppt/theme/theme2.xml><?xml version="1.0" encoding="utf-8"?>
+<a:theme xmlns:a="http://schemas.openxmlformats.org/drawingml/2006/main" name="Office Theme">
+  <a:themeElements>
+    <a:clrScheme name="Office">
+      <a:dk1>
+        <a:sysClr val="windowText" lastClr="000000"/>
+      </a:dk1>
+      <a:lt1>
+        <a:sysClr val="window" lastClr="FFFFFF"/>
+      </a:lt1>
+      <a:dk2>
+        <a:srgbClr val="0E2841"/>
+      </a:dk2>
+      <a:lt2>
+        <a:srgbClr val="E8E8E8"/>
+      </a:lt2>
+      <a:accent1>
+        <a:srgbClr val="156082"/>
+      </a:accent1>
+      <a:accent2>
+        <a:srgbClr val="E97132"/>
+      </a:accent2>
+      <a:accent3>
+        <a:srgbClr val="196B24"/>
+      </a:accent3>
+      <a:accent4>
+        <a:srgbClr val="0F9ED5"/>
+      </a:accent4>
+      <a:accent5>
+        <a:srgbClr val="A02B93"/>
+      </a:accent5>
+      <a:accent6>
+        <a:srgbClr val="4EA72E"/>
+      </a:accent6>
+      <a:hlink>
+        <a:srgbClr val="467886"/>
+      </a:hlink>
+      <a:folHlink>
+        <a:srgbClr val="96607D"/>
+      </a:folHlink>
+    </a:clrScheme>
+    <a:fontScheme name="Office">
+      <a:majorFont>
+        <a:latin typeface="Aptos Display" panose="02110004020202020204"/>
+        <a:ea typeface=""/>
+        <a:cs typeface=""/>
+        <a:font script="Jpan" typeface="游ゴシック Light"/>
+        <a:font script="Hang" typeface="맑은 고딕"/>
+        <a:font script="Hans" typeface="等线 Light"/>
+        <a:font script="Hant" typeface="新細明體"/>
+        <a:font script="Arab" typeface="Times New Roman"/>
+        <a:font script="Hebr" typeface="Times New Roman"/>
+        <a:font script="Thai" typeface="Angsana New"/>
+        <a:font script="Ethi" typeface="Nyala"/>
+        <a:font script="Beng" typeface="Vrinda"/>
+        <a:font script="Gujr" typeface="Shruti"/>
+        <a:font script="Khmr" typeface="MoolBoran"/>
+        <a:font script="Knda" typeface="Tunga"/>
+        <a:font script="Guru" typeface="Raavi"/>
+        <a:font script="Cans" typeface="Euphemia"/>
+        <a:font script="Cher" typeface="Plantagenet Cherokee"/>
+        <a:font script="Yiii" typeface="Microsoft Yi Baiti"/>
+        <a:font script="Tibt" typeface="Microsoft Himalaya"/>
+        <a:font script="Thaa" typeface="MV Boli"/>
+        <a:font script="Deva" typeface="Mangal"/>
+        <a:font script="Telu" typeface="Gautami"/>
+        <a:font script="Taml" typeface="Latha"/>
+        <a:font script="Syrc" typeface="Estrangelo Edessa"/>
+        <a:font script="Orya" typeface="Kalinga"/>
+        <a:font script="Mlym" typeface="Kartika"/>
+        <a:font script="Laoo" typeface="DokChampa"/>
+        <a:font script="Sinh" typeface="Iskoola Pota"/>
+        <a:font script="Mong" typeface="Mongolian Baiti"/>
+        <a:font script="Viet" typeface="Times New Roman"/>
+        <a:font script="Uigh" typeface="Microsoft Uighur"/>
+        <a:font script="Geor" typeface="Sylfaen"/>
+        <a:font script="Armn" typeface="Arial"/>
+        <a:font script="Bugi" typeface="Leelawadee UI"/>
+        <a:font script="Bopo" typeface="Microsoft JhengHei"/>
+        <a:font script="Java" typeface="Javanese Text"/>
+        <a:font script="Lisu" typeface="Segoe UI"/>
+        <a:font script="Mymr" typeface="Myanmar Text"/>
+        <a:font script="Nkoo" typeface="Ebrima"/>
+        <a:font script="Olck" typeface="Nirmala UI"/>
+        <a:font script="Osma" typeface="Ebrima"/>
+        <a:font script="Phag" typeface="Phagspa"/>
+        <a:font script="Syrn" typeface="Estrangelo Edessa"/>
+        <a:font script="Syrj" typeface="Estrangelo Edessa"/>
+        <a:font script="Syre" typeface="Estrangelo Edessa"/>
+        <a:font script="Sora" typeface="Nirmala UI"/>
+        <a:font script="Tale" typeface="Microsoft Tai Le"/>
+        <a:font script="Talu" typeface="Microsoft New Tai Lue"/>
+        <a:font script="Tfng" typeface="Ebrima"/>
+      </a:majorFont>
+      <a:minorFont>
+        <a:latin typeface="Aptos" panose="02110004020202020204"/>
+        <a:ea typeface=""/>
+        <a:cs typeface=""/>
+        <a:font script="Jpan" typeface="游ゴシック"/>
+        <a:font script="Hang" typeface="맑은 고딕"/>
+        <a:font script="Hans" typeface="等线"/>
+        <a:font script="Hant" typeface="新細明體"/>
+        <a:font script="Arab" typeface="Arial"/>
+        <a:font script="Hebr" typeface="Arial"/>
+        <a:font script="Thai" typeface="Cordia New"/>
+        <a:font script="Ethi" typeface="Nyala"/>
+        <a:font script="Beng" typeface="Vrinda"/>
+        <a:font script="Gujr" typeface="Shruti"/>
+        <a:font script="Khmr" typeface="DaunPenh"/>
+        <a:font script="Knda" typeface="Tunga"/>
+        <a:font script="Guru" typeface="Raavi"/>
+        <a:font script="Cans" typeface="Euphemia"/>
+        <a:font script="Cher" typeface="Plantagenet Cherokee"/>
+        <a:font script="Yiii" typeface="Microsoft Yi Baiti"/>
+        <a:font script="Tibt" typeface="Microsoft Himalaya"/>
+        <a:font script="Thaa" typeface="MV Boli"/>
+        <a:font script="Deva" typeface="Mangal"/>
+        <a:font script="Telu" typeface="Gautami"/>
+        <a:font script="Taml" typeface="Latha"/>
+        <a:font script="Syrc" typeface="Estrangelo Edessa"/>
+        <a:font script="Orya" typeface="Kalinga"/>
+        <a:font script="Mlym" typeface="Kartika"/>
+        <a:font script="Laoo" typeface="DokChampa"/>
+        <a:font script="Sinh" typeface="Iskoola Pota"/>
+        <a:font script="Mong" typeface="Mongolian Baiti"/>
+        <a:font script="Viet" typeface="Arial"/>
+        <a:font script="Uigh" typeface="Microsoft Uighur"/>
+        <a:font script="Geor" typeface="Sylfaen"/>
+        <a:font script="Armn" typeface="Arial"/>
+        <a:font script="Bugi" typeface="Leelawadee UI"/>
+        <a:font script="Bopo" typeface="Microsoft JhengHei"/>
+        <a:font script="Java" typeface="Javanese Text"/>
+        <a:font script="Lisu" typeface="Segoe UI"/>
+        <a:font script="Mymr" typeface="Myanmar Text"/>
+        <a:font script="Nkoo" typeface="Ebrima"/>
+        <a:font script="Olck" typeface="Nirmala UI"/>
+        <a:font script="Osma" typeface="Ebrima"/>
+        <a:font script="Phag" typeface="Phagspa"/>
+        <a:font script="Syrn" typeface="Estrangelo Edessa"/>
+        <a:font script="Syrj" typeface="Estrangelo Edessa"/>
+        <a:font script="Syre" typeface="Estrangelo Edessa"/>
+        <a:font script="Sora" typeface="Nirmala UI"/>
+        <a:font script="Tale" typeface="Microsoft Tai Le"/>
+        <a:font script="Talu" typeface="Microsoft New Tai Lue"/>
+        <a:font script="Tfng" typeface="Ebrima"/>
+      </a:minorFont>
+    </a:fontScheme>
+    <a:fmtScheme name="Office">
+      <a:fillStyleLst>
+        <a:solidFill>
+          <a:schemeClr val="phClr"/>
+        </a:solidFill>
+        <a:gradFill rotWithShape="1">
+          <a:gsLst>
+            <a:gs pos="0">
+              <a:schemeClr val="phClr">
+                <a:lumMod val="110000"/>
+                <a:satMod val="105000"/>
+                <a:tint val="67000"/>
+              </a:schemeClr>
+            </a:gs>
+            <a:gs pos="50000">
+              <a:schemeClr val="phClr">
+                <a:lumMod val="105000"/>
+                <a:satMod val="103000"/>
+                <a:tint val="73000"/>
+              </a:schemeClr>
+            </a:gs>
+            <a:gs pos="100000">
+              <a:schemeClr val="phClr">
+                <a:lumMod val="105000"/>
+                <a:satMod val="109000"/>
+                <a:tint val="81000"/>
+              </a:schemeClr>
+            </a:gs>
+          </a:gsLst>
+          <a:lin ang="5400000" scaled="0"/>
+        </a:gradFill>
+        <a:gradFill rotWithShape="1">
+          <a:gsLst>
+            <a:gs pos="0">
+              <a:schemeClr val="phClr">
+                <a:satMod val="103000"/>
+                <a:lumMod val="102000"/>
+                <a:tint val="94000"/>
+              </a:schemeClr>
+            </a:gs>
+            <a:gs pos="50000">
+              <a:schemeClr val="phClr">
+                <a:satMod val="110000"/>
+                <a:lumMod val="100000"/>
+                <a:shade val="100000"/>
+              </a:schemeClr>
+            </a:gs>
+            <a:gs pos="100000">
+              <a:schemeClr val="phClr">
+                <a:lumMod val="99000"/>
+                <a:satMod val="120000"/>
+                <a:shade val="78000"/>
+              </a:schemeClr>
+            </a:gs>
+          </a:gsLst>
+          <a:lin ang="5400000" scaled="0"/>
+        </a:gradFill>
+      </a:fillStyleLst>
+      <a:lnStyleLst>
+        <a:ln w="12700" cap="flat" cmpd="sng" algn="ctr">
+          <a:solidFill>
+            <a:schemeClr val="phClr"/>
+          </a:solidFill>
+          <a:prstDash val="solid"/>
+          <a:miter lim="800000"/>
+        </a:ln>
+        <a:ln w="19050" cap="flat" cmpd="sng" algn="ctr">
+          <a:solidFill>
+            <a:schemeClr val="phClr"/>
+          </a:solidFill>
+          <a:prstDash val="solid"/>
+          <a:miter lim="800000"/>
+        </a:ln>
+        <a:ln w="25400" cap="flat" cmpd="sng" algn="ctr">
+          <a:solidFill>
+            <a:schemeClr val="phClr"/>
+          </a:solidFill>
+          <a:prstDash val="solid"/>
+          <a:miter lim="800000"/>
+        </a:ln>
+      </a:lnStyleLst>
+      <a:effectStyleLst>
+        <a:effectStyle>
+          <a:effectLst/>
+        </a:effectStyle>
+        <a:effectStyle>
+          <a:effectLst/>
+        </a:effectStyle>
+        <a:effectStyle>
+          <a:effectLst>
+            <a:outerShdw blurRad="57150" dist="19050" dir="5400000" algn="ctr" rotWithShape="0">
+              <a:srgbClr val="000000">
+                <a:alpha val="63000"/>
+              </a:srgbClr>
+            </a:outerShdw>
+          </a:effectLst>
+        </a:effectStyle>
+      </a:effectStyleLst>
+      <a:bgFillStyleLst>
+        <a:solidFill>
+          <a:schemeClr val="phClr"/>
+        </a:solidFill>
+        <a:solidFill>
+          <a:schemeClr val="phClr">
+            <a:tint val="95000"/>
+            <a:satMod val="170000"/>
+          </a:schemeClr>
+        </a:solidFill>
+        <a:gradFill rotWithShape="1">
+          <a:gsLst>
+            <a:gs pos="0">
+              <a:schemeClr val="phClr">
+                <a:tint val="93000"/>
+                <a:satMod val="150000"/>
+                <a:shade val="98000"/>
+                <a:lumMod val="102000"/>
+              </a:schemeClr>
+            </a:gs>
+            <a:gs pos="50000">
+              <a:schemeClr val="phClr">
+                <a:tint val="98000"/>
+                <a:satMod val="130000"/>
+                <a:shade val="90000"/>
+                <a:lumMod val="103000"/>
+              </a:schemeClr>
+            </a:gs>
+            <a:gs pos="100000">
+              <a:schemeClr val="phClr">
+                <a:shade val="63000"/>
+                <a:satMod val="120000"/>
+              </a:schemeClr>
+            </a:gs>
+          </a:gsLst>
+          <a:lin ang="5400000" scaled="0"/>
+        </a:gradFill>
+      </a:bgFillStyleLst>
+    </a:fmtScheme>
+  </a:themeElements>
+  <a:objectDefaults>
+    <a:lnDef>
+      <a:spPr/>
+      <a:bodyPr/>
+      <a:lstStyle/>
+      <a:style>
+        <a:lnRef idx="2">
+          <a:schemeClr val="accent1"/>
+        </a:lnRef>
+        <a:fillRef idx="0">
+          <a:schemeClr val="accent1"/>
+        </a:fillRef>
+        <a:effectRef idx="1">
+          <a:schemeClr val="accent1"/>
+        </a:effectRef>
+        <a:fontRef idx="minor">
+          <a:schemeClr val="tx1"/>
+        </a:fontRef>
+      </a:style>
+    </a:lnDef>
+  </a:objectDefaults>
+  <a:extraClrSchemeLst/>
+  <a:extLst>
+    <a:ext uri="{05A4C25C-085E-4340-85A3-A5531E510DB2}">
+      <thm15:themeFamily xmlns:thm15="http://schemas.microsoft.com/office/thememl/2012/main" name="Office Theme" id="{2E142A2C-CD16-42D6-873A-C26D2A0506FA}" vid="{1BDDFF52-6CD6-40A5-AB3C-68EB2F1E4D0A}"/>
+    </a:ext>
+  </a:extLst>
+</a:theme>
 </file>
--- a/docs/presentation/SalaryBridge.pptx
+++ b/docs/presentation/SalaryBridge.pptx
@@ -2227,7 +2227,7 @@
           </a:prstGeom>
           <a:extLst>
             <a:ext uri="{C572A759-6A51-4108-AA02-DFA0A04FC94B}">
-              <ma14:wrappingTextBoxFlag xmlns:ma14="http://schemas.microsoft.com/office/mac/drawingml/2011/main" xmlns="" val="0"/>
+              <ma14:wrappingTextBoxFlag xmlns="" xmlns:ma14="http://schemas.microsoft.com/office/mac/drawingml/2011/main" val="0"/>
             </a:ext>
           </a:extLst>
         </p:spPr>
@@ -2385,7 +2385,7 @@
           </a:prstGeom>
           <a:extLst>
             <a:ext uri="{C572A759-6A51-4108-AA02-DFA0A04FC94B}">
-              <ma14:wrappingTextBoxFlag xmlns:ma14="http://schemas.microsoft.com/office/mac/drawingml/2011/main" xmlns="" val="0"/>
+              <ma14:wrappingTextBoxFlag xmlns="" xmlns:ma14="http://schemas.microsoft.com/office/mac/drawingml/2011/main" val="0"/>
             </a:ext>
           </a:extLst>
         </p:spPr>
@@ -2460,7 +2460,7 @@
           </a:prstGeom>
           <a:extLst>
             <a:ext uri="{C572A759-6A51-4108-AA02-DFA0A04FC94B}">
-              <ma14:wrappingTextBoxFlag xmlns:ma14="http://schemas.microsoft.com/office/mac/drawingml/2011/main" xmlns="" val="0"/>
+              <ma14:wrappingTextBoxFlag xmlns="" xmlns:ma14="http://schemas.microsoft.com/office/mac/drawingml/2011/main" val="0"/>
             </a:ext>
           </a:extLst>
         </p:spPr>
@@ -3060,7 +3060,7 @@
                   <a:schemeClr val="accent5"/>
                 </a:solidFill>
               </a:rPr>
-              <a:t>Daffodil International University ·  </a:t>
+              <a:t>Daffodil International University </a:t>
             </a:r>
             <a:br>
               <a:rPr lang="en-US" sz="1400" dirty="0">
@@ -3083,7 +3083,15 @@
                   <a:schemeClr val="accent5"/>
                 </a:solidFill>
               </a:rPr>
-              <a:t>rack 03 · Customer Innovation &amp; Financial Independence.</a:t>
+              <a:t>rack 03 · Customer Innovation &amp; </a:t>
+            </a:r>
+            <a:r>
+              <a:rPr lang="en-GB" sz="1400">
+                <a:solidFill>
+                  <a:schemeClr val="accent5"/>
+                </a:solidFill>
+              </a:rPr>
+              <a:t>Financial Independence</a:t>
             </a:r>
             <a:endParaRPr lang="en-US" sz="1400" dirty="0"/>
           </a:p>
@@ -3936,7 +3944,7 @@
                   <a:schemeClr val="accent5"/>
                 </a:solidFill>
               </a:rPr>
-              <a:t>Leader , Frontend, Ai Engineer ·  </a:t>
+              <a:t>Leader, Frontend, AI Engineer </a:t>
             </a:r>
           </a:p>
           <a:p>
@@ -3949,7 +3957,7 @@
                   <a:schemeClr val="accent5"/>
                 </a:solidFill>
               </a:rPr>
-              <a:t>CSE Department, Daffodil International University  ·  quym241-15-053@diu.edu.bd</a:t>
+              <a:t>CSE Department, Daffodil International University  quym241-15-053@diu.edu.bd</a:t>
             </a:r>
             <a:endParaRPr lang="en-US" sz="1300" dirty="0"/>
           </a:p>
@@ -4101,7 +4109,7 @@
                   <a:schemeClr val="accent5"/>
                 </a:solidFill>
               </a:rPr>
-              <a:t>Ai/ML ·  </a:t>
+              <a:t>AI/ML  </a:t>
             </a:r>
           </a:p>
           <a:p>
@@ -4111,7 +4119,7 @@
                   <a:schemeClr val="accent5"/>
                 </a:solidFill>
               </a:rPr>
-              <a:t>CSE Department, Daffodil International University  ·  sajid241-15-909@diu.edu.bd</a:t>
+              <a:t>CSE Department, Daffodil International University   sajid241-15-909@diu.edu.bd</a:t>
             </a:r>
             <a:endParaRPr lang="en-US" sz="1300" dirty="0"/>
           </a:p>
@@ -4260,7 +4268,7 @@
                   <a:schemeClr val="accent5"/>
                 </a:solidFill>
               </a:rPr>
-              <a:t>Backend Engineer  ·  </a:t>
+              <a:t>Backend Engineer   </a:t>
             </a:r>
           </a:p>
           <a:p>
@@ -4270,7 +4278,23 @@
                   <a:schemeClr val="accent5"/>
                 </a:solidFill>
               </a:rPr>
-              <a:t>CSE Department, Daffodil International University  ·  sakib241-15-048@diu.edu.bd</a:t>
+              <a:t>CSE Department, Daffodil International </a:t>
+            </a:r>
+            <a:r>
+              <a:rPr lang="en-US" sz="1300">
+                <a:solidFill>
+                  <a:schemeClr val="accent5"/>
+                </a:solidFill>
+              </a:rPr>
+              <a:t>University   </a:t>
+            </a:r>
+            <a:r>
+              <a:rPr lang="en-US" sz="1300" dirty="0">
+                <a:solidFill>
+                  <a:schemeClr val="accent5"/>
+                </a:solidFill>
+              </a:rPr>
+              <a:t>sakib241-15-048@diu.edu.bd</a:t>
             </a:r>
             <a:endParaRPr lang="en-US" sz="1300" dirty="0"/>
           </a:p>
@@ -4296,7 +4320,7 @@
           </a:prstGeom>
           <a:extLst>
             <a:ext uri="{C572A759-6A51-4108-AA02-DFA0A04FC94B}">
-              <ma14:wrappingTextBoxFlag xmlns:ma14="http://schemas.microsoft.com/office/mac/drawingml/2011/main" xmlns="" val="0"/>
+              <ma14:wrappingTextBoxFlag xmlns="" xmlns:ma14="http://schemas.microsoft.com/office/mac/drawingml/2011/main" val="0"/>
             </a:ext>
           </a:extLst>
         </p:spPr>
@@ -5122,7 +5146,7 @@
           </a:prstGeom>
           <a:extLst>
             <a:ext uri="{C572A759-6A51-4108-AA02-DFA0A04FC94B}">
-              <ma14:wrappingTextBoxFlag xmlns:ma14="http://schemas.microsoft.com/office/mac/drawingml/2011/main" xmlns="" val="0"/>
+              <ma14:wrappingTextBoxFlag xmlns="" xmlns:ma14="http://schemas.microsoft.com/office/mac/drawingml/2011/main" val="0"/>
             </a:ext>
           </a:extLst>
         </p:spPr>
@@ -6446,7 +6470,7 @@
           </a:prstGeom>
           <a:extLst>
             <a:ext uri="{C572A759-6A51-4108-AA02-DFA0A04FC94B}">
-              <ma14:wrappingTextBoxFlag xmlns:ma14="http://schemas.microsoft.com/office/mac/drawingml/2011/main" xmlns="" val="0"/>
+              <ma14:wrappingTextBoxFlag xmlns="" xmlns:ma14="http://schemas.microsoft.com/office/mac/drawingml/2011/main" val="0"/>
             </a:ext>
           </a:extLst>
         </p:spPr>
@@ -6991,7 +7015,7 @@
           </a:prstGeom>
           <a:extLst>
             <a:ext uri="{C572A759-6A51-4108-AA02-DFA0A04FC94B}">
-              <ma14:wrappingTextBoxFlag xmlns:ma14="http://schemas.microsoft.com/office/mac/drawingml/2011/main" xmlns="" val="0"/>
+              <ma14:wrappingTextBoxFlag xmlns="" xmlns:ma14="http://schemas.microsoft.com/office/mac/drawingml/2011/main" val="0"/>
             </a:ext>
           </a:extLst>
         </p:spPr>
@@ -7422,7 +7446,7 @@
           </a:prstGeom>
           <a:extLst>
             <a:ext uri="{C572A759-6A51-4108-AA02-DFA0A04FC94B}">
-              <ma14:wrappingTextBoxFlag xmlns:ma14="http://schemas.microsoft.com/office/mac/drawingml/2011/main" xmlns="" val="0"/>
+              <ma14:wrappingTextBoxFlag xmlns="" xmlns:ma14="http://schemas.microsoft.com/office/mac/drawingml/2011/main" val="0"/>
             </a:ext>
           </a:extLst>
         </p:spPr>
@@ -8771,7 +8795,7 @@
           </a:prstGeom>
           <a:extLst>
             <a:ext uri="{C572A759-6A51-4108-AA02-DFA0A04FC94B}">
-              <ma14:wrappingTextBoxFlag xmlns:ma14="http://schemas.microsoft.com/office/mac/drawingml/2011/main" xmlns="" val="0"/>
+              <ma14:wrappingTextBoxFlag xmlns="" xmlns:ma14="http://schemas.microsoft.com/office/mac/drawingml/2011/main" val="0"/>
             </a:ext>
           </a:extLst>
         </p:spPr>
@@ -9037,7 +9061,7 @@
           </a:prstGeom>
           <a:extLst>
             <a:ext uri="{C572A759-6A51-4108-AA02-DFA0A04FC94B}">
-              <ma14:wrappingTextBoxFlag xmlns:ma14="http://schemas.microsoft.com/office/mac/drawingml/2011/main" xmlns="" val="0"/>
+              <ma14:wrappingTextBoxFlag xmlns="" xmlns:ma14="http://schemas.microsoft.com/office/mac/drawingml/2011/main" val="0"/>
             </a:ext>
           </a:extLst>
         </p:spPr>
@@ -10098,7 +10122,7 @@
           </a:prstGeom>
           <a:extLst>
             <a:ext uri="{C572A759-6A51-4108-AA02-DFA0A04FC94B}">
-              <ma14:wrappingTextBoxFlag xmlns:ma14="http://schemas.microsoft.com/office/mac/drawingml/2011/main" xmlns="" val="0"/>
+              <ma14:wrappingTextBoxFlag xmlns="" xmlns:ma14="http://schemas.microsoft.com/office/mac/drawingml/2011/main" val="0"/>
             </a:ext>
           </a:extLst>
         </p:spPr>
@@ -10624,7 +10648,7 @@
           </a:prstGeom>
           <a:extLst>
             <a:ext uri="{C572A759-6A51-4108-AA02-DFA0A04FC94B}">
-              <ma14:wrappingTextBoxFlag xmlns:ma14="http://schemas.microsoft.com/office/mac/drawingml/2011/main" xmlns="" val="0"/>
+              <ma14:wrappingTextBoxFlag xmlns="" xmlns:ma14="http://schemas.microsoft.com/office/mac/drawingml/2011/main" val="0"/>
             </a:ext>
           </a:extLst>
         </p:spPr>
